--- a/docs/pptx/auc3/jx-auc3-linsubhr-sens-sideeffect.pptx
+++ b/docs/pptx/auc3/jx-auc3-linsubhr-sens-sideeffect.pptx
@@ -5327,7 +5327,7 @@
           <p:spPr>
             <a:xfrm>
               <a:off x="817517" y="1896563"/>
-              <a:ext cx="6236116" cy="82021"/>
+              <a:ext cx="6833128" cy="82021"/>
             </a:xfrm>
             <a:prstGeom prst="rect">
               <a:avLst/>
@@ -5359,7 +5359,7 @@
                   <a:latin typeface="Helvetica"/>
                   <a:cs typeface="Helvetica"/>
                 </a:rPr>
-                <a:t>subHR per 0.1 ratio decline: 1.31 (1.13-1.52), p = &lt;0.001  |  per IQR decline (Δ = 0.28): 2.15 (1.42-3.27)  |  IQR: [0.70, 0.98]</a:t>
+                <a:t>subHR per 0.1 ratio decline: 1.31 (1.13-1.52), p_Bonf = 0.002 (n = 6)  |  per IQR decline (Δ = 0.28): 2.15 (1.42-3.27)  |  IQR: [0.70, 0.98]</a:t>
               </a:r>
             </a:p>
           </p:txBody>

--- a/docs/pptx/auc3/jx-auc3-linsubhr-sens-sideeffect.pptx
+++ b/docs/pptx/auc3/jx-auc3-linsubhr-sens-sideeffect.pptx
@@ -5050,8 +5050,8 @@
           </p:nvSpPr>
           <p:spPr>
             <a:xfrm>
-              <a:off x="2137719" y="5785772"/>
-              <a:ext cx="155356" cy="80101"/>
+              <a:off x="2134610" y="5785772"/>
+              <a:ext cx="161574" cy="80101"/>
             </a:xfrm>
             <a:prstGeom prst="rect">
               <a:avLst/>
@@ -5083,7 +5083,7 @@
                   <a:latin typeface="Helvetica"/>
                   <a:cs typeface="Helvetica"/>
                 </a:rPr>
-                <a:t>0.6</a:t>
+                <a:t>-40</a:t>
               </a:r>
             </a:p>
           </p:txBody>
@@ -5096,8 +5096,8 @@
           </p:nvSpPr>
           <p:spPr>
             <a:xfrm>
-              <a:off x="3878840" y="5785772"/>
-              <a:ext cx="155356" cy="80101"/>
+              <a:off x="3875731" y="5785772"/>
+              <a:ext cx="161574" cy="80101"/>
             </a:xfrm>
             <a:prstGeom prst="rect">
               <a:avLst/>
@@ -5129,7 +5129,7 @@
                   <a:latin typeface="Helvetica"/>
                   <a:cs typeface="Helvetica"/>
                 </a:rPr>
-                <a:t>0.8</a:t>
+                <a:t>-20</a:t>
               </a:r>
             </a:p>
           </p:txBody>
@@ -5142,8 +5142,8 @@
           </p:nvSpPr>
           <p:spPr>
             <a:xfrm>
-              <a:off x="5619961" y="5785772"/>
-              <a:ext cx="155356" cy="80101"/>
+              <a:off x="5666549" y="5785772"/>
+              <a:ext cx="62179" cy="80101"/>
             </a:xfrm>
             <a:prstGeom prst="rect">
               <a:avLst/>
@@ -5175,7 +5175,7 @@
                   <a:latin typeface="Helvetica"/>
                   <a:cs typeface="Helvetica"/>
                 </a:rPr>
-                <a:t>1.0</a:t>
+                <a:t>0</a:t>
               </a:r>
             </a:p>
           </p:txBody>
@@ -5188,8 +5188,8 @@
           </p:nvSpPr>
           <p:spPr>
             <a:xfrm>
-              <a:off x="7361081" y="5785772"/>
-              <a:ext cx="155356" cy="80101"/>
+              <a:off x="7376580" y="5785772"/>
+              <a:ext cx="124358" cy="80101"/>
             </a:xfrm>
             <a:prstGeom prst="rect">
               <a:avLst/>
@@ -5221,7 +5221,7 @@
                   <a:latin typeface="Helvetica"/>
                   <a:cs typeface="Helvetica"/>
                 </a:rPr>
-                <a:t>1.2</a:t>
+                <a:t>20</a:t>
               </a:r>
             </a:p>
           </p:txBody>
@@ -5234,8 +5234,8 @@
           </p:nvSpPr>
           <p:spPr>
             <a:xfrm>
-              <a:off x="2691419" y="5925448"/>
-              <a:ext cx="4051889" cy="100218"/>
+              <a:off x="1561815" y="5925448"/>
+              <a:ext cx="6311097" cy="100218"/>
             </a:xfrm>
             <a:prstGeom prst="rect">
               <a:avLst/>
@@ -5267,7 +5267,7 @@
                   <a:latin typeface="Helvetica"/>
                   <a:cs typeface="Helvetica"/>
                 </a:rPr>
-                <a:t>Sensitivity eGFR Ratio (CKD-EPI 2012 CysC / CKD-EPI 2021 Cr)</a:t>
+                <a:t>Sensitivity eGFR Difference (%): 100 × (CKD-EPI 2012 CysC − CKD-EPI 2021 Cr) / CKD-EPI 2021 Cr</a:t>
               </a:r>
             </a:p>
           </p:txBody>
@@ -5327,7 +5327,7 @@
           <p:spPr>
             <a:xfrm>
               <a:off x="817517" y="1896563"/>
-              <a:ext cx="6833128" cy="82021"/>
+              <a:ext cx="6959864" cy="82021"/>
             </a:xfrm>
             <a:prstGeom prst="rect">
               <a:avLst/>
@@ -5359,7 +5359,7 @@
                   <a:latin typeface="Helvetica"/>
                   <a:cs typeface="Helvetica"/>
                 </a:rPr>
-                <a:t>subHR per 0.1 ratio decline: 1.31 (1.13-1.52), p_Bonf = 0.002 (n = 6)  |  per IQR decline (Δ = 0.28): 2.15 (1.42-3.27)  |  IQR: [0.70, 0.98]</a:t>
+                <a:t>subHR per 10 % decline: 1.31 (1.13-1.52), p_Bonf = 0.002 (n = 6)  |  per IQR decline (Δ = 28.1 %): 2.15 (1.42-3.27)  |  IQR: [-30.1, -2.1] %</a:t>
               </a:r>
             </a:p>
           </p:txBody>

--- a/docs/pptx/auc3/jx-auc3-linsubhr-sens-sideeffect.pptx
+++ b/docs/pptx/auc3/jx-auc3-linsubhr-sens-sideeffect.pptx
@@ -2265,34 +2265,26 @@
         </p:sp>
         <p:sp>
           <p:nvSpPr>
-            <p:cNvPr id="4" name="pl4"/>
+            <p:cNvPr id="4" name="rc4"/>
             <p:cNvSpPr/>
             <p:nvPr/>
           </p:nvSpPr>
           <p:spPr>
             <a:xfrm>
-              <a:off x="817517" y="5142518"/>
-              <a:ext cx="7799693" cy="0"/>
+              <a:off x="457200" y="1600200"/>
+              <a:ext cx="8229600" cy="4525962"/>
             </a:xfrm>
-            <a:custGeom>
+            <a:prstGeom prst="rect">
               <a:avLst/>
-              <a:pathLst>
-                <a:path w="7799693" h="0">
-                  <a:moveTo>
-                    <a:pt x="0" y="0"/>
-                  </a:moveTo>
-                  <a:lnTo>
-                    <a:pt x="7799693" y="0"/>
-                  </a:lnTo>
-                  <a:lnTo>
-                    <a:pt x="7799693" y="0"/>
-                  </a:lnTo>
-                </a:path>
-              </a:pathLst>
-            </a:custGeom>
-            <a:ln w="6775" cap="flat">
+            </a:prstGeom>
+            <a:solidFill>
+              <a:srgbClr val="FFFFFF">
+                <a:alpha val="100000"/>
+              </a:srgbClr>
+            </a:solidFill>
+            <a:ln w="13550" cap="rnd">
               <a:solidFill>
-                <a:srgbClr val="EBEBEB">
+                <a:srgbClr val="FFFFFF">
                   <a:alpha val="100000"/>
                 </a:srgbClr>
               </a:solidFill>
@@ -2314,21 +2306,21 @@
           </p:nvSpPr>
           <p:spPr>
             <a:xfrm>
-              <a:off x="817517" y="4313054"/>
-              <a:ext cx="7799693" cy="0"/>
+              <a:off x="887106" y="3250627"/>
+              <a:ext cx="7660515" cy="0"/>
             </a:xfrm>
             <a:custGeom>
               <a:avLst/>
               <a:pathLst>
-                <a:path w="7799693" h="0">
+                <a:path w="7660515" h="0">
                   <a:moveTo>
                     <a:pt x="0" y="0"/>
                   </a:moveTo>
                   <a:lnTo>
-                    <a:pt x="7799693" y="0"/>
-                  </a:lnTo>
-                  <a:lnTo>
-                    <a:pt x="7799693" y="0"/>
+                    <a:pt x="7660515" y="0"/>
+                  </a:lnTo>
+                  <a:lnTo>
+                    <a:pt x="7660515" y="0"/>
                   </a:lnTo>
                 </a:path>
               </a:pathLst>
@@ -2357,21 +2349,21 @@
           </p:nvSpPr>
           <p:spPr>
             <a:xfrm>
-              <a:off x="817517" y="3483591"/>
-              <a:ext cx="7799693" cy="0"/>
+              <a:off x="887106" y="2951293"/>
+              <a:ext cx="7660515" cy="0"/>
             </a:xfrm>
             <a:custGeom>
               <a:avLst/>
               <a:pathLst>
-                <a:path w="7799693" h="0">
+                <a:path w="7660515" h="0">
                   <a:moveTo>
                     <a:pt x="0" y="0"/>
                   </a:moveTo>
                   <a:lnTo>
-                    <a:pt x="7799693" y="0"/>
-                  </a:lnTo>
-                  <a:lnTo>
-                    <a:pt x="7799693" y="0"/>
+                    <a:pt x="7660515" y="0"/>
+                  </a:lnTo>
+                  <a:lnTo>
+                    <a:pt x="7660515" y="0"/>
                   </a:lnTo>
                 </a:path>
               </a:pathLst>
@@ -2400,21 +2392,21 @@
           </p:nvSpPr>
           <p:spPr>
             <a:xfrm>
-              <a:off x="817517" y="2654127"/>
-              <a:ext cx="7799693" cy="0"/>
+              <a:off x="887106" y="2651959"/>
+              <a:ext cx="7660515" cy="0"/>
             </a:xfrm>
             <a:custGeom>
               <a:avLst/>
               <a:pathLst>
-                <a:path w="7799693" h="0">
+                <a:path w="7660515" h="0">
                   <a:moveTo>
                     <a:pt x="0" y="0"/>
                   </a:moveTo>
                   <a:lnTo>
-                    <a:pt x="7799693" y="0"/>
-                  </a:lnTo>
-                  <a:lnTo>
-                    <a:pt x="7799693" y="0"/>
+                    <a:pt x="7660515" y="0"/>
+                  </a:lnTo>
+                  <a:lnTo>
+                    <a:pt x="7660515" y="0"/>
                   </a:lnTo>
                 </a:path>
               </a:pathLst>
@@ -2443,21 +2435,21 @@
           </p:nvSpPr>
           <p:spPr>
             <a:xfrm>
-              <a:off x="1344837" y="2073503"/>
-              <a:ext cx="0" cy="3649639"/>
+              <a:off x="887106" y="2352625"/>
+              <a:ext cx="7660515" cy="0"/>
             </a:xfrm>
             <a:custGeom>
               <a:avLst/>
               <a:pathLst>
-                <a:path w="0" h="3649639">
+                <a:path w="7660515" h="0">
                   <a:moveTo>
-                    <a:pt x="0" y="3649639"/>
+                    <a:pt x="0" y="0"/>
                   </a:moveTo>
                   <a:lnTo>
-                    <a:pt x="0" y="0"/>
-                  </a:lnTo>
-                  <a:lnTo>
-                    <a:pt x="0" y="0"/>
+                    <a:pt x="7660515" y="0"/>
+                  </a:lnTo>
+                  <a:lnTo>
+                    <a:pt x="7660515" y="0"/>
                   </a:lnTo>
                 </a:path>
               </a:pathLst>
@@ -2486,15 +2478,15 @@
           </p:nvSpPr>
           <p:spPr>
             <a:xfrm>
-              <a:off x="3085958" y="2073503"/>
-              <a:ext cx="0" cy="3649639"/>
+              <a:off x="1405017" y="2143092"/>
+              <a:ext cx="0" cy="1317069"/>
             </a:xfrm>
             <a:custGeom>
               <a:avLst/>
               <a:pathLst>
-                <a:path w="0" h="3649639">
+                <a:path w="0" h="1317069">
                   <a:moveTo>
-                    <a:pt x="0" y="3649639"/>
+                    <a:pt x="0" y="1317069"/>
                   </a:moveTo>
                   <a:lnTo>
                     <a:pt x="0" y="0"/>
@@ -2529,15 +2521,15 @@
           </p:nvSpPr>
           <p:spPr>
             <a:xfrm>
-              <a:off x="4827079" y="2073503"/>
-              <a:ext cx="0" cy="3649639"/>
+              <a:off x="3115069" y="2143092"/>
+              <a:ext cx="0" cy="1317069"/>
             </a:xfrm>
             <a:custGeom>
               <a:avLst/>
               <a:pathLst>
-                <a:path w="0" h="3649639">
+                <a:path w="0" h="1317069">
                   <a:moveTo>
-                    <a:pt x="0" y="3649639"/>
+                    <a:pt x="0" y="1317069"/>
                   </a:moveTo>
                   <a:lnTo>
                     <a:pt x="0" y="0"/>
@@ -2572,15 +2564,15 @@
           </p:nvSpPr>
           <p:spPr>
             <a:xfrm>
-              <a:off x="6568199" y="2073503"/>
-              <a:ext cx="0" cy="3649639"/>
+              <a:off x="4825121" y="2143092"/>
+              <a:ext cx="0" cy="1317069"/>
             </a:xfrm>
             <a:custGeom>
               <a:avLst/>
               <a:pathLst>
-                <a:path w="0" h="3649639">
+                <a:path w="0" h="1317069">
                   <a:moveTo>
-                    <a:pt x="0" y="3649639"/>
+                    <a:pt x="0" y="1317069"/>
                   </a:moveTo>
                   <a:lnTo>
                     <a:pt x="0" y="0"/>
@@ -2615,15 +2607,15 @@
           </p:nvSpPr>
           <p:spPr>
             <a:xfrm>
-              <a:off x="8309320" y="2073503"/>
-              <a:ext cx="0" cy="3649639"/>
+              <a:off x="6535173" y="2143092"/>
+              <a:ext cx="0" cy="1317069"/>
             </a:xfrm>
             <a:custGeom>
               <a:avLst/>
               <a:pathLst>
-                <a:path w="0" h="3649639">
+                <a:path w="0" h="1317069">
                   <a:moveTo>
-                    <a:pt x="0" y="3649639"/>
+                    <a:pt x="0" y="1317069"/>
                   </a:moveTo>
                   <a:lnTo>
                     <a:pt x="0" y="0"/>
@@ -2658,26 +2650,26 @@
           </p:nvSpPr>
           <p:spPr>
             <a:xfrm>
-              <a:off x="817517" y="5557249"/>
-              <a:ext cx="7799693" cy="0"/>
+              <a:off x="8245225" y="2143092"/>
+              <a:ext cx="0" cy="1317069"/>
             </a:xfrm>
             <a:custGeom>
               <a:avLst/>
               <a:pathLst>
-                <a:path w="7799693" h="0">
+                <a:path w="0" h="1317069">
                   <a:moveTo>
+                    <a:pt x="0" y="1317069"/>
+                  </a:moveTo>
+                  <a:lnTo>
                     <a:pt x="0" y="0"/>
-                  </a:moveTo>
-                  <a:lnTo>
-                    <a:pt x="7799693" y="0"/>
-                  </a:lnTo>
-                  <a:lnTo>
-                    <a:pt x="7799693" y="0"/>
+                  </a:lnTo>
+                  <a:lnTo>
+                    <a:pt x="0" y="0"/>
                   </a:lnTo>
                 </a:path>
               </a:pathLst>
             </a:custGeom>
-            <a:ln w="13550" cap="flat">
+            <a:ln w="6775" cap="flat">
               <a:solidFill>
                 <a:srgbClr val="EBEBEB">
                   <a:alpha val="100000"/>
@@ -2701,21 +2693,21 @@
           </p:nvSpPr>
           <p:spPr>
             <a:xfrm>
-              <a:off x="817517" y="4727786"/>
-              <a:ext cx="7799693" cy="0"/>
+              <a:off x="887106" y="3400294"/>
+              <a:ext cx="7660515" cy="0"/>
             </a:xfrm>
             <a:custGeom>
               <a:avLst/>
               <a:pathLst>
-                <a:path w="7799693" h="0">
+                <a:path w="7660515" h="0">
                   <a:moveTo>
                     <a:pt x="0" y="0"/>
                   </a:moveTo>
                   <a:lnTo>
-                    <a:pt x="7799693" y="0"/>
-                  </a:lnTo>
-                  <a:lnTo>
-                    <a:pt x="7799693" y="0"/>
+                    <a:pt x="7660515" y="0"/>
+                  </a:lnTo>
+                  <a:lnTo>
+                    <a:pt x="7660515" y="0"/>
                   </a:lnTo>
                 </a:path>
               </a:pathLst>
@@ -2744,21 +2736,21 @@
           </p:nvSpPr>
           <p:spPr>
             <a:xfrm>
-              <a:off x="817517" y="3898322"/>
-              <a:ext cx="7799693" cy="0"/>
+              <a:off x="887106" y="3100960"/>
+              <a:ext cx="7660515" cy="0"/>
             </a:xfrm>
             <a:custGeom>
               <a:avLst/>
               <a:pathLst>
-                <a:path w="7799693" h="0">
+                <a:path w="7660515" h="0">
                   <a:moveTo>
                     <a:pt x="0" y="0"/>
                   </a:moveTo>
                   <a:lnTo>
-                    <a:pt x="7799693" y="0"/>
-                  </a:lnTo>
-                  <a:lnTo>
-                    <a:pt x="7799693" y="0"/>
+                    <a:pt x="7660515" y="0"/>
+                  </a:lnTo>
+                  <a:lnTo>
+                    <a:pt x="7660515" y="0"/>
                   </a:lnTo>
                 </a:path>
               </a:pathLst>
@@ -2787,21 +2779,21 @@
           </p:nvSpPr>
           <p:spPr>
             <a:xfrm>
-              <a:off x="817517" y="3068859"/>
-              <a:ext cx="7799693" cy="0"/>
+              <a:off x="887106" y="2801626"/>
+              <a:ext cx="7660515" cy="0"/>
             </a:xfrm>
             <a:custGeom>
               <a:avLst/>
               <a:pathLst>
-                <a:path w="7799693" h="0">
+                <a:path w="7660515" h="0">
                   <a:moveTo>
                     <a:pt x="0" y="0"/>
                   </a:moveTo>
                   <a:lnTo>
-                    <a:pt x="7799693" y="0"/>
-                  </a:lnTo>
-                  <a:lnTo>
-                    <a:pt x="7799693" y="0"/>
+                    <a:pt x="7660515" y="0"/>
+                  </a:lnTo>
+                  <a:lnTo>
+                    <a:pt x="7660515" y="0"/>
                   </a:lnTo>
                 </a:path>
               </a:pathLst>
@@ -2830,21 +2822,21 @@
           </p:nvSpPr>
           <p:spPr>
             <a:xfrm>
-              <a:off x="817517" y="2239395"/>
-              <a:ext cx="7799693" cy="0"/>
+              <a:off x="887106" y="2502292"/>
+              <a:ext cx="7660515" cy="0"/>
             </a:xfrm>
             <a:custGeom>
               <a:avLst/>
               <a:pathLst>
-                <a:path w="7799693" h="0">
+                <a:path w="7660515" h="0">
                   <a:moveTo>
                     <a:pt x="0" y="0"/>
                   </a:moveTo>
                   <a:lnTo>
-                    <a:pt x="7799693" y="0"/>
-                  </a:lnTo>
-                  <a:lnTo>
-                    <a:pt x="7799693" y="0"/>
+                    <a:pt x="7660515" y="0"/>
+                  </a:lnTo>
+                  <a:lnTo>
+                    <a:pt x="7660515" y="0"/>
                   </a:lnTo>
                 </a:path>
               </a:pathLst>
@@ -2873,21 +2865,21 @@
           </p:nvSpPr>
           <p:spPr>
             <a:xfrm>
-              <a:off x="2215398" y="2073503"/>
-              <a:ext cx="0" cy="3649639"/>
+              <a:off x="887106" y="2202958"/>
+              <a:ext cx="7660515" cy="0"/>
             </a:xfrm>
             <a:custGeom>
               <a:avLst/>
               <a:pathLst>
-                <a:path w="0" h="3649639">
+                <a:path w="7660515" h="0">
                   <a:moveTo>
-                    <a:pt x="0" y="3649639"/>
+                    <a:pt x="0" y="0"/>
                   </a:moveTo>
                   <a:lnTo>
-                    <a:pt x="0" y="0"/>
-                  </a:lnTo>
-                  <a:lnTo>
-                    <a:pt x="0" y="0"/>
+                    <a:pt x="7660515" y="0"/>
+                  </a:lnTo>
+                  <a:lnTo>
+                    <a:pt x="7660515" y="0"/>
                   </a:lnTo>
                 </a:path>
               </a:pathLst>
@@ -2916,15 +2908,15 @@
           </p:nvSpPr>
           <p:spPr>
             <a:xfrm>
-              <a:off x="3956518" y="2073503"/>
-              <a:ext cx="0" cy="3649639"/>
+              <a:off x="2260043" y="2143092"/>
+              <a:ext cx="0" cy="1317069"/>
             </a:xfrm>
             <a:custGeom>
               <a:avLst/>
               <a:pathLst>
-                <a:path w="0" h="3649639">
+                <a:path w="0" h="1317069">
                   <a:moveTo>
-                    <a:pt x="0" y="3649639"/>
+                    <a:pt x="0" y="1317069"/>
                   </a:moveTo>
                   <a:lnTo>
                     <a:pt x="0" y="0"/>
@@ -2959,15 +2951,15 @@
           </p:nvSpPr>
           <p:spPr>
             <a:xfrm>
-              <a:off x="5697639" y="2073503"/>
-              <a:ext cx="0" cy="3649639"/>
+              <a:off x="3970095" y="2143092"/>
+              <a:ext cx="0" cy="1317069"/>
             </a:xfrm>
             <a:custGeom>
               <a:avLst/>
               <a:pathLst>
-                <a:path w="0" h="3649639">
+                <a:path w="0" h="1317069">
                   <a:moveTo>
-                    <a:pt x="0" y="3649639"/>
+                    <a:pt x="0" y="1317069"/>
                   </a:moveTo>
                   <a:lnTo>
                     <a:pt x="0" y="0"/>
@@ -3002,15 +2994,15 @@
           </p:nvSpPr>
           <p:spPr>
             <a:xfrm>
-              <a:off x="7438760" y="2073503"/>
-              <a:ext cx="0" cy="3649639"/>
+              <a:off x="5680147" y="2143092"/>
+              <a:ext cx="0" cy="1317069"/>
             </a:xfrm>
             <a:custGeom>
               <a:avLst/>
               <a:pathLst>
-                <a:path w="0" h="3649639">
+                <a:path w="0" h="1317069">
                   <a:moveTo>
-                    <a:pt x="0" y="3649639"/>
+                    <a:pt x="0" y="1317069"/>
                   </a:moveTo>
                   <a:lnTo>
                     <a:pt x="0" y="0"/>
@@ -3039,612 +3031,655 @@
         </p:sp>
         <p:sp>
           <p:nvSpPr>
-            <p:cNvPr id="22" name="pg22"/>
+            <p:cNvPr id="22" name="pl22"/>
             <p:cNvSpPr/>
             <p:nvPr/>
           </p:nvSpPr>
           <p:spPr>
             <a:xfrm>
-              <a:off x="1172049" y="2073503"/>
-              <a:ext cx="7090630" cy="3362611"/>
+              <a:off x="7390199" y="2143092"/>
+              <a:ext cx="0" cy="1317069"/>
             </a:xfrm>
             <a:custGeom>
               <a:avLst/>
               <a:pathLst>
-                <a:path w="7090630" h="3362611">
+                <a:path w="0" h="1317069">
                   <a:moveTo>
-                    <a:pt x="160299" y="0"/>
+                    <a:pt x="0" y="1317069"/>
                   </a:moveTo>
                   <a:lnTo>
-                    <a:pt x="214867" y="91295"/>
-                  </a:lnTo>
-                  <a:lnTo>
-                    <a:pt x="286490" y="207035"/>
-                  </a:lnTo>
-                  <a:lnTo>
-                    <a:pt x="358112" y="318826"/>
-                  </a:lnTo>
-                  <a:lnTo>
-                    <a:pt x="429735" y="426803"/>
-                  </a:lnTo>
-                  <a:lnTo>
-                    <a:pt x="501357" y="531097"/>
-                  </a:lnTo>
-                  <a:lnTo>
-                    <a:pt x="572980" y="631832"/>
-                  </a:lnTo>
-                  <a:lnTo>
-                    <a:pt x="644602" y="729131"/>
-                  </a:lnTo>
-                  <a:lnTo>
-                    <a:pt x="716225" y="823110"/>
-                  </a:lnTo>
-                  <a:lnTo>
-                    <a:pt x="787847" y="913883"/>
-                  </a:lnTo>
-                  <a:lnTo>
-                    <a:pt x="859470" y="1001558"/>
-                  </a:lnTo>
-                  <a:lnTo>
-                    <a:pt x="931092" y="1086243"/>
-                  </a:lnTo>
-                  <a:lnTo>
-                    <a:pt x="1002715" y="1168039"/>
-                  </a:lnTo>
-                  <a:lnTo>
-                    <a:pt x="1074337" y="1247043"/>
-                  </a:lnTo>
-                  <a:lnTo>
-                    <a:pt x="1145960" y="1323353"/>
-                  </a:lnTo>
-                  <a:lnTo>
-                    <a:pt x="1217582" y="1397059"/>
-                  </a:lnTo>
-                  <a:lnTo>
-                    <a:pt x="1289205" y="1468250"/>
-                  </a:lnTo>
-                  <a:lnTo>
-                    <a:pt x="1360827" y="1537013"/>
-                  </a:lnTo>
-                  <a:lnTo>
-                    <a:pt x="1432450" y="1603429"/>
-                  </a:lnTo>
-                  <a:lnTo>
-                    <a:pt x="1504073" y="1667580"/>
-                  </a:lnTo>
-                  <a:lnTo>
-                    <a:pt x="1575695" y="1729542"/>
-                  </a:lnTo>
-                  <a:lnTo>
-                    <a:pt x="1647318" y="1789390"/>
-                  </a:lnTo>
-                  <a:lnTo>
-                    <a:pt x="1718940" y="1847196"/>
-                  </a:lnTo>
-                  <a:lnTo>
-                    <a:pt x="1790563" y="1903030"/>
-                  </a:lnTo>
-                  <a:lnTo>
-                    <a:pt x="1862185" y="1956960"/>
-                  </a:lnTo>
-                  <a:lnTo>
-                    <a:pt x="1933808" y="2009049"/>
-                  </a:lnTo>
-                  <a:lnTo>
-                    <a:pt x="2005430" y="2059361"/>
-                  </a:lnTo>
-                  <a:lnTo>
-                    <a:pt x="2077053" y="2107957"/>
-                  </a:lnTo>
-                  <a:lnTo>
-                    <a:pt x="2148675" y="2154894"/>
-                  </a:lnTo>
-                  <a:lnTo>
-                    <a:pt x="2220298" y="2200231"/>
-                  </a:lnTo>
-                  <a:lnTo>
-                    <a:pt x="2291920" y="2244020"/>
-                  </a:lnTo>
-                  <a:lnTo>
-                    <a:pt x="2363543" y="2286316"/>
-                  </a:lnTo>
-                  <a:lnTo>
-                    <a:pt x="2435165" y="2327169"/>
-                  </a:lnTo>
-                  <a:lnTo>
-                    <a:pt x="2506788" y="2366628"/>
-                  </a:lnTo>
-                  <a:lnTo>
-                    <a:pt x="2578410" y="2404740"/>
-                  </a:lnTo>
-                  <a:lnTo>
-                    <a:pt x="2650033" y="2441553"/>
-                  </a:lnTo>
-                  <a:lnTo>
-                    <a:pt x="2721655" y="2477109"/>
-                  </a:lnTo>
-                  <a:lnTo>
-                    <a:pt x="2793278" y="2511452"/>
-                  </a:lnTo>
-                  <a:lnTo>
-                    <a:pt x="2864901" y="2544624"/>
-                  </a:lnTo>
-                  <a:lnTo>
-                    <a:pt x="2936523" y="2576664"/>
-                  </a:lnTo>
-                  <a:lnTo>
-                    <a:pt x="3008146" y="2607611"/>
-                  </a:lnTo>
-                  <a:lnTo>
-                    <a:pt x="3079768" y="2637502"/>
-                  </a:lnTo>
-                  <a:lnTo>
-                    <a:pt x="3151391" y="2657873"/>
-                  </a:lnTo>
-                  <a:lnTo>
-                    <a:pt x="3223013" y="2666298"/>
-                  </a:lnTo>
-                  <a:lnTo>
-                    <a:pt x="3294636" y="2674638"/>
-                  </a:lnTo>
-                  <a:lnTo>
-                    <a:pt x="3366258" y="2682892"/>
-                  </a:lnTo>
-                  <a:lnTo>
-                    <a:pt x="3437881" y="2691062"/>
-                  </a:lnTo>
-                  <a:lnTo>
-                    <a:pt x="3509503" y="2699149"/>
-                  </a:lnTo>
-                  <a:lnTo>
-                    <a:pt x="3581126" y="2707153"/>
-                  </a:lnTo>
-                  <a:lnTo>
-                    <a:pt x="3652748" y="2715075"/>
-                  </a:lnTo>
-                  <a:lnTo>
-                    <a:pt x="3724371" y="2722917"/>
-                  </a:lnTo>
-                  <a:lnTo>
-                    <a:pt x="3795993" y="2730679"/>
-                  </a:lnTo>
-                  <a:lnTo>
-                    <a:pt x="3867616" y="2738362"/>
-                  </a:lnTo>
-                  <a:lnTo>
-                    <a:pt x="3939238" y="2745966"/>
-                  </a:lnTo>
-                  <a:lnTo>
-                    <a:pt x="4010861" y="2753492"/>
-                  </a:lnTo>
-                  <a:lnTo>
-                    <a:pt x="4082483" y="2760942"/>
-                  </a:lnTo>
-                  <a:lnTo>
-                    <a:pt x="4154106" y="2768316"/>
-                  </a:lnTo>
-                  <a:lnTo>
-                    <a:pt x="4225729" y="2775615"/>
-                  </a:lnTo>
-                  <a:lnTo>
-                    <a:pt x="4297351" y="2782839"/>
-                  </a:lnTo>
-                  <a:lnTo>
-                    <a:pt x="4368974" y="2789989"/>
-                  </a:lnTo>
-                  <a:lnTo>
-                    <a:pt x="4440596" y="2797067"/>
-                  </a:lnTo>
-                  <a:lnTo>
-                    <a:pt x="4512219" y="2804072"/>
-                  </a:lnTo>
-                  <a:lnTo>
-                    <a:pt x="4583841" y="2811006"/>
-                  </a:lnTo>
-                  <a:lnTo>
-                    <a:pt x="4655464" y="2817869"/>
-                  </a:lnTo>
-                  <a:lnTo>
-                    <a:pt x="4727086" y="2824662"/>
-                  </a:lnTo>
-                  <a:lnTo>
-                    <a:pt x="4798709" y="2831386"/>
-                  </a:lnTo>
-                  <a:lnTo>
-                    <a:pt x="4870331" y="2838041"/>
-                  </a:lnTo>
-                  <a:lnTo>
-                    <a:pt x="4941954" y="2844628"/>
-                  </a:lnTo>
-                  <a:lnTo>
-                    <a:pt x="5013576" y="2851148"/>
-                  </a:lnTo>
-                  <a:lnTo>
-                    <a:pt x="5085199" y="2857602"/>
-                  </a:lnTo>
-                  <a:lnTo>
-                    <a:pt x="5156821" y="2863990"/>
-                  </a:lnTo>
-                  <a:lnTo>
-                    <a:pt x="5228444" y="2870312"/>
-                  </a:lnTo>
-                  <a:lnTo>
-                    <a:pt x="5300066" y="2876570"/>
-                  </a:lnTo>
-                  <a:lnTo>
-                    <a:pt x="5371689" y="2882765"/>
-                  </a:lnTo>
-                  <a:lnTo>
-                    <a:pt x="5443311" y="2888896"/>
-                  </a:lnTo>
-                  <a:lnTo>
-                    <a:pt x="5514934" y="2894964"/>
-                  </a:lnTo>
-                  <a:lnTo>
-                    <a:pt x="5586557" y="2900971"/>
-                  </a:lnTo>
-                  <a:lnTo>
-                    <a:pt x="5658179" y="2906916"/>
-                  </a:lnTo>
-                  <a:lnTo>
-                    <a:pt x="5729802" y="2912801"/>
-                  </a:lnTo>
-                  <a:lnTo>
-                    <a:pt x="5801424" y="2918625"/>
-                  </a:lnTo>
-                  <a:lnTo>
-                    <a:pt x="5873047" y="2924390"/>
-                  </a:lnTo>
-                  <a:lnTo>
-                    <a:pt x="5944669" y="2930097"/>
-                  </a:lnTo>
-                  <a:lnTo>
-                    <a:pt x="6016292" y="2935745"/>
-                  </a:lnTo>
-                  <a:lnTo>
-                    <a:pt x="6087914" y="2941336"/>
-                  </a:lnTo>
-                  <a:lnTo>
-                    <a:pt x="6159537" y="2946869"/>
-                  </a:lnTo>
-                  <a:lnTo>
-                    <a:pt x="6231159" y="2952346"/>
-                  </a:lnTo>
-                  <a:lnTo>
-                    <a:pt x="6302782" y="2957767"/>
-                  </a:lnTo>
-                  <a:lnTo>
-                    <a:pt x="6374404" y="2963133"/>
-                  </a:lnTo>
-                  <a:lnTo>
-                    <a:pt x="6446027" y="2968444"/>
-                  </a:lnTo>
-                  <a:lnTo>
-                    <a:pt x="6517649" y="2973701"/>
-                  </a:lnTo>
-                  <a:lnTo>
-                    <a:pt x="6589272" y="2978905"/>
-                  </a:lnTo>
-                  <a:lnTo>
-                    <a:pt x="6660894" y="2984055"/>
-                  </a:lnTo>
-                  <a:lnTo>
-                    <a:pt x="6732517" y="2989153"/>
-                  </a:lnTo>
-                  <a:lnTo>
-                    <a:pt x="6804139" y="2994198"/>
-                  </a:lnTo>
-                  <a:lnTo>
-                    <a:pt x="6875762" y="2999192"/>
-                  </a:lnTo>
-                  <a:lnTo>
-                    <a:pt x="6947385" y="3004136"/>
-                  </a:lnTo>
-                  <a:lnTo>
-                    <a:pt x="7019007" y="3009029"/>
-                  </a:lnTo>
-                  <a:lnTo>
-                    <a:pt x="7090630" y="3013872"/>
-                  </a:lnTo>
-                  <a:lnTo>
-                    <a:pt x="7090630" y="3362611"/>
-                  </a:lnTo>
-                  <a:lnTo>
-                    <a:pt x="7019007" y="3358332"/>
-                  </a:lnTo>
-                  <a:lnTo>
-                    <a:pt x="6947385" y="3353902"/>
-                  </a:lnTo>
-                  <a:lnTo>
-                    <a:pt x="6875762" y="3349316"/>
-                  </a:lnTo>
-                  <a:lnTo>
-                    <a:pt x="6804139" y="3344568"/>
-                  </a:lnTo>
-                  <a:lnTo>
-                    <a:pt x="6732517" y="3339652"/>
-                  </a:lnTo>
-                  <a:lnTo>
-                    <a:pt x="6660894" y="3334562"/>
-                  </a:lnTo>
-                  <a:lnTo>
-                    <a:pt x="6589272" y="3329292"/>
-                  </a:lnTo>
-                  <a:lnTo>
-                    <a:pt x="6517649" y="3323837"/>
-                  </a:lnTo>
-                  <a:lnTo>
-                    <a:pt x="6446027" y="3318189"/>
-                  </a:lnTo>
-                  <a:lnTo>
-                    <a:pt x="6374404" y="3312341"/>
-                  </a:lnTo>
-                  <a:lnTo>
-                    <a:pt x="6302782" y="3306286"/>
-                  </a:lnTo>
-                  <a:lnTo>
-                    <a:pt x="6231159" y="3300018"/>
-                  </a:lnTo>
-                  <a:lnTo>
-                    <a:pt x="6159537" y="3293528"/>
-                  </a:lnTo>
-                  <a:lnTo>
-                    <a:pt x="6087914" y="3286810"/>
-                  </a:lnTo>
-                  <a:lnTo>
-                    <a:pt x="6016292" y="3279853"/>
-                  </a:lnTo>
-                  <a:lnTo>
-                    <a:pt x="5944669" y="3272651"/>
-                  </a:lnTo>
-                  <a:lnTo>
-                    <a:pt x="5873047" y="3265195"/>
-                  </a:lnTo>
-                  <a:lnTo>
-                    <a:pt x="5801424" y="3257475"/>
-                  </a:lnTo>
-                  <a:lnTo>
-                    <a:pt x="5729802" y="3249483"/>
-                  </a:lnTo>
-                  <a:lnTo>
-                    <a:pt x="5658179" y="3241208"/>
-                  </a:lnTo>
-                  <a:lnTo>
-                    <a:pt x="5586557" y="3232642"/>
-                  </a:lnTo>
-                  <a:lnTo>
-                    <a:pt x="5514934" y="3223772"/>
-                  </a:lnTo>
-                  <a:lnTo>
-                    <a:pt x="5443311" y="3214589"/>
-                  </a:lnTo>
-                  <a:lnTo>
-                    <a:pt x="5371689" y="3205082"/>
-                  </a:lnTo>
-                  <a:lnTo>
-                    <a:pt x="5300066" y="3195239"/>
-                  </a:lnTo>
-                  <a:lnTo>
-                    <a:pt x="5228444" y="3185048"/>
-                  </a:lnTo>
-                  <a:lnTo>
-                    <a:pt x="5156821" y="3174498"/>
-                  </a:lnTo>
-                  <a:lnTo>
-                    <a:pt x="5085199" y="3163574"/>
-                  </a:lnTo>
-                  <a:lnTo>
-                    <a:pt x="5013576" y="3152265"/>
-                  </a:lnTo>
-                  <a:lnTo>
-                    <a:pt x="4941954" y="3140557"/>
-                  </a:lnTo>
-                  <a:lnTo>
-                    <a:pt x="4870331" y="3128435"/>
-                  </a:lnTo>
-                  <a:lnTo>
-                    <a:pt x="4798709" y="3115884"/>
-                  </a:lnTo>
-                  <a:lnTo>
-                    <a:pt x="4727086" y="3102891"/>
-                  </a:lnTo>
-                  <a:lnTo>
-                    <a:pt x="4655464" y="3089438"/>
-                  </a:lnTo>
-                  <a:lnTo>
-                    <a:pt x="4583841" y="3075510"/>
-                  </a:lnTo>
-                  <a:lnTo>
-                    <a:pt x="4512219" y="3061091"/>
-                  </a:lnTo>
-                  <a:lnTo>
-                    <a:pt x="4440596" y="3046162"/>
-                  </a:lnTo>
-                  <a:lnTo>
-                    <a:pt x="4368974" y="3030705"/>
-                  </a:lnTo>
-                  <a:lnTo>
-                    <a:pt x="4297351" y="3014703"/>
-                  </a:lnTo>
-                  <a:lnTo>
-                    <a:pt x="4225729" y="2998135"/>
-                  </a:lnTo>
-                  <a:lnTo>
-                    <a:pt x="4154106" y="2980982"/>
-                  </a:lnTo>
-                  <a:lnTo>
-                    <a:pt x="4082483" y="2963224"/>
-                  </a:lnTo>
-                  <a:lnTo>
-                    <a:pt x="4010861" y="2944838"/>
-                  </a:lnTo>
-                  <a:lnTo>
-                    <a:pt x="3939238" y="2925803"/>
-                  </a:lnTo>
-                  <a:lnTo>
-                    <a:pt x="3867616" y="2906095"/>
-                  </a:lnTo>
-                  <a:lnTo>
-                    <a:pt x="3795993" y="2885691"/>
-                  </a:lnTo>
-                  <a:lnTo>
-                    <a:pt x="3724371" y="2864567"/>
-                  </a:lnTo>
-                  <a:lnTo>
-                    <a:pt x="3652748" y="2842696"/>
-                  </a:lnTo>
-                  <a:lnTo>
-                    <a:pt x="3581126" y="2820053"/>
-                  </a:lnTo>
-                  <a:lnTo>
-                    <a:pt x="3509503" y="2796610"/>
-                  </a:lnTo>
-                  <a:lnTo>
-                    <a:pt x="3437881" y="2772339"/>
-                  </a:lnTo>
-                  <a:lnTo>
-                    <a:pt x="3366258" y="2747210"/>
-                  </a:lnTo>
-                  <a:lnTo>
-                    <a:pt x="3294636" y="2721194"/>
-                  </a:lnTo>
-                  <a:lnTo>
-                    <a:pt x="3223013" y="2694260"/>
-                  </a:lnTo>
-                  <a:lnTo>
-                    <a:pt x="3151391" y="2666373"/>
-                  </a:lnTo>
-                  <a:lnTo>
-                    <a:pt x="3079768" y="2649361"/>
-                  </a:lnTo>
-                  <a:lnTo>
-                    <a:pt x="3008146" y="2640761"/>
-                  </a:lnTo>
-                  <a:lnTo>
-                    <a:pt x="2936523" y="2632072"/>
-                  </a:lnTo>
-                  <a:lnTo>
-                    <a:pt x="2864901" y="2623294"/>
-                  </a:lnTo>
-                  <a:lnTo>
-                    <a:pt x="2793278" y="2614426"/>
-                  </a:lnTo>
-                  <a:lnTo>
-                    <a:pt x="2721655" y="2605466"/>
-                  </a:lnTo>
-                  <a:lnTo>
-                    <a:pt x="2650033" y="2596413"/>
-                  </a:lnTo>
-                  <a:lnTo>
-                    <a:pt x="2578410" y="2587268"/>
-                  </a:lnTo>
-                  <a:lnTo>
-                    <a:pt x="2506788" y="2578028"/>
-                  </a:lnTo>
-                  <a:lnTo>
-                    <a:pt x="2435165" y="2568693"/>
-                  </a:lnTo>
-                  <a:lnTo>
-                    <a:pt x="2363543" y="2559262"/>
-                  </a:lnTo>
-                  <a:lnTo>
-                    <a:pt x="2291920" y="2549733"/>
-                  </a:lnTo>
-                  <a:lnTo>
-                    <a:pt x="2220298" y="2540106"/>
-                  </a:lnTo>
-                  <a:lnTo>
-                    <a:pt x="2148675" y="2530380"/>
-                  </a:lnTo>
-                  <a:lnTo>
-                    <a:pt x="2077053" y="2520554"/>
-                  </a:lnTo>
-                  <a:lnTo>
-                    <a:pt x="2005430" y="2510627"/>
-                  </a:lnTo>
-                  <a:lnTo>
-                    <a:pt x="1933808" y="2500597"/>
-                  </a:lnTo>
-                  <a:lnTo>
-                    <a:pt x="1862185" y="2490464"/>
-                  </a:lnTo>
-                  <a:lnTo>
-                    <a:pt x="1790563" y="2480226"/>
-                  </a:lnTo>
-                  <a:lnTo>
-                    <a:pt x="1718940" y="2469883"/>
-                  </a:lnTo>
-                  <a:lnTo>
-                    <a:pt x="1647318" y="2459433"/>
-                  </a:lnTo>
-                  <a:lnTo>
-                    <a:pt x="1575695" y="2448876"/>
-                  </a:lnTo>
-                  <a:lnTo>
-                    <a:pt x="1504073" y="2438209"/>
-                  </a:lnTo>
-                  <a:lnTo>
-                    <a:pt x="1432450" y="2427433"/>
-                  </a:lnTo>
-                  <a:lnTo>
-                    <a:pt x="1360827" y="2416546"/>
-                  </a:lnTo>
-                  <a:lnTo>
-                    <a:pt x="1289205" y="2405547"/>
-                  </a:lnTo>
-                  <a:lnTo>
-                    <a:pt x="1217582" y="2394434"/>
-                  </a:lnTo>
-                  <a:lnTo>
-                    <a:pt x="1145960" y="2383206"/>
-                  </a:lnTo>
-                  <a:lnTo>
-                    <a:pt x="1074337" y="2371863"/>
-                  </a:lnTo>
-                  <a:lnTo>
-                    <a:pt x="1002715" y="2360403"/>
-                  </a:lnTo>
-                  <a:lnTo>
-                    <a:pt x="931092" y="2348825"/>
-                  </a:lnTo>
-                  <a:lnTo>
-                    <a:pt x="859470" y="2337128"/>
-                  </a:lnTo>
-                  <a:lnTo>
-                    <a:pt x="787847" y="2325310"/>
-                  </a:lnTo>
-                  <a:lnTo>
-                    <a:pt x="716225" y="2313370"/>
-                  </a:lnTo>
-                  <a:lnTo>
-                    <a:pt x="644602" y="2301307"/>
-                  </a:lnTo>
-                  <a:lnTo>
-                    <a:pt x="572980" y="2289120"/>
-                  </a:lnTo>
-                  <a:lnTo>
-                    <a:pt x="501357" y="2276807"/>
-                  </a:lnTo>
-                  <a:lnTo>
-                    <a:pt x="429735" y="2264367"/>
-                  </a:lnTo>
-                  <a:lnTo>
-                    <a:pt x="358112" y="2251799"/>
-                  </a:lnTo>
-                  <a:lnTo>
-                    <a:pt x="286490" y="2239102"/>
-                  </a:lnTo>
-                  <a:lnTo>
-                    <a:pt x="214867" y="2226273"/>
-                  </a:lnTo>
-                  <a:lnTo>
-                    <a:pt x="143245" y="2213313"/>
-                  </a:lnTo>
-                  <a:lnTo>
-                    <a:pt x="71622" y="2200218"/>
-                  </a:lnTo>
-                  <a:lnTo>
-                    <a:pt x="0" y="2186989"/>
+                    <a:pt x="0" y="0"/>
+                  </a:lnTo>
+                  <a:lnTo>
+                    <a:pt x="0" y="0"/>
+                  </a:lnTo>
+                </a:path>
+              </a:pathLst>
+            </a:custGeom>
+            <a:ln w="13550" cap="flat">
+              <a:solidFill>
+                <a:srgbClr val="EBEBEB">
+                  <a:alpha val="100000"/>
+                </a:srgbClr>
+              </a:solidFill>
+              <a:prstDash val="solid"/>
+              <a:round/>
+            </a:ln>
+          </p:spPr>
+          <p:txBody>
+            <a:bodyPr/>
+            <a:lstStyle/>
+            <a:p/>
+          </p:txBody>
+        </p:sp>
+        <p:sp>
+          <p:nvSpPr>
+            <p:cNvPr id="23" name="pg23"/>
+            <p:cNvSpPr/>
+            <p:nvPr/>
+          </p:nvSpPr>
+          <p:spPr>
+            <a:xfrm>
+              <a:off x="1235312" y="2143092"/>
+              <a:ext cx="6964104" cy="1213487"/>
+            </a:xfrm>
+            <a:custGeom>
+              <a:avLst/>
+              <a:pathLst>
+                <a:path w="6964104" h="1213487">
+                  <a:moveTo>
+                    <a:pt x="157439" y="0"/>
+                  </a:moveTo>
+                  <a:lnTo>
+                    <a:pt x="211033" y="32946"/>
+                  </a:lnTo>
+                  <a:lnTo>
+                    <a:pt x="281377" y="74714"/>
+                  </a:lnTo>
+                  <a:lnTo>
+                    <a:pt x="351722" y="115056"/>
+                  </a:lnTo>
+                  <a:lnTo>
+                    <a:pt x="422066" y="154023"/>
+                  </a:lnTo>
+                  <a:lnTo>
+                    <a:pt x="492411" y="191660"/>
+                  </a:lnTo>
+                  <a:lnTo>
+                    <a:pt x="562755" y="228013"/>
+                  </a:lnTo>
+                  <a:lnTo>
+                    <a:pt x="633100" y="263126"/>
+                  </a:lnTo>
+                  <a:lnTo>
+                    <a:pt x="703444" y="297041"/>
+                  </a:lnTo>
+                  <a:lnTo>
+                    <a:pt x="773789" y="329798"/>
+                  </a:lnTo>
+                  <a:lnTo>
+                    <a:pt x="844133" y="361439"/>
+                  </a:lnTo>
+                  <a:lnTo>
+                    <a:pt x="914478" y="391999"/>
+                  </a:lnTo>
+                  <a:lnTo>
+                    <a:pt x="984822" y="421517"/>
+                  </a:lnTo>
+                  <a:lnTo>
+                    <a:pt x="1055167" y="450028"/>
+                  </a:lnTo>
+                  <a:lnTo>
+                    <a:pt x="1125511" y="477567"/>
+                  </a:lnTo>
+                  <a:lnTo>
+                    <a:pt x="1195856" y="504165"/>
+                  </a:lnTo>
+                  <a:lnTo>
+                    <a:pt x="1266200" y="529857"/>
+                  </a:lnTo>
+                  <a:lnTo>
+                    <a:pt x="1336545" y="554671"/>
+                  </a:lnTo>
+                  <a:lnTo>
+                    <a:pt x="1406889" y="578640"/>
+                  </a:lnTo>
+                  <a:lnTo>
+                    <a:pt x="1477234" y="601790"/>
+                  </a:lnTo>
+                  <a:lnTo>
+                    <a:pt x="1547578" y="624151"/>
+                  </a:lnTo>
+                  <a:lnTo>
+                    <a:pt x="1617923" y="645748"/>
+                  </a:lnTo>
+                  <a:lnTo>
+                    <a:pt x="1688267" y="666609"/>
+                  </a:lnTo>
+                  <a:lnTo>
+                    <a:pt x="1758612" y="686759"/>
+                  </a:lnTo>
+                  <a:lnTo>
+                    <a:pt x="1828956" y="706220"/>
+                  </a:lnTo>
+                  <a:lnTo>
+                    <a:pt x="1899301" y="725018"/>
+                  </a:lnTo>
+                  <a:lnTo>
+                    <a:pt x="1969645" y="743175"/>
+                  </a:lnTo>
+                  <a:lnTo>
+                    <a:pt x="2039990" y="760712"/>
+                  </a:lnTo>
+                  <a:lnTo>
+                    <a:pt x="2110334" y="777650"/>
+                  </a:lnTo>
+                  <a:lnTo>
+                    <a:pt x="2180679" y="794011"/>
+                  </a:lnTo>
+                  <a:lnTo>
+                    <a:pt x="2251023" y="809814"/>
+                  </a:lnTo>
+                  <a:lnTo>
+                    <a:pt x="2321368" y="825077"/>
+                  </a:lnTo>
+                  <a:lnTo>
+                    <a:pt x="2391712" y="839820"/>
+                  </a:lnTo>
+                  <a:lnTo>
+                    <a:pt x="2462057" y="854060"/>
+                  </a:lnTo>
+                  <a:lnTo>
+                    <a:pt x="2532401" y="867814"/>
+                  </a:lnTo>
+                  <a:lnTo>
+                    <a:pt x="2602746" y="881099"/>
+                  </a:lnTo>
+                  <a:lnTo>
+                    <a:pt x="2673090" y="893930"/>
+                  </a:lnTo>
+                  <a:lnTo>
+                    <a:pt x="2743435" y="906324"/>
+                  </a:lnTo>
+                  <a:lnTo>
+                    <a:pt x="2813779" y="918295"/>
+                  </a:lnTo>
+                  <a:lnTo>
+                    <a:pt x="2884124" y="929857"/>
+                  </a:lnTo>
+                  <a:lnTo>
+                    <a:pt x="2954468" y="941025"/>
+                  </a:lnTo>
+                  <a:lnTo>
+                    <a:pt x="3024813" y="951812"/>
+                  </a:lnTo>
+                  <a:lnTo>
+                    <a:pt x="3095157" y="959163"/>
+                  </a:lnTo>
+                  <a:lnTo>
+                    <a:pt x="3165502" y="962204"/>
+                  </a:lnTo>
+                  <a:lnTo>
+                    <a:pt x="3235846" y="965213"/>
+                  </a:lnTo>
+                  <a:lnTo>
+                    <a:pt x="3306191" y="968192"/>
+                  </a:lnTo>
+                  <a:lnTo>
+                    <a:pt x="3376535" y="971141"/>
+                  </a:lnTo>
+                  <a:lnTo>
+                    <a:pt x="3446880" y="974059"/>
+                  </a:lnTo>
+                  <a:lnTo>
+                    <a:pt x="3517224" y="976947"/>
+                  </a:lnTo>
+                  <a:lnTo>
+                    <a:pt x="3587569" y="979807"/>
+                  </a:lnTo>
+                  <a:lnTo>
+                    <a:pt x="3657913" y="982636"/>
+                  </a:lnTo>
+                  <a:lnTo>
+                    <a:pt x="3728257" y="985437"/>
+                  </a:lnTo>
+                  <a:lnTo>
+                    <a:pt x="3798602" y="988210"/>
+                  </a:lnTo>
+                  <a:lnTo>
+                    <a:pt x="3868946" y="990954"/>
+                  </a:lnTo>
+                  <a:lnTo>
+                    <a:pt x="3939291" y="993670"/>
+                  </a:lnTo>
+                  <a:lnTo>
+                    <a:pt x="4009635" y="996359"/>
+                  </a:lnTo>
+                  <a:lnTo>
+                    <a:pt x="4079980" y="999020"/>
+                  </a:lnTo>
+                  <a:lnTo>
+                    <a:pt x="4150324" y="1001654"/>
+                  </a:lnTo>
+                  <a:lnTo>
+                    <a:pt x="4220669" y="1004261"/>
+                  </a:lnTo>
+                  <a:lnTo>
+                    <a:pt x="4291013" y="1006841"/>
+                  </a:lnTo>
+                  <a:lnTo>
+                    <a:pt x="4361358" y="1009395"/>
+                  </a:lnTo>
+                  <a:lnTo>
+                    <a:pt x="4431702" y="1011923"/>
+                  </a:lnTo>
+                  <a:lnTo>
+                    <a:pt x="4502047" y="1014426"/>
+                  </a:lnTo>
+                  <a:lnTo>
+                    <a:pt x="4572391" y="1016902"/>
+                  </a:lnTo>
+                  <a:lnTo>
+                    <a:pt x="4642736" y="1019354"/>
+                  </a:lnTo>
+                  <a:lnTo>
+                    <a:pt x="4713080" y="1021780"/>
+                  </a:lnTo>
+                  <a:lnTo>
+                    <a:pt x="4783425" y="1024182"/>
+                  </a:lnTo>
+                  <a:lnTo>
+                    <a:pt x="4853769" y="1026559"/>
+                  </a:lnTo>
+                  <a:lnTo>
+                    <a:pt x="4924114" y="1028912"/>
+                  </a:lnTo>
+                  <a:lnTo>
+                    <a:pt x="4994458" y="1031241"/>
+                  </a:lnTo>
+                  <a:lnTo>
+                    <a:pt x="5064803" y="1033546"/>
+                  </a:lnTo>
+                  <a:lnTo>
+                    <a:pt x="5135147" y="1035828"/>
+                  </a:lnTo>
+                  <a:lnTo>
+                    <a:pt x="5205492" y="1038086"/>
+                  </a:lnTo>
+                  <a:lnTo>
+                    <a:pt x="5275836" y="1040322"/>
+                  </a:lnTo>
+                  <a:lnTo>
+                    <a:pt x="5346181" y="1042534"/>
+                  </a:lnTo>
+                  <a:lnTo>
+                    <a:pt x="5416525" y="1044724"/>
+                  </a:lnTo>
+                  <a:lnTo>
+                    <a:pt x="5486870" y="1046892"/>
+                  </a:lnTo>
+                  <a:lnTo>
+                    <a:pt x="5557214" y="1049037"/>
+                  </a:lnTo>
+                  <a:lnTo>
+                    <a:pt x="5627559" y="1051161"/>
+                  </a:lnTo>
+                  <a:lnTo>
+                    <a:pt x="5697903" y="1053263"/>
+                  </a:lnTo>
+                  <a:lnTo>
+                    <a:pt x="5768248" y="1055343"/>
+                  </a:lnTo>
+                  <a:lnTo>
+                    <a:pt x="5838592" y="1057403"/>
+                  </a:lnTo>
+                  <a:lnTo>
+                    <a:pt x="5908937" y="1059441"/>
+                  </a:lnTo>
+                  <a:lnTo>
+                    <a:pt x="5979281" y="1061458"/>
+                  </a:lnTo>
+                  <a:lnTo>
+                    <a:pt x="6049626" y="1063455"/>
+                  </a:lnTo>
+                  <a:lnTo>
+                    <a:pt x="6119970" y="1065432"/>
+                  </a:lnTo>
+                  <a:lnTo>
+                    <a:pt x="6190315" y="1067388"/>
+                  </a:lnTo>
+                  <a:lnTo>
+                    <a:pt x="6260659" y="1069325"/>
+                  </a:lnTo>
+                  <a:lnTo>
+                    <a:pt x="6331004" y="1071241"/>
+                  </a:lnTo>
+                  <a:lnTo>
+                    <a:pt x="6401348" y="1073139"/>
+                  </a:lnTo>
+                  <a:lnTo>
+                    <a:pt x="6471693" y="1075016"/>
+                  </a:lnTo>
+                  <a:lnTo>
+                    <a:pt x="6542037" y="1076875"/>
+                  </a:lnTo>
+                  <a:lnTo>
+                    <a:pt x="6612382" y="1078715"/>
+                  </a:lnTo>
+                  <a:lnTo>
+                    <a:pt x="6682726" y="1080535"/>
+                  </a:lnTo>
+                  <a:lnTo>
+                    <a:pt x="6753071" y="1082338"/>
+                  </a:lnTo>
+                  <a:lnTo>
+                    <a:pt x="6823415" y="1084122"/>
+                  </a:lnTo>
+                  <a:lnTo>
+                    <a:pt x="6893760" y="1085887"/>
+                  </a:lnTo>
+                  <a:lnTo>
+                    <a:pt x="6964104" y="1087635"/>
+                  </a:lnTo>
+                  <a:lnTo>
+                    <a:pt x="6964104" y="1213487"/>
+                  </a:lnTo>
+                  <a:lnTo>
+                    <a:pt x="6893760" y="1211943"/>
+                  </a:lnTo>
+                  <a:lnTo>
+                    <a:pt x="6823415" y="1210344"/>
+                  </a:lnTo>
+                  <a:lnTo>
+                    <a:pt x="6753071" y="1208689"/>
+                  </a:lnTo>
+                  <a:lnTo>
+                    <a:pt x="6682726" y="1206976"/>
+                  </a:lnTo>
+                  <a:lnTo>
+                    <a:pt x="6612382" y="1205201"/>
+                  </a:lnTo>
+                  <a:lnTo>
+                    <a:pt x="6542037" y="1203365"/>
+                  </a:lnTo>
+                  <a:lnTo>
+                    <a:pt x="6471693" y="1201463"/>
+                  </a:lnTo>
+                  <a:lnTo>
+                    <a:pt x="6401348" y="1199494"/>
+                  </a:lnTo>
+                  <a:lnTo>
+                    <a:pt x="6331004" y="1197456"/>
+                  </a:lnTo>
+                  <a:lnTo>
+                    <a:pt x="6260659" y="1195346"/>
+                  </a:lnTo>
+                  <a:lnTo>
+                    <a:pt x="6190315" y="1193161"/>
+                  </a:lnTo>
+                  <a:lnTo>
+                    <a:pt x="6119970" y="1190899"/>
+                  </a:lnTo>
+                  <a:lnTo>
+                    <a:pt x="6049626" y="1188557"/>
+                  </a:lnTo>
+                  <a:lnTo>
+                    <a:pt x="5979281" y="1186132"/>
+                  </a:lnTo>
+                  <a:lnTo>
+                    <a:pt x="5908937" y="1183622"/>
+                  </a:lnTo>
+                  <a:lnTo>
+                    <a:pt x="5838592" y="1181023"/>
+                  </a:lnTo>
+                  <a:lnTo>
+                    <a:pt x="5768248" y="1178332"/>
+                  </a:lnTo>
+                  <a:lnTo>
+                    <a:pt x="5697903" y="1175546"/>
+                  </a:lnTo>
+                  <a:lnTo>
+                    <a:pt x="5627559" y="1172662"/>
+                  </a:lnTo>
+                  <a:lnTo>
+                    <a:pt x="5557214" y="1169676"/>
+                  </a:lnTo>
+                  <a:lnTo>
+                    <a:pt x="5486870" y="1166584"/>
+                  </a:lnTo>
+                  <a:lnTo>
+                    <a:pt x="5416525" y="1163383"/>
+                  </a:lnTo>
+                  <a:lnTo>
+                    <a:pt x="5346181" y="1160069"/>
+                  </a:lnTo>
+                  <a:lnTo>
+                    <a:pt x="5275836" y="1156638"/>
+                  </a:lnTo>
+                  <a:lnTo>
+                    <a:pt x="5205492" y="1153086"/>
+                  </a:lnTo>
+                  <a:lnTo>
+                    <a:pt x="5135147" y="1149409"/>
+                  </a:lnTo>
+                  <a:lnTo>
+                    <a:pt x="5064803" y="1145601"/>
+                  </a:lnTo>
+                  <a:lnTo>
+                    <a:pt x="4994458" y="1141659"/>
+                  </a:lnTo>
+                  <a:lnTo>
+                    <a:pt x="4924114" y="1137578"/>
+                  </a:lnTo>
+                  <a:lnTo>
+                    <a:pt x="4853769" y="1133353"/>
+                  </a:lnTo>
+                  <a:lnTo>
+                    <a:pt x="4783425" y="1128978"/>
+                  </a:lnTo>
+                  <a:lnTo>
+                    <a:pt x="4713080" y="1124449"/>
+                  </a:lnTo>
+                  <a:lnTo>
+                    <a:pt x="4642736" y="1119760"/>
+                  </a:lnTo>
+                  <a:lnTo>
+                    <a:pt x="4572391" y="1114905"/>
+                  </a:lnTo>
+                  <a:lnTo>
+                    <a:pt x="4502047" y="1109879"/>
+                  </a:lnTo>
+                  <a:lnTo>
+                    <a:pt x="4431702" y="1104675"/>
+                  </a:lnTo>
+                  <a:lnTo>
+                    <a:pt x="4361358" y="1099288"/>
+                  </a:lnTo>
+                  <a:lnTo>
+                    <a:pt x="4291013" y="1093710"/>
+                  </a:lnTo>
+                  <a:lnTo>
+                    <a:pt x="4220669" y="1087935"/>
+                  </a:lnTo>
+                  <a:lnTo>
+                    <a:pt x="4150324" y="1081956"/>
+                  </a:lnTo>
+                  <a:lnTo>
+                    <a:pt x="4079980" y="1075766"/>
+                  </a:lnTo>
+                  <a:lnTo>
+                    <a:pt x="4009635" y="1069357"/>
+                  </a:lnTo>
+                  <a:lnTo>
+                    <a:pt x="3939291" y="1062722"/>
+                  </a:lnTo>
+                  <a:lnTo>
+                    <a:pt x="3868946" y="1055853"/>
+                  </a:lnTo>
+                  <a:lnTo>
+                    <a:pt x="3798602" y="1048741"/>
+                  </a:lnTo>
+                  <a:lnTo>
+                    <a:pt x="3728257" y="1041378"/>
+                  </a:lnTo>
+                  <a:lnTo>
+                    <a:pt x="3657913" y="1033754"/>
+                  </a:lnTo>
+                  <a:lnTo>
+                    <a:pt x="3587569" y="1025862"/>
+                  </a:lnTo>
+                  <a:lnTo>
+                    <a:pt x="3517224" y="1017690"/>
+                  </a:lnTo>
+                  <a:lnTo>
+                    <a:pt x="3446880" y="1009230"/>
+                  </a:lnTo>
+                  <a:lnTo>
+                    <a:pt x="3376535" y="1000471"/>
+                  </a:lnTo>
+                  <a:lnTo>
+                    <a:pt x="3306191" y="991403"/>
+                  </a:lnTo>
+                  <a:lnTo>
+                    <a:pt x="3235846" y="982015"/>
+                  </a:lnTo>
+                  <a:lnTo>
+                    <a:pt x="3165502" y="972295"/>
+                  </a:lnTo>
+                  <a:lnTo>
+                    <a:pt x="3095157" y="962231"/>
+                  </a:lnTo>
+                  <a:lnTo>
+                    <a:pt x="3024813" y="956092"/>
+                  </a:lnTo>
+                  <a:lnTo>
+                    <a:pt x="2954468" y="952988"/>
+                  </a:lnTo>
+                  <a:lnTo>
+                    <a:pt x="2884124" y="949853"/>
+                  </a:lnTo>
+                  <a:lnTo>
+                    <a:pt x="2813779" y="946685"/>
+                  </a:lnTo>
+                  <a:lnTo>
+                    <a:pt x="2743435" y="943484"/>
+                  </a:lnTo>
+                  <a:lnTo>
+                    <a:pt x="2673090" y="940251"/>
+                  </a:lnTo>
+                  <a:lnTo>
+                    <a:pt x="2602746" y="936984"/>
+                  </a:lnTo>
+                  <a:lnTo>
+                    <a:pt x="2532401" y="933684"/>
+                  </a:lnTo>
+                  <a:lnTo>
+                    <a:pt x="2462057" y="930349"/>
+                  </a:lnTo>
+                  <a:lnTo>
+                    <a:pt x="2391712" y="926980"/>
+                  </a:lnTo>
+                  <a:lnTo>
+                    <a:pt x="2321368" y="923577"/>
+                  </a:lnTo>
+                  <a:lnTo>
+                    <a:pt x="2251023" y="920138"/>
+                  </a:lnTo>
+                  <a:lnTo>
+                    <a:pt x="2180679" y="916664"/>
+                  </a:lnTo>
+                  <a:lnTo>
+                    <a:pt x="2110334" y="913154"/>
+                  </a:lnTo>
+                  <a:lnTo>
+                    <a:pt x="2039990" y="909608"/>
+                  </a:lnTo>
+                  <a:lnTo>
+                    <a:pt x="1969645" y="906026"/>
+                  </a:lnTo>
+                  <a:lnTo>
+                    <a:pt x="1899301" y="902406"/>
+                  </a:lnTo>
+                  <a:lnTo>
+                    <a:pt x="1828956" y="898749"/>
+                  </a:lnTo>
+                  <a:lnTo>
+                    <a:pt x="1758612" y="895055"/>
+                  </a:lnTo>
+                  <a:lnTo>
+                    <a:pt x="1688267" y="891322"/>
+                  </a:lnTo>
+                  <a:lnTo>
+                    <a:pt x="1617923" y="887551"/>
+                  </a:lnTo>
+                  <a:lnTo>
+                    <a:pt x="1547578" y="883741"/>
+                  </a:lnTo>
+                  <a:lnTo>
+                    <a:pt x="1477234" y="879892"/>
+                  </a:lnTo>
+                  <a:lnTo>
+                    <a:pt x="1406889" y="876003"/>
+                  </a:lnTo>
+                  <a:lnTo>
+                    <a:pt x="1336545" y="872074"/>
+                  </a:lnTo>
+                  <a:lnTo>
+                    <a:pt x="1266200" y="868105"/>
+                  </a:lnTo>
+                  <a:lnTo>
+                    <a:pt x="1195856" y="864094"/>
+                  </a:lnTo>
+                  <a:lnTo>
+                    <a:pt x="1125511" y="860043"/>
+                  </a:lnTo>
+                  <a:lnTo>
+                    <a:pt x="1055167" y="855949"/>
+                  </a:lnTo>
+                  <a:lnTo>
+                    <a:pt x="984822" y="851814"/>
+                  </a:lnTo>
+                  <a:lnTo>
+                    <a:pt x="914478" y="847635"/>
+                  </a:lnTo>
+                  <a:lnTo>
+                    <a:pt x="844133" y="843414"/>
+                  </a:lnTo>
+                  <a:lnTo>
+                    <a:pt x="773789" y="839149"/>
+                  </a:lnTo>
+                  <a:lnTo>
+                    <a:pt x="703444" y="834840"/>
+                  </a:lnTo>
+                  <a:lnTo>
+                    <a:pt x="633100" y="830487"/>
+                  </a:lnTo>
+                  <a:lnTo>
+                    <a:pt x="562755" y="826089"/>
+                  </a:lnTo>
+                  <a:lnTo>
+                    <a:pt x="492411" y="821646"/>
+                  </a:lnTo>
+                  <a:lnTo>
+                    <a:pt x="422066" y="817156"/>
+                  </a:lnTo>
+                  <a:lnTo>
+                    <a:pt x="351722" y="812621"/>
+                  </a:lnTo>
+                  <a:lnTo>
+                    <a:pt x="281377" y="808039"/>
+                  </a:lnTo>
+                  <a:lnTo>
+                    <a:pt x="211033" y="803409"/>
+                  </a:lnTo>
+                  <a:lnTo>
+                    <a:pt x="140688" y="798732"/>
+                  </a:lnTo>
+                  <a:lnTo>
+                    <a:pt x="70344" y="794007"/>
+                  </a:lnTo>
+                  <a:lnTo>
+                    <a:pt x="0" y="789233"/>
                   </a:lnTo>
                   <a:close/>
                 </a:path>
@@ -3664,637 +3699,312 @@
         </p:sp>
         <p:sp>
           <p:nvSpPr>
-            <p:cNvPr id="23" name="pl23"/>
-            <p:cNvSpPr/>
-            <p:nvPr/>
-          </p:nvSpPr>
-          <p:spPr>
-            <a:xfrm>
-              <a:off x="1332348" y="2073503"/>
-              <a:ext cx="6930330" cy="3013872"/>
-            </a:xfrm>
-            <a:custGeom>
-              <a:avLst/>
-              <a:pathLst>
-                <a:path w="6930330" h="3013872">
-                  <a:moveTo>
-                    <a:pt x="0" y="0"/>
-                  </a:moveTo>
-                  <a:lnTo>
-                    <a:pt x="54568" y="91295"/>
-                  </a:lnTo>
-                  <a:lnTo>
-                    <a:pt x="126190" y="207035"/>
-                  </a:lnTo>
-                  <a:lnTo>
-                    <a:pt x="197813" y="318826"/>
-                  </a:lnTo>
-                  <a:lnTo>
-                    <a:pt x="269435" y="426803"/>
-                  </a:lnTo>
-                  <a:lnTo>
-                    <a:pt x="341058" y="531097"/>
-                  </a:lnTo>
-                  <a:lnTo>
-                    <a:pt x="412680" y="631832"/>
-                  </a:lnTo>
-                  <a:lnTo>
-                    <a:pt x="484303" y="729131"/>
-                  </a:lnTo>
-                  <a:lnTo>
-                    <a:pt x="555925" y="823110"/>
-                  </a:lnTo>
-                  <a:lnTo>
-                    <a:pt x="627548" y="913883"/>
-                  </a:lnTo>
-                  <a:lnTo>
-                    <a:pt x="699170" y="1001558"/>
-                  </a:lnTo>
-                  <a:lnTo>
-                    <a:pt x="770793" y="1086243"/>
-                  </a:lnTo>
-                  <a:lnTo>
-                    <a:pt x="842415" y="1168039"/>
-                  </a:lnTo>
-                  <a:lnTo>
-                    <a:pt x="914038" y="1247043"/>
-                  </a:lnTo>
-                  <a:lnTo>
-                    <a:pt x="985660" y="1323353"/>
-                  </a:lnTo>
-                  <a:lnTo>
-                    <a:pt x="1057283" y="1397059"/>
-                  </a:lnTo>
-                  <a:lnTo>
-                    <a:pt x="1128905" y="1468250"/>
-                  </a:lnTo>
-                  <a:lnTo>
-                    <a:pt x="1200528" y="1537013"/>
-                  </a:lnTo>
-                  <a:lnTo>
-                    <a:pt x="1272150" y="1603429"/>
-                  </a:lnTo>
-                  <a:lnTo>
-                    <a:pt x="1343773" y="1667580"/>
-                  </a:lnTo>
-                  <a:lnTo>
-                    <a:pt x="1415396" y="1729542"/>
-                  </a:lnTo>
-                  <a:lnTo>
-                    <a:pt x="1487018" y="1789390"/>
-                  </a:lnTo>
-                  <a:lnTo>
-                    <a:pt x="1558641" y="1847196"/>
-                  </a:lnTo>
-                  <a:lnTo>
-                    <a:pt x="1630263" y="1903030"/>
-                  </a:lnTo>
-                  <a:lnTo>
-                    <a:pt x="1701886" y="1956960"/>
-                  </a:lnTo>
-                  <a:lnTo>
-                    <a:pt x="1773508" y="2009049"/>
-                  </a:lnTo>
-                  <a:lnTo>
-                    <a:pt x="1845131" y="2059361"/>
-                  </a:lnTo>
-                  <a:lnTo>
-                    <a:pt x="1916753" y="2107957"/>
-                  </a:lnTo>
-                  <a:lnTo>
-                    <a:pt x="1988376" y="2154894"/>
-                  </a:lnTo>
-                  <a:lnTo>
-                    <a:pt x="2059998" y="2200231"/>
-                  </a:lnTo>
-                  <a:lnTo>
-                    <a:pt x="2131621" y="2244020"/>
-                  </a:lnTo>
-                  <a:lnTo>
-                    <a:pt x="2203243" y="2286316"/>
-                  </a:lnTo>
-                  <a:lnTo>
-                    <a:pt x="2274866" y="2327169"/>
-                  </a:lnTo>
-                  <a:lnTo>
-                    <a:pt x="2346488" y="2366628"/>
-                  </a:lnTo>
-                  <a:lnTo>
-                    <a:pt x="2418111" y="2404740"/>
-                  </a:lnTo>
-                  <a:lnTo>
-                    <a:pt x="2489733" y="2441553"/>
-                  </a:lnTo>
-                  <a:lnTo>
-                    <a:pt x="2561356" y="2477109"/>
-                  </a:lnTo>
-                  <a:lnTo>
-                    <a:pt x="2632978" y="2511452"/>
-                  </a:lnTo>
-                  <a:lnTo>
-                    <a:pt x="2704601" y="2544624"/>
-                  </a:lnTo>
-                  <a:lnTo>
-                    <a:pt x="2776224" y="2576664"/>
-                  </a:lnTo>
-                  <a:lnTo>
-                    <a:pt x="2847846" y="2607611"/>
-                  </a:lnTo>
-                  <a:lnTo>
-                    <a:pt x="2919469" y="2637502"/>
-                  </a:lnTo>
-                  <a:lnTo>
-                    <a:pt x="2991091" y="2657873"/>
-                  </a:lnTo>
-                  <a:lnTo>
-                    <a:pt x="3062714" y="2666298"/>
-                  </a:lnTo>
-                  <a:lnTo>
-                    <a:pt x="3134336" y="2674638"/>
-                  </a:lnTo>
-                  <a:lnTo>
-                    <a:pt x="3205959" y="2682892"/>
-                  </a:lnTo>
-                  <a:lnTo>
-                    <a:pt x="3277581" y="2691062"/>
-                  </a:lnTo>
-                  <a:lnTo>
-                    <a:pt x="3349204" y="2699149"/>
-                  </a:lnTo>
-                  <a:lnTo>
-                    <a:pt x="3420826" y="2707153"/>
-                  </a:lnTo>
-                  <a:lnTo>
-                    <a:pt x="3492449" y="2715075"/>
-                  </a:lnTo>
-                  <a:lnTo>
-                    <a:pt x="3564071" y="2722917"/>
-                  </a:lnTo>
-                  <a:lnTo>
-                    <a:pt x="3635694" y="2730679"/>
-                  </a:lnTo>
-                  <a:lnTo>
-                    <a:pt x="3707316" y="2738362"/>
-                  </a:lnTo>
-                  <a:lnTo>
-                    <a:pt x="3778939" y="2745966"/>
-                  </a:lnTo>
-                  <a:lnTo>
-                    <a:pt x="3850561" y="2753492"/>
-                  </a:lnTo>
-                  <a:lnTo>
-                    <a:pt x="3922184" y="2760942"/>
-                  </a:lnTo>
-                  <a:lnTo>
-                    <a:pt x="3993806" y="2768316"/>
-                  </a:lnTo>
-                  <a:lnTo>
-                    <a:pt x="4065429" y="2775615"/>
-                  </a:lnTo>
-                  <a:lnTo>
-                    <a:pt x="4137052" y="2782839"/>
-                  </a:lnTo>
-                  <a:lnTo>
-                    <a:pt x="4208674" y="2789989"/>
-                  </a:lnTo>
-                  <a:lnTo>
-                    <a:pt x="4280297" y="2797067"/>
-                  </a:lnTo>
-                  <a:lnTo>
-                    <a:pt x="4351919" y="2804072"/>
-                  </a:lnTo>
-                  <a:lnTo>
-                    <a:pt x="4423542" y="2811006"/>
-                  </a:lnTo>
-                  <a:lnTo>
-                    <a:pt x="4495164" y="2817869"/>
-                  </a:lnTo>
-                  <a:lnTo>
-                    <a:pt x="4566787" y="2824662"/>
-                  </a:lnTo>
-                  <a:lnTo>
-                    <a:pt x="4638409" y="2831386"/>
-                  </a:lnTo>
-                  <a:lnTo>
-                    <a:pt x="4710032" y="2838041"/>
-                  </a:lnTo>
-                  <a:lnTo>
-                    <a:pt x="4781654" y="2844628"/>
-                  </a:lnTo>
-                  <a:lnTo>
-                    <a:pt x="4853277" y="2851148"/>
-                  </a:lnTo>
-                  <a:lnTo>
-                    <a:pt x="4924899" y="2857602"/>
-                  </a:lnTo>
-                  <a:lnTo>
-                    <a:pt x="4996522" y="2863990"/>
-                  </a:lnTo>
-                  <a:lnTo>
-                    <a:pt x="5068144" y="2870312"/>
-                  </a:lnTo>
-                  <a:lnTo>
-                    <a:pt x="5139767" y="2876570"/>
-                  </a:lnTo>
-                  <a:lnTo>
-                    <a:pt x="5211389" y="2882765"/>
-                  </a:lnTo>
-                  <a:lnTo>
-                    <a:pt x="5283012" y="2888896"/>
-                  </a:lnTo>
-                  <a:lnTo>
-                    <a:pt x="5354634" y="2894964"/>
-                  </a:lnTo>
-                  <a:lnTo>
-                    <a:pt x="5426257" y="2900971"/>
-                  </a:lnTo>
-                  <a:lnTo>
-                    <a:pt x="5497880" y="2906916"/>
-                  </a:lnTo>
-                  <a:lnTo>
-                    <a:pt x="5569502" y="2912801"/>
-                  </a:lnTo>
-                  <a:lnTo>
-                    <a:pt x="5641125" y="2918625"/>
-                  </a:lnTo>
-                  <a:lnTo>
-                    <a:pt x="5712747" y="2924390"/>
-                  </a:lnTo>
-                  <a:lnTo>
-                    <a:pt x="5784370" y="2930097"/>
-                  </a:lnTo>
-                  <a:lnTo>
-                    <a:pt x="5855992" y="2935745"/>
-                  </a:lnTo>
-                  <a:lnTo>
-                    <a:pt x="5927615" y="2941336"/>
-                  </a:lnTo>
-                  <a:lnTo>
-                    <a:pt x="5999237" y="2946869"/>
-                  </a:lnTo>
-                  <a:lnTo>
-                    <a:pt x="6070860" y="2952346"/>
-                  </a:lnTo>
-                  <a:lnTo>
-                    <a:pt x="6142482" y="2957767"/>
-                  </a:lnTo>
-                  <a:lnTo>
-                    <a:pt x="6214105" y="2963133"/>
-                  </a:lnTo>
-                  <a:lnTo>
-                    <a:pt x="6285727" y="2968444"/>
-                  </a:lnTo>
-                  <a:lnTo>
-                    <a:pt x="6357350" y="2973701"/>
-                  </a:lnTo>
-                  <a:lnTo>
-                    <a:pt x="6428972" y="2978905"/>
-                  </a:lnTo>
-                  <a:lnTo>
-                    <a:pt x="6500595" y="2984055"/>
-                  </a:lnTo>
-                  <a:lnTo>
-                    <a:pt x="6572217" y="2989153"/>
-                  </a:lnTo>
-                  <a:lnTo>
-                    <a:pt x="6643840" y="2994198"/>
-                  </a:lnTo>
-                  <a:lnTo>
-                    <a:pt x="6715462" y="2999192"/>
-                  </a:lnTo>
-                  <a:lnTo>
-                    <a:pt x="6787085" y="3004136"/>
-                  </a:lnTo>
-                  <a:lnTo>
-                    <a:pt x="6858708" y="3009029"/>
-                  </a:lnTo>
-                  <a:lnTo>
-                    <a:pt x="6930330" y="3013872"/>
-                  </a:lnTo>
-                </a:path>
-              </a:pathLst>
-            </a:custGeom>
-          </p:spPr>
-          <p:txBody>
-            <a:bodyPr/>
-            <a:lstStyle/>
-            <a:p/>
-          </p:txBody>
-        </p:sp>
-        <p:sp>
-          <p:nvSpPr>
             <p:cNvPr id="24" name="pl24"/>
             <p:cNvSpPr/>
             <p:nvPr/>
           </p:nvSpPr>
           <p:spPr>
             <a:xfrm>
-              <a:off x="1172049" y="4260492"/>
-              <a:ext cx="7090630" cy="1175621"/>
+              <a:off x="1392751" y="2143092"/>
+              <a:ext cx="6806665" cy="1087635"/>
             </a:xfrm>
             <a:custGeom>
               <a:avLst/>
               <a:pathLst>
-                <a:path w="7090630" h="1175621">
+                <a:path w="6806665" h="1087635">
                   <a:moveTo>
-                    <a:pt x="7090630" y="1175621"/>
+                    <a:pt x="0" y="0"/>
                   </a:moveTo>
                   <a:lnTo>
-                    <a:pt x="7019007" y="1171342"/>
-                  </a:lnTo>
-                  <a:lnTo>
-                    <a:pt x="6947385" y="1166913"/>
-                  </a:lnTo>
-                  <a:lnTo>
-                    <a:pt x="6875762" y="1162326"/>
-                  </a:lnTo>
-                  <a:lnTo>
-                    <a:pt x="6804139" y="1157578"/>
-                  </a:lnTo>
-                  <a:lnTo>
-                    <a:pt x="6732517" y="1152662"/>
-                  </a:lnTo>
-                  <a:lnTo>
-                    <a:pt x="6660894" y="1147572"/>
-                  </a:lnTo>
-                  <a:lnTo>
-                    <a:pt x="6589272" y="1142303"/>
-                  </a:lnTo>
-                  <a:lnTo>
-                    <a:pt x="6517649" y="1136847"/>
-                  </a:lnTo>
-                  <a:lnTo>
-                    <a:pt x="6446027" y="1131199"/>
-                  </a:lnTo>
-                  <a:lnTo>
-                    <a:pt x="6374404" y="1125351"/>
-                  </a:lnTo>
-                  <a:lnTo>
-                    <a:pt x="6302782" y="1119296"/>
-                  </a:lnTo>
-                  <a:lnTo>
-                    <a:pt x="6231159" y="1113028"/>
-                  </a:lnTo>
-                  <a:lnTo>
-                    <a:pt x="6159537" y="1106539"/>
-                  </a:lnTo>
-                  <a:lnTo>
-                    <a:pt x="6087914" y="1099820"/>
-                  </a:lnTo>
-                  <a:lnTo>
-                    <a:pt x="6016292" y="1092863"/>
-                  </a:lnTo>
-                  <a:lnTo>
-                    <a:pt x="5944669" y="1085662"/>
-                  </a:lnTo>
-                  <a:lnTo>
-                    <a:pt x="5873047" y="1078205"/>
-                  </a:lnTo>
-                  <a:lnTo>
-                    <a:pt x="5801424" y="1070486"/>
-                  </a:lnTo>
-                  <a:lnTo>
-                    <a:pt x="5729802" y="1062493"/>
-                  </a:lnTo>
-                  <a:lnTo>
-                    <a:pt x="5658179" y="1054219"/>
-                  </a:lnTo>
-                  <a:lnTo>
-                    <a:pt x="5586557" y="1045652"/>
-                  </a:lnTo>
-                  <a:lnTo>
-                    <a:pt x="5514934" y="1036782"/>
-                  </a:lnTo>
-                  <a:lnTo>
-                    <a:pt x="5443311" y="1027599"/>
-                  </a:lnTo>
-                  <a:lnTo>
-                    <a:pt x="5371689" y="1018092"/>
-                  </a:lnTo>
-                  <a:lnTo>
-                    <a:pt x="5300066" y="1008249"/>
-                  </a:lnTo>
-                  <a:lnTo>
-                    <a:pt x="5228444" y="998058"/>
-                  </a:lnTo>
-                  <a:lnTo>
-                    <a:pt x="5156821" y="987508"/>
-                  </a:lnTo>
-                  <a:lnTo>
-                    <a:pt x="5085199" y="976585"/>
-                  </a:lnTo>
-                  <a:lnTo>
-                    <a:pt x="5013576" y="965275"/>
-                  </a:lnTo>
-                  <a:lnTo>
-                    <a:pt x="4941954" y="953567"/>
-                  </a:lnTo>
-                  <a:lnTo>
-                    <a:pt x="4870331" y="941445"/>
-                  </a:lnTo>
-                  <a:lnTo>
-                    <a:pt x="4798709" y="928894"/>
-                  </a:lnTo>
-                  <a:lnTo>
-                    <a:pt x="4727086" y="915901"/>
-                  </a:lnTo>
-                  <a:lnTo>
-                    <a:pt x="4655464" y="902448"/>
-                  </a:lnTo>
-                  <a:lnTo>
-                    <a:pt x="4583841" y="888520"/>
-                  </a:lnTo>
-                  <a:lnTo>
-                    <a:pt x="4512219" y="874101"/>
-                  </a:lnTo>
-                  <a:lnTo>
-                    <a:pt x="4440596" y="859172"/>
-                  </a:lnTo>
-                  <a:lnTo>
-                    <a:pt x="4368974" y="843715"/>
-                  </a:lnTo>
-                  <a:lnTo>
-                    <a:pt x="4297351" y="827713"/>
-                  </a:lnTo>
-                  <a:lnTo>
-                    <a:pt x="4225729" y="811145"/>
-                  </a:lnTo>
-                  <a:lnTo>
-                    <a:pt x="4154106" y="793993"/>
-                  </a:lnTo>
-                  <a:lnTo>
-                    <a:pt x="4082483" y="776234"/>
-                  </a:lnTo>
-                  <a:lnTo>
-                    <a:pt x="4010861" y="757848"/>
-                  </a:lnTo>
-                  <a:lnTo>
-                    <a:pt x="3939238" y="738813"/>
-                  </a:lnTo>
-                  <a:lnTo>
-                    <a:pt x="3867616" y="719105"/>
-                  </a:lnTo>
-                  <a:lnTo>
-                    <a:pt x="3795993" y="698701"/>
-                  </a:lnTo>
-                  <a:lnTo>
-                    <a:pt x="3724371" y="677577"/>
-                  </a:lnTo>
-                  <a:lnTo>
-                    <a:pt x="3652748" y="655706"/>
-                  </a:lnTo>
-                  <a:lnTo>
-                    <a:pt x="3581126" y="633063"/>
-                  </a:lnTo>
-                  <a:lnTo>
-                    <a:pt x="3509503" y="609620"/>
-                  </a:lnTo>
-                  <a:lnTo>
-                    <a:pt x="3437881" y="585349"/>
-                  </a:lnTo>
-                  <a:lnTo>
-                    <a:pt x="3366258" y="560220"/>
-                  </a:lnTo>
-                  <a:lnTo>
-                    <a:pt x="3294636" y="534205"/>
-                  </a:lnTo>
-                  <a:lnTo>
-                    <a:pt x="3223013" y="507270"/>
-                  </a:lnTo>
-                  <a:lnTo>
-                    <a:pt x="3151391" y="479383"/>
-                  </a:lnTo>
-                  <a:lnTo>
-                    <a:pt x="3079768" y="462371"/>
-                  </a:lnTo>
-                  <a:lnTo>
-                    <a:pt x="3008146" y="453771"/>
-                  </a:lnTo>
-                  <a:lnTo>
-                    <a:pt x="2936523" y="445082"/>
-                  </a:lnTo>
-                  <a:lnTo>
-                    <a:pt x="2864901" y="436304"/>
-                  </a:lnTo>
-                  <a:lnTo>
-                    <a:pt x="2793278" y="427436"/>
-                  </a:lnTo>
-                  <a:lnTo>
-                    <a:pt x="2721655" y="418476"/>
-                  </a:lnTo>
-                  <a:lnTo>
-                    <a:pt x="2650033" y="409424"/>
-                  </a:lnTo>
-                  <a:lnTo>
-                    <a:pt x="2578410" y="400278"/>
-                  </a:lnTo>
-                  <a:lnTo>
-                    <a:pt x="2506788" y="391038"/>
-                  </a:lnTo>
-                  <a:lnTo>
-                    <a:pt x="2435165" y="381703"/>
-                  </a:lnTo>
-                  <a:lnTo>
-                    <a:pt x="2363543" y="372272"/>
-                  </a:lnTo>
-                  <a:lnTo>
-                    <a:pt x="2291920" y="362743"/>
-                  </a:lnTo>
-                  <a:lnTo>
-                    <a:pt x="2220298" y="353116"/>
-                  </a:lnTo>
-                  <a:lnTo>
-                    <a:pt x="2148675" y="343390"/>
-                  </a:lnTo>
-                  <a:lnTo>
-                    <a:pt x="2077053" y="333564"/>
-                  </a:lnTo>
-                  <a:lnTo>
-                    <a:pt x="2005430" y="323637"/>
-                  </a:lnTo>
-                  <a:lnTo>
-                    <a:pt x="1933808" y="313607"/>
-                  </a:lnTo>
-                  <a:lnTo>
-                    <a:pt x="1862185" y="303474"/>
-                  </a:lnTo>
-                  <a:lnTo>
-                    <a:pt x="1790563" y="293236"/>
-                  </a:lnTo>
-                  <a:lnTo>
-                    <a:pt x="1718940" y="282893"/>
-                  </a:lnTo>
-                  <a:lnTo>
-                    <a:pt x="1647318" y="272443"/>
-                  </a:lnTo>
-                  <a:lnTo>
-                    <a:pt x="1575695" y="261886"/>
-                  </a:lnTo>
-                  <a:lnTo>
-                    <a:pt x="1504073" y="251220"/>
-                  </a:lnTo>
-                  <a:lnTo>
-                    <a:pt x="1432450" y="240443"/>
-                  </a:lnTo>
-                  <a:lnTo>
-                    <a:pt x="1360827" y="229556"/>
-                  </a:lnTo>
-                  <a:lnTo>
-                    <a:pt x="1289205" y="218557"/>
-                  </a:lnTo>
-                  <a:lnTo>
-                    <a:pt x="1217582" y="207444"/>
-                  </a:lnTo>
-                  <a:lnTo>
-                    <a:pt x="1145960" y="196216"/>
-                  </a:lnTo>
-                  <a:lnTo>
-                    <a:pt x="1074337" y="184873"/>
-                  </a:lnTo>
-                  <a:lnTo>
-                    <a:pt x="1002715" y="173413"/>
-                  </a:lnTo>
-                  <a:lnTo>
-                    <a:pt x="931092" y="161835"/>
-                  </a:lnTo>
-                  <a:lnTo>
-                    <a:pt x="859470" y="150138"/>
-                  </a:lnTo>
-                  <a:lnTo>
-                    <a:pt x="787847" y="138320"/>
-                  </a:lnTo>
-                  <a:lnTo>
-                    <a:pt x="716225" y="126380"/>
-                  </a:lnTo>
-                  <a:lnTo>
-                    <a:pt x="644602" y="114317"/>
-                  </a:lnTo>
-                  <a:lnTo>
-                    <a:pt x="572980" y="102130"/>
-                  </a:lnTo>
-                  <a:lnTo>
-                    <a:pt x="501357" y="89817"/>
-                  </a:lnTo>
-                  <a:lnTo>
-                    <a:pt x="429735" y="77377"/>
-                  </a:lnTo>
-                  <a:lnTo>
-                    <a:pt x="358112" y="64809"/>
-                  </a:lnTo>
-                  <a:lnTo>
-                    <a:pt x="286490" y="52112"/>
-                  </a:lnTo>
-                  <a:lnTo>
-                    <a:pt x="214867" y="39283"/>
-                  </a:lnTo>
-                  <a:lnTo>
-                    <a:pt x="143245" y="26323"/>
-                  </a:lnTo>
-                  <a:lnTo>
-                    <a:pt x="71622" y="13229"/>
-                  </a:lnTo>
-                  <a:lnTo>
-                    <a:pt x="0" y="0"/>
+                    <a:pt x="53594" y="32946"/>
+                  </a:lnTo>
+                  <a:lnTo>
+                    <a:pt x="123938" y="74714"/>
+                  </a:lnTo>
+                  <a:lnTo>
+                    <a:pt x="194283" y="115056"/>
+                  </a:lnTo>
+                  <a:lnTo>
+                    <a:pt x="264627" y="154023"/>
+                  </a:lnTo>
+                  <a:lnTo>
+                    <a:pt x="334972" y="191660"/>
+                  </a:lnTo>
+                  <a:lnTo>
+                    <a:pt x="405316" y="228013"/>
+                  </a:lnTo>
+                  <a:lnTo>
+                    <a:pt x="475661" y="263126"/>
+                  </a:lnTo>
+                  <a:lnTo>
+                    <a:pt x="546005" y="297041"/>
+                  </a:lnTo>
+                  <a:lnTo>
+                    <a:pt x="616350" y="329798"/>
+                  </a:lnTo>
+                  <a:lnTo>
+                    <a:pt x="686694" y="361439"/>
+                  </a:lnTo>
+                  <a:lnTo>
+                    <a:pt x="757039" y="391999"/>
+                  </a:lnTo>
+                  <a:lnTo>
+                    <a:pt x="827383" y="421517"/>
+                  </a:lnTo>
+                  <a:lnTo>
+                    <a:pt x="897728" y="450028"/>
+                  </a:lnTo>
+                  <a:lnTo>
+                    <a:pt x="968072" y="477567"/>
+                  </a:lnTo>
+                  <a:lnTo>
+                    <a:pt x="1038417" y="504165"/>
+                  </a:lnTo>
+                  <a:lnTo>
+                    <a:pt x="1108761" y="529857"/>
+                  </a:lnTo>
+                  <a:lnTo>
+                    <a:pt x="1179106" y="554671"/>
+                  </a:lnTo>
+                  <a:lnTo>
+                    <a:pt x="1249450" y="578640"/>
+                  </a:lnTo>
+                  <a:lnTo>
+                    <a:pt x="1319795" y="601790"/>
+                  </a:lnTo>
+                  <a:lnTo>
+                    <a:pt x="1390139" y="624151"/>
+                  </a:lnTo>
+                  <a:lnTo>
+                    <a:pt x="1460484" y="645748"/>
+                  </a:lnTo>
+                  <a:lnTo>
+                    <a:pt x="1530828" y="666609"/>
+                  </a:lnTo>
+                  <a:lnTo>
+                    <a:pt x="1601173" y="686759"/>
+                  </a:lnTo>
+                  <a:lnTo>
+                    <a:pt x="1671517" y="706220"/>
+                  </a:lnTo>
+                  <a:lnTo>
+                    <a:pt x="1741862" y="725018"/>
+                  </a:lnTo>
+                  <a:lnTo>
+                    <a:pt x="1812206" y="743175"/>
+                  </a:lnTo>
+                  <a:lnTo>
+                    <a:pt x="1882551" y="760712"/>
+                  </a:lnTo>
+                  <a:lnTo>
+                    <a:pt x="1952895" y="777650"/>
+                  </a:lnTo>
+                  <a:lnTo>
+                    <a:pt x="2023240" y="794011"/>
+                  </a:lnTo>
+                  <a:lnTo>
+                    <a:pt x="2093584" y="809814"/>
+                  </a:lnTo>
+                  <a:lnTo>
+                    <a:pt x="2163929" y="825077"/>
+                  </a:lnTo>
+                  <a:lnTo>
+                    <a:pt x="2234273" y="839820"/>
+                  </a:lnTo>
+                  <a:lnTo>
+                    <a:pt x="2304618" y="854060"/>
+                  </a:lnTo>
+                  <a:lnTo>
+                    <a:pt x="2374962" y="867814"/>
+                  </a:lnTo>
+                  <a:lnTo>
+                    <a:pt x="2445306" y="881099"/>
+                  </a:lnTo>
+                  <a:lnTo>
+                    <a:pt x="2515651" y="893930"/>
+                  </a:lnTo>
+                  <a:lnTo>
+                    <a:pt x="2585995" y="906324"/>
+                  </a:lnTo>
+                  <a:lnTo>
+                    <a:pt x="2656340" y="918295"/>
+                  </a:lnTo>
+                  <a:lnTo>
+                    <a:pt x="2726684" y="929857"/>
+                  </a:lnTo>
+                  <a:lnTo>
+                    <a:pt x="2797029" y="941025"/>
+                  </a:lnTo>
+                  <a:lnTo>
+                    <a:pt x="2867373" y="951812"/>
+                  </a:lnTo>
+                  <a:lnTo>
+                    <a:pt x="2937718" y="959163"/>
+                  </a:lnTo>
+                  <a:lnTo>
+                    <a:pt x="3008062" y="962204"/>
+                  </a:lnTo>
+                  <a:lnTo>
+                    <a:pt x="3078407" y="965213"/>
+                  </a:lnTo>
+                  <a:lnTo>
+                    <a:pt x="3148751" y="968192"/>
+                  </a:lnTo>
+                  <a:lnTo>
+                    <a:pt x="3219096" y="971141"/>
+                  </a:lnTo>
+                  <a:lnTo>
+                    <a:pt x="3289440" y="974059"/>
+                  </a:lnTo>
+                  <a:lnTo>
+                    <a:pt x="3359785" y="976947"/>
+                  </a:lnTo>
+                  <a:lnTo>
+                    <a:pt x="3430129" y="979807"/>
+                  </a:lnTo>
+                  <a:lnTo>
+                    <a:pt x="3500474" y="982636"/>
+                  </a:lnTo>
+                  <a:lnTo>
+                    <a:pt x="3570818" y="985437"/>
+                  </a:lnTo>
+                  <a:lnTo>
+                    <a:pt x="3641163" y="988210"/>
+                  </a:lnTo>
+                  <a:lnTo>
+                    <a:pt x="3711507" y="990954"/>
+                  </a:lnTo>
+                  <a:lnTo>
+                    <a:pt x="3781852" y="993670"/>
+                  </a:lnTo>
+                  <a:lnTo>
+                    <a:pt x="3852196" y="996359"/>
+                  </a:lnTo>
+                  <a:lnTo>
+                    <a:pt x="3922541" y="999020"/>
+                  </a:lnTo>
+                  <a:lnTo>
+                    <a:pt x="3992885" y="1001654"/>
+                  </a:lnTo>
+                  <a:lnTo>
+                    <a:pt x="4063230" y="1004261"/>
+                  </a:lnTo>
+                  <a:lnTo>
+                    <a:pt x="4133574" y="1006841"/>
+                  </a:lnTo>
+                  <a:lnTo>
+                    <a:pt x="4203919" y="1009395"/>
+                  </a:lnTo>
+                  <a:lnTo>
+                    <a:pt x="4274263" y="1011923"/>
+                  </a:lnTo>
+                  <a:lnTo>
+                    <a:pt x="4344608" y="1014426"/>
+                  </a:lnTo>
+                  <a:lnTo>
+                    <a:pt x="4414952" y="1016902"/>
+                  </a:lnTo>
+                  <a:lnTo>
+                    <a:pt x="4485297" y="1019354"/>
+                  </a:lnTo>
+                  <a:lnTo>
+                    <a:pt x="4555641" y="1021780"/>
+                  </a:lnTo>
+                  <a:lnTo>
+                    <a:pt x="4625986" y="1024182"/>
+                  </a:lnTo>
+                  <a:lnTo>
+                    <a:pt x="4696330" y="1026559"/>
+                  </a:lnTo>
+                  <a:lnTo>
+                    <a:pt x="4766675" y="1028912"/>
+                  </a:lnTo>
+                  <a:lnTo>
+                    <a:pt x="4837019" y="1031241"/>
+                  </a:lnTo>
+                  <a:lnTo>
+                    <a:pt x="4907364" y="1033546"/>
+                  </a:lnTo>
+                  <a:lnTo>
+                    <a:pt x="4977708" y="1035828"/>
+                  </a:lnTo>
+                  <a:lnTo>
+                    <a:pt x="5048053" y="1038086"/>
+                  </a:lnTo>
+                  <a:lnTo>
+                    <a:pt x="5118397" y="1040322"/>
+                  </a:lnTo>
+                  <a:lnTo>
+                    <a:pt x="5188742" y="1042534"/>
+                  </a:lnTo>
+                  <a:lnTo>
+                    <a:pt x="5259086" y="1044724"/>
+                  </a:lnTo>
+                  <a:lnTo>
+                    <a:pt x="5329431" y="1046892"/>
+                  </a:lnTo>
+                  <a:lnTo>
+                    <a:pt x="5399775" y="1049037"/>
+                  </a:lnTo>
+                  <a:lnTo>
+                    <a:pt x="5470120" y="1051161"/>
+                  </a:lnTo>
+                  <a:lnTo>
+                    <a:pt x="5540464" y="1053263"/>
+                  </a:lnTo>
+                  <a:lnTo>
+                    <a:pt x="5610809" y="1055343"/>
+                  </a:lnTo>
+                  <a:lnTo>
+                    <a:pt x="5681153" y="1057403"/>
+                  </a:lnTo>
+                  <a:lnTo>
+                    <a:pt x="5751498" y="1059441"/>
+                  </a:lnTo>
+                  <a:lnTo>
+                    <a:pt x="5821842" y="1061458"/>
+                  </a:lnTo>
+                  <a:lnTo>
+                    <a:pt x="5892187" y="1063455"/>
+                  </a:lnTo>
+                  <a:lnTo>
+                    <a:pt x="5962531" y="1065432"/>
+                  </a:lnTo>
+                  <a:lnTo>
+                    <a:pt x="6032876" y="1067388"/>
+                  </a:lnTo>
+                  <a:lnTo>
+                    <a:pt x="6103220" y="1069325"/>
+                  </a:lnTo>
+                  <a:lnTo>
+                    <a:pt x="6173564" y="1071241"/>
+                  </a:lnTo>
+                  <a:lnTo>
+                    <a:pt x="6243909" y="1073139"/>
+                  </a:lnTo>
+                  <a:lnTo>
+                    <a:pt x="6314253" y="1075016"/>
+                  </a:lnTo>
+                  <a:lnTo>
+                    <a:pt x="6384598" y="1076875"/>
+                  </a:lnTo>
+                  <a:lnTo>
+                    <a:pt x="6454942" y="1078715"/>
+                  </a:lnTo>
+                  <a:lnTo>
+                    <a:pt x="6525287" y="1080535"/>
+                  </a:lnTo>
+                  <a:lnTo>
+                    <a:pt x="6595631" y="1082338"/>
+                  </a:lnTo>
+                  <a:lnTo>
+                    <a:pt x="6665976" y="1084122"/>
+                  </a:lnTo>
+                  <a:lnTo>
+                    <a:pt x="6736320" y="1085887"/>
+                  </a:lnTo>
+                  <a:lnTo>
+                    <a:pt x="6806665" y="1087635"/>
                   </a:lnTo>
                 </a:path>
               </a:pathLst>
@@ -4314,312 +4024,637 @@
           </p:nvSpPr>
           <p:spPr>
             <a:xfrm>
-              <a:off x="1172049" y="3347722"/>
-              <a:ext cx="7090630" cy="1970951"/>
+              <a:off x="1235312" y="2932325"/>
+              <a:ext cx="6964104" cy="424254"/>
             </a:xfrm>
             <a:custGeom>
               <a:avLst/>
               <a:pathLst>
-                <a:path w="7090630" h="1970951">
+                <a:path w="6964104" h="424254">
+                  <a:moveTo>
+                    <a:pt x="6964104" y="424254"/>
+                  </a:moveTo>
+                  <a:lnTo>
+                    <a:pt x="6893760" y="422710"/>
+                  </a:lnTo>
+                  <a:lnTo>
+                    <a:pt x="6823415" y="421111"/>
+                  </a:lnTo>
+                  <a:lnTo>
+                    <a:pt x="6753071" y="419456"/>
+                  </a:lnTo>
+                  <a:lnTo>
+                    <a:pt x="6682726" y="417742"/>
+                  </a:lnTo>
+                  <a:lnTo>
+                    <a:pt x="6612382" y="415968"/>
+                  </a:lnTo>
+                  <a:lnTo>
+                    <a:pt x="6542037" y="414131"/>
+                  </a:lnTo>
+                  <a:lnTo>
+                    <a:pt x="6471693" y="412230"/>
+                  </a:lnTo>
+                  <a:lnTo>
+                    <a:pt x="6401348" y="410261"/>
+                  </a:lnTo>
+                  <a:lnTo>
+                    <a:pt x="6331004" y="408223"/>
+                  </a:lnTo>
+                  <a:lnTo>
+                    <a:pt x="6260659" y="406112"/>
+                  </a:lnTo>
+                  <a:lnTo>
+                    <a:pt x="6190315" y="403927"/>
+                  </a:lnTo>
+                  <a:lnTo>
+                    <a:pt x="6119970" y="401665"/>
+                  </a:lnTo>
+                  <a:lnTo>
+                    <a:pt x="6049626" y="399323"/>
+                  </a:lnTo>
+                  <a:lnTo>
+                    <a:pt x="5979281" y="396899"/>
+                  </a:lnTo>
+                  <a:lnTo>
+                    <a:pt x="5908937" y="394388"/>
+                  </a:lnTo>
+                  <a:lnTo>
+                    <a:pt x="5838592" y="391789"/>
+                  </a:lnTo>
+                  <a:lnTo>
+                    <a:pt x="5768248" y="389099"/>
+                  </a:lnTo>
+                  <a:lnTo>
+                    <a:pt x="5697903" y="386313"/>
+                  </a:lnTo>
+                  <a:lnTo>
+                    <a:pt x="5627559" y="383428"/>
+                  </a:lnTo>
+                  <a:lnTo>
+                    <a:pt x="5557214" y="380442"/>
+                  </a:lnTo>
+                  <a:lnTo>
+                    <a:pt x="5486870" y="377351"/>
+                  </a:lnTo>
+                  <a:lnTo>
+                    <a:pt x="5416525" y="374150"/>
+                  </a:lnTo>
+                  <a:lnTo>
+                    <a:pt x="5346181" y="370836"/>
+                  </a:lnTo>
+                  <a:lnTo>
+                    <a:pt x="5275836" y="367405"/>
+                  </a:lnTo>
+                  <a:lnTo>
+                    <a:pt x="5205492" y="363853"/>
+                  </a:lnTo>
+                  <a:lnTo>
+                    <a:pt x="5135147" y="360176"/>
+                  </a:lnTo>
+                  <a:lnTo>
+                    <a:pt x="5064803" y="356368"/>
+                  </a:lnTo>
+                  <a:lnTo>
+                    <a:pt x="4994458" y="352426"/>
+                  </a:lnTo>
+                  <a:lnTo>
+                    <a:pt x="4924114" y="348345"/>
+                  </a:lnTo>
+                  <a:lnTo>
+                    <a:pt x="4853769" y="344120"/>
+                  </a:lnTo>
+                  <a:lnTo>
+                    <a:pt x="4783425" y="339745"/>
+                  </a:lnTo>
+                  <a:lnTo>
+                    <a:pt x="4713080" y="335216"/>
+                  </a:lnTo>
+                  <a:lnTo>
+                    <a:pt x="4642736" y="330527"/>
+                  </a:lnTo>
+                  <a:lnTo>
+                    <a:pt x="4572391" y="325672"/>
+                  </a:lnTo>
+                  <a:lnTo>
+                    <a:pt x="4502047" y="320646"/>
+                  </a:lnTo>
+                  <a:lnTo>
+                    <a:pt x="4431702" y="315442"/>
+                  </a:lnTo>
+                  <a:lnTo>
+                    <a:pt x="4361358" y="310055"/>
+                  </a:lnTo>
+                  <a:lnTo>
+                    <a:pt x="4291013" y="304477"/>
+                  </a:lnTo>
+                  <a:lnTo>
+                    <a:pt x="4220669" y="298702"/>
+                  </a:lnTo>
+                  <a:lnTo>
+                    <a:pt x="4150324" y="292723"/>
+                  </a:lnTo>
+                  <a:lnTo>
+                    <a:pt x="4079980" y="286533"/>
+                  </a:lnTo>
+                  <a:lnTo>
+                    <a:pt x="4009635" y="280124"/>
+                  </a:lnTo>
+                  <a:lnTo>
+                    <a:pt x="3939291" y="273489"/>
+                  </a:lnTo>
+                  <a:lnTo>
+                    <a:pt x="3868946" y="266620"/>
+                  </a:lnTo>
+                  <a:lnTo>
+                    <a:pt x="3798602" y="259508"/>
+                  </a:lnTo>
+                  <a:lnTo>
+                    <a:pt x="3728257" y="252145"/>
+                  </a:lnTo>
+                  <a:lnTo>
+                    <a:pt x="3657913" y="244521"/>
+                  </a:lnTo>
+                  <a:lnTo>
+                    <a:pt x="3587569" y="236629"/>
+                  </a:lnTo>
+                  <a:lnTo>
+                    <a:pt x="3517224" y="228457"/>
+                  </a:lnTo>
+                  <a:lnTo>
+                    <a:pt x="3446880" y="219997"/>
+                  </a:lnTo>
+                  <a:lnTo>
+                    <a:pt x="3376535" y="211238"/>
+                  </a:lnTo>
+                  <a:lnTo>
+                    <a:pt x="3306191" y="202170"/>
+                  </a:lnTo>
+                  <a:lnTo>
+                    <a:pt x="3235846" y="192782"/>
+                  </a:lnTo>
+                  <a:lnTo>
+                    <a:pt x="3165502" y="183061"/>
+                  </a:lnTo>
+                  <a:lnTo>
+                    <a:pt x="3095157" y="172998"/>
+                  </a:lnTo>
+                  <a:lnTo>
+                    <a:pt x="3024813" y="166858"/>
+                  </a:lnTo>
+                  <a:lnTo>
+                    <a:pt x="2954468" y="163755"/>
+                  </a:lnTo>
+                  <a:lnTo>
+                    <a:pt x="2884124" y="160619"/>
+                  </a:lnTo>
+                  <a:lnTo>
+                    <a:pt x="2813779" y="157452"/>
+                  </a:lnTo>
+                  <a:lnTo>
+                    <a:pt x="2743435" y="154251"/>
+                  </a:lnTo>
+                  <a:lnTo>
+                    <a:pt x="2673090" y="151018"/>
+                  </a:lnTo>
+                  <a:lnTo>
+                    <a:pt x="2602746" y="147751"/>
+                  </a:lnTo>
+                  <a:lnTo>
+                    <a:pt x="2532401" y="144451"/>
+                  </a:lnTo>
+                  <a:lnTo>
+                    <a:pt x="2462057" y="141116"/>
+                  </a:lnTo>
+                  <a:lnTo>
+                    <a:pt x="2391712" y="137747"/>
+                  </a:lnTo>
+                  <a:lnTo>
+                    <a:pt x="2321368" y="134344"/>
+                  </a:lnTo>
+                  <a:lnTo>
+                    <a:pt x="2251023" y="130905"/>
+                  </a:lnTo>
+                  <a:lnTo>
+                    <a:pt x="2180679" y="127431"/>
+                  </a:lnTo>
+                  <a:lnTo>
+                    <a:pt x="2110334" y="123921"/>
+                  </a:lnTo>
+                  <a:lnTo>
+                    <a:pt x="2039990" y="120375"/>
+                  </a:lnTo>
+                  <a:lnTo>
+                    <a:pt x="1969645" y="116793"/>
+                  </a:lnTo>
+                  <a:lnTo>
+                    <a:pt x="1899301" y="113173"/>
+                  </a:lnTo>
+                  <a:lnTo>
+                    <a:pt x="1828956" y="109516"/>
+                  </a:lnTo>
+                  <a:lnTo>
+                    <a:pt x="1758612" y="105822"/>
+                  </a:lnTo>
+                  <a:lnTo>
+                    <a:pt x="1688267" y="102089"/>
+                  </a:lnTo>
+                  <a:lnTo>
+                    <a:pt x="1617923" y="98318"/>
+                  </a:lnTo>
+                  <a:lnTo>
+                    <a:pt x="1547578" y="94508"/>
+                  </a:lnTo>
+                  <a:lnTo>
+                    <a:pt x="1477234" y="90659"/>
+                  </a:lnTo>
+                  <a:lnTo>
+                    <a:pt x="1406889" y="86770"/>
+                  </a:lnTo>
+                  <a:lnTo>
+                    <a:pt x="1336545" y="82841"/>
+                  </a:lnTo>
+                  <a:lnTo>
+                    <a:pt x="1266200" y="78872"/>
+                  </a:lnTo>
+                  <a:lnTo>
+                    <a:pt x="1195856" y="74861"/>
+                  </a:lnTo>
+                  <a:lnTo>
+                    <a:pt x="1125511" y="70810"/>
+                  </a:lnTo>
+                  <a:lnTo>
+                    <a:pt x="1055167" y="66716"/>
+                  </a:lnTo>
+                  <a:lnTo>
+                    <a:pt x="984822" y="62580"/>
+                  </a:lnTo>
+                  <a:lnTo>
+                    <a:pt x="914478" y="58402"/>
+                  </a:lnTo>
+                  <a:lnTo>
+                    <a:pt x="844133" y="54181"/>
+                  </a:lnTo>
+                  <a:lnTo>
+                    <a:pt x="773789" y="49916"/>
+                  </a:lnTo>
+                  <a:lnTo>
+                    <a:pt x="703444" y="45607"/>
+                  </a:lnTo>
+                  <a:lnTo>
+                    <a:pt x="633100" y="41254"/>
+                  </a:lnTo>
+                  <a:lnTo>
+                    <a:pt x="562755" y="36856"/>
+                  </a:lnTo>
+                  <a:lnTo>
+                    <a:pt x="492411" y="32413"/>
+                  </a:lnTo>
+                  <a:lnTo>
+                    <a:pt x="422066" y="27923"/>
+                  </a:lnTo>
+                  <a:lnTo>
+                    <a:pt x="351722" y="23388"/>
+                  </a:lnTo>
+                  <a:lnTo>
+                    <a:pt x="281377" y="18806"/>
+                  </a:lnTo>
+                  <a:lnTo>
+                    <a:pt x="211033" y="14176"/>
+                  </a:lnTo>
+                  <a:lnTo>
+                    <a:pt x="140688" y="9499"/>
+                  </a:lnTo>
+                  <a:lnTo>
+                    <a:pt x="70344" y="4774"/>
+                  </a:lnTo>
+                  <a:lnTo>
+                    <a:pt x="0" y="0"/>
+                  </a:lnTo>
+                </a:path>
+              </a:pathLst>
+            </a:custGeom>
+          </p:spPr>
+          <p:txBody>
+            <a:bodyPr/>
+            <a:lstStyle/>
+            <a:p/>
+          </p:txBody>
+        </p:sp>
+        <p:sp>
+          <p:nvSpPr>
+            <p:cNvPr id="26" name="pl26"/>
+            <p:cNvSpPr/>
+            <p:nvPr/>
+          </p:nvSpPr>
+          <p:spPr>
+            <a:xfrm>
+              <a:off x="1235312" y="2602928"/>
+              <a:ext cx="6964104" cy="711269"/>
+            </a:xfrm>
+            <a:custGeom>
+              <a:avLst/>
+              <a:pathLst>
+                <a:path w="6964104" h="711269">
                   <a:moveTo>
                     <a:pt x="0" y="0"/>
                   </a:moveTo>
                   <a:lnTo>
-                    <a:pt x="71622" y="49123"/>
-                  </a:lnTo>
-                  <a:lnTo>
-                    <a:pt x="143245" y="97154"/>
-                  </a:lnTo>
-                  <a:lnTo>
-                    <a:pt x="214867" y="144117"/>
-                  </a:lnTo>
-                  <a:lnTo>
-                    <a:pt x="286490" y="190036"/>
-                  </a:lnTo>
-                  <a:lnTo>
-                    <a:pt x="358112" y="234934"/>
-                  </a:lnTo>
-                  <a:lnTo>
-                    <a:pt x="429735" y="278834"/>
-                  </a:lnTo>
-                  <a:lnTo>
-                    <a:pt x="501357" y="321758"/>
-                  </a:lnTo>
-                  <a:lnTo>
-                    <a:pt x="572980" y="363728"/>
-                  </a:lnTo>
-                  <a:lnTo>
-                    <a:pt x="644602" y="404764"/>
-                  </a:lnTo>
-                  <a:lnTo>
-                    <a:pt x="716225" y="444889"/>
-                  </a:lnTo>
-                  <a:lnTo>
-                    <a:pt x="787847" y="484121"/>
-                  </a:lnTo>
-                  <a:lnTo>
-                    <a:pt x="859470" y="522481"/>
-                  </a:lnTo>
-                  <a:lnTo>
-                    <a:pt x="931092" y="559988"/>
-                  </a:lnTo>
-                  <a:lnTo>
-                    <a:pt x="1002715" y="596661"/>
-                  </a:lnTo>
-                  <a:lnTo>
-                    <a:pt x="1074337" y="632519"/>
-                  </a:lnTo>
-                  <a:lnTo>
-                    <a:pt x="1145960" y="667580"/>
-                  </a:lnTo>
-                  <a:lnTo>
-                    <a:pt x="1217582" y="701861"/>
-                  </a:lnTo>
-                  <a:lnTo>
-                    <a:pt x="1289205" y="735380"/>
-                  </a:lnTo>
-                  <a:lnTo>
-                    <a:pt x="1360827" y="768154"/>
-                  </a:lnTo>
-                  <a:lnTo>
-                    <a:pt x="1432450" y="800199"/>
-                  </a:lnTo>
-                  <a:lnTo>
-                    <a:pt x="1504073" y="831532"/>
-                  </a:lnTo>
-                  <a:lnTo>
-                    <a:pt x="1575695" y="862168"/>
-                  </a:lnTo>
-                  <a:lnTo>
-                    <a:pt x="1647318" y="892123"/>
-                  </a:lnTo>
-                  <a:lnTo>
-                    <a:pt x="1718940" y="921412"/>
-                  </a:lnTo>
-                  <a:lnTo>
-                    <a:pt x="1790563" y="950050"/>
-                  </a:lnTo>
-                  <a:lnTo>
-                    <a:pt x="1862185" y="978051"/>
-                  </a:lnTo>
-                  <a:lnTo>
-                    <a:pt x="1933808" y="1005430"/>
-                  </a:lnTo>
-                  <a:lnTo>
-                    <a:pt x="2005430" y="1032200"/>
-                  </a:lnTo>
-                  <a:lnTo>
-                    <a:pt x="2077053" y="1058375"/>
-                  </a:lnTo>
-                  <a:lnTo>
-                    <a:pt x="2148675" y="1083968"/>
-                  </a:lnTo>
-                  <a:lnTo>
-                    <a:pt x="2220298" y="1108992"/>
-                  </a:lnTo>
-                  <a:lnTo>
-                    <a:pt x="2291920" y="1133459"/>
-                  </a:lnTo>
-                  <a:lnTo>
-                    <a:pt x="2363543" y="1157383"/>
-                  </a:lnTo>
-                  <a:lnTo>
-                    <a:pt x="2435165" y="1180775"/>
-                  </a:lnTo>
-                  <a:lnTo>
-                    <a:pt x="2506788" y="1203646"/>
-                  </a:lnTo>
-                  <a:lnTo>
-                    <a:pt x="2578410" y="1226009"/>
-                  </a:lnTo>
-                  <a:lnTo>
-                    <a:pt x="2650033" y="1247875"/>
-                  </a:lnTo>
-                  <a:lnTo>
-                    <a:pt x="2721655" y="1269255"/>
-                  </a:lnTo>
-                  <a:lnTo>
-                    <a:pt x="2793278" y="1290160"/>
-                  </a:lnTo>
-                  <a:lnTo>
-                    <a:pt x="2864901" y="1310599"/>
-                  </a:lnTo>
-                  <a:lnTo>
-                    <a:pt x="2936523" y="1330585"/>
-                  </a:lnTo>
-                  <a:lnTo>
-                    <a:pt x="3008146" y="1350126"/>
-                  </a:lnTo>
-                  <a:lnTo>
-                    <a:pt x="3079768" y="1369232"/>
-                  </a:lnTo>
-                  <a:lnTo>
-                    <a:pt x="3151391" y="1387914"/>
-                  </a:lnTo>
-                  <a:lnTo>
-                    <a:pt x="3223013" y="1406181"/>
-                  </a:lnTo>
-                  <a:lnTo>
-                    <a:pt x="3294636" y="1424041"/>
-                  </a:lnTo>
-                  <a:lnTo>
-                    <a:pt x="3366258" y="1441504"/>
-                  </a:lnTo>
-                  <a:lnTo>
-                    <a:pt x="3437881" y="1458579"/>
-                  </a:lnTo>
-                  <a:lnTo>
-                    <a:pt x="3509503" y="1475275"/>
-                  </a:lnTo>
-                  <a:lnTo>
-                    <a:pt x="3581126" y="1491599"/>
-                  </a:lnTo>
-                  <a:lnTo>
-                    <a:pt x="3652748" y="1507560"/>
-                  </a:lnTo>
-                  <a:lnTo>
-                    <a:pt x="3724371" y="1523167"/>
-                  </a:lnTo>
-                  <a:lnTo>
-                    <a:pt x="3795993" y="1538426"/>
-                  </a:lnTo>
-                  <a:lnTo>
-                    <a:pt x="3867616" y="1553346"/>
-                  </a:lnTo>
-                  <a:lnTo>
-                    <a:pt x="3939238" y="1567935"/>
-                  </a:lnTo>
-                  <a:lnTo>
-                    <a:pt x="4010861" y="1582199"/>
-                  </a:lnTo>
-                  <a:lnTo>
-                    <a:pt x="4082483" y="1596146"/>
-                  </a:lnTo>
-                  <a:lnTo>
-                    <a:pt x="4154106" y="1609783"/>
-                  </a:lnTo>
-                  <a:lnTo>
-                    <a:pt x="4225729" y="1623117"/>
-                  </a:lnTo>
-                  <a:lnTo>
-                    <a:pt x="4297351" y="1636154"/>
-                  </a:lnTo>
-                  <a:lnTo>
-                    <a:pt x="4368974" y="1648901"/>
-                  </a:lnTo>
-                  <a:lnTo>
-                    <a:pt x="4440596" y="1661365"/>
-                  </a:lnTo>
-                  <a:lnTo>
-                    <a:pt x="4512219" y="1673552"/>
-                  </a:lnTo>
-                  <a:lnTo>
-                    <a:pt x="4583841" y="1685468"/>
-                  </a:lnTo>
-                  <a:lnTo>
-                    <a:pt x="4655464" y="1697119"/>
-                  </a:lnTo>
-                  <a:lnTo>
-                    <a:pt x="4727086" y="1708511"/>
-                  </a:lnTo>
-                  <a:lnTo>
-                    <a:pt x="4798709" y="1719650"/>
-                  </a:lnTo>
-                  <a:lnTo>
-                    <a:pt x="4870331" y="1730541"/>
-                  </a:lnTo>
-                  <a:lnTo>
-                    <a:pt x="4941954" y="1741190"/>
-                  </a:lnTo>
-                  <a:lnTo>
-                    <a:pt x="5013576" y="1751603"/>
-                  </a:lnTo>
-                  <a:lnTo>
-                    <a:pt x="5085199" y="1761783"/>
-                  </a:lnTo>
-                  <a:lnTo>
-                    <a:pt x="5156821" y="1771738"/>
-                  </a:lnTo>
-                  <a:lnTo>
-                    <a:pt x="5228444" y="1781471"/>
-                  </a:lnTo>
-                  <a:lnTo>
-                    <a:pt x="5300066" y="1790988"/>
-                  </a:lnTo>
-                  <a:lnTo>
-                    <a:pt x="5371689" y="1800293"/>
-                  </a:lnTo>
-                  <a:lnTo>
-                    <a:pt x="5443311" y="1809391"/>
-                  </a:lnTo>
-                  <a:lnTo>
-                    <a:pt x="5514934" y="1818287"/>
-                  </a:lnTo>
-                  <a:lnTo>
-                    <a:pt x="5586557" y="1826985"/>
-                  </a:lnTo>
-                  <a:lnTo>
-                    <a:pt x="5658179" y="1835490"/>
-                  </a:lnTo>
-                  <a:lnTo>
-                    <a:pt x="5729802" y="1843806"/>
-                  </a:lnTo>
-                  <a:lnTo>
-                    <a:pt x="5801424" y="1851937"/>
-                  </a:lnTo>
-                  <a:lnTo>
-                    <a:pt x="5873047" y="1859887"/>
-                  </a:lnTo>
-                  <a:lnTo>
-                    <a:pt x="5944669" y="1867660"/>
-                  </a:lnTo>
-                  <a:lnTo>
-                    <a:pt x="6016292" y="1875261"/>
-                  </a:lnTo>
-                  <a:lnTo>
-                    <a:pt x="6087914" y="1882692"/>
-                  </a:lnTo>
-                  <a:lnTo>
-                    <a:pt x="6159537" y="1889958"/>
-                  </a:lnTo>
-                  <a:lnTo>
-                    <a:pt x="6231159" y="1897063"/>
-                  </a:lnTo>
-                  <a:lnTo>
-                    <a:pt x="6302782" y="1904010"/>
-                  </a:lnTo>
-                  <a:lnTo>
-                    <a:pt x="6374404" y="1910802"/>
-                  </a:lnTo>
-                  <a:lnTo>
-                    <a:pt x="6446027" y="1917444"/>
-                  </a:lnTo>
-                  <a:lnTo>
-                    <a:pt x="6517649" y="1923938"/>
-                  </a:lnTo>
-                  <a:lnTo>
-                    <a:pt x="6589272" y="1930287"/>
-                  </a:lnTo>
-                  <a:lnTo>
-                    <a:pt x="6660894" y="1936495"/>
-                  </a:lnTo>
-                  <a:lnTo>
-                    <a:pt x="6732517" y="1942565"/>
-                  </a:lnTo>
-                  <a:lnTo>
-                    <a:pt x="6804139" y="1948500"/>
-                  </a:lnTo>
-                  <a:lnTo>
-                    <a:pt x="6875762" y="1954304"/>
-                  </a:lnTo>
-                  <a:lnTo>
-                    <a:pt x="6947385" y="1959978"/>
-                  </a:lnTo>
-                  <a:lnTo>
-                    <a:pt x="7019007" y="1965526"/>
-                  </a:lnTo>
-                  <a:lnTo>
-                    <a:pt x="7090630" y="1970951"/>
+                    <a:pt x="70344" y="17727"/>
+                  </a:lnTo>
+                  <a:lnTo>
+                    <a:pt x="140688" y="35060"/>
+                  </a:lnTo>
+                  <a:lnTo>
+                    <a:pt x="211033" y="52008"/>
+                  </a:lnTo>
+                  <a:lnTo>
+                    <a:pt x="281377" y="68579"/>
+                  </a:lnTo>
+                  <a:lnTo>
+                    <a:pt x="351722" y="84782"/>
+                  </a:lnTo>
+                  <a:lnTo>
+                    <a:pt x="422066" y="100624"/>
+                  </a:lnTo>
+                  <a:lnTo>
+                    <a:pt x="492411" y="116115"/>
+                  </a:lnTo>
+                  <a:lnTo>
+                    <a:pt x="562755" y="131260"/>
+                  </a:lnTo>
+                  <a:lnTo>
+                    <a:pt x="633100" y="146070"/>
+                  </a:lnTo>
+                  <a:lnTo>
+                    <a:pt x="703444" y="160550"/>
+                  </a:lnTo>
+                  <a:lnTo>
+                    <a:pt x="773789" y="174707"/>
+                  </a:lnTo>
+                  <a:lnTo>
+                    <a:pt x="844133" y="188551"/>
+                  </a:lnTo>
+                  <a:lnTo>
+                    <a:pt x="914478" y="202086"/>
+                  </a:lnTo>
+                  <a:lnTo>
+                    <a:pt x="984822" y="215321"/>
+                  </a:lnTo>
+                  <a:lnTo>
+                    <a:pt x="1055167" y="228261"/>
+                  </a:lnTo>
+                  <a:lnTo>
+                    <a:pt x="1125511" y="240914"/>
+                  </a:lnTo>
+                  <a:lnTo>
+                    <a:pt x="1195856" y="253285"/>
+                  </a:lnTo>
+                  <a:lnTo>
+                    <a:pt x="1266200" y="265381"/>
+                  </a:lnTo>
+                  <a:lnTo>
+                    <a:pt x="1336545" y="277208"/>
+                  </a:lnTo>
+                  <a:lnTo>
+                    <a:pt x="1406889" y="288773"/>
+                  </a:lnTo>
+                  <a:lnTo>
+                    <a:pt x="1477234" y="300080"/>
+                  </a:lnTo>
+                  <a:lnTo>
+                    <a:pt x="1547578" y="311136"/>
+                  </a:lnTo>
+                  <a:lnTo>
+                    <a:pt x="1617923" y="321946"/>
+                  </a:lnTo>
+                  <a:lnTo>
+                    <a:pt x="1688267" y="332516"/>
+                  </a:lnTo>
+                  <a:lnTo>
+                    <a:pt x="1758612" y="342850"/>
+                  </a:lnTo>
+                  <a:lnTo>
+                    <a:pt x="1828956" y="352955"/>
+                  </a:lnTo>
+                  <a:lnTo>
+                    <a:pt x="1899301" y="362836"/>
+                  </a:lnTo>
+                  <a:lnTo>
+                    <a:pt x="1969645" y="372496"/>
+                  </a:lnTo>
+                  <a:lnTo>
+                    <a:pt x="2039990" y="381942"/>
+                  </a:lnTo>
+                  <a:lnTo>
+                    <a:pt x="2110334" y="391178"/>
+                  </a:lnTo>
+                  <a:lnTo>
+                    <a:pt x="2180679" y="400209"/>
+                  </a:lnTo>
+                  <a:lnTo>
+                    <a:pt x="2251023" y="409038"/>
+                  </a:lnTo>
+                  <a:lnTo>
+                    <a:pt x="2321368" y="417672"/>
+                  </a:lnTo>
+                  <a:lnTo>
+                    <a:pt x="2391712" y="426113"/>
+                  </a:lnTo>
+                  <a:lnTo>
+                    <a:pt x="2462057" y="434367"/>
+                  </a:lnTo>
+                  <a:lnTo>
+                    <a:pt x="2532401" y="442438"/>
+                  </a:lnTo>
+                  <a:lnTo>
+                    <a:pt x="2602746" y="450329"/>
+                  </a:lnTo>
+                  <a:lnTo>
+                    <a:pt x="2673090" y="458044"/>
+                  </a:lnTo>
+                  <a:lnTo>
+                    <a:pt x="2743435" y="465588"/>
+                  </a:lnTo>
+                  <a:lnTo>
+                    <a:pt x="2813779" y="472964"/>
+                  </a:lnTo>
+                  <a:lnTo>
+                    <a:pt x="2884124" y="480176"/>
+                  </a:lnTo>
+                  <a:lnTo>
+                    <a:pt x="2954468" y="487228"/>
+                  </a:lnTo>
+                  <a:lnTo>
+                    <a:pt x="3024813" y="494123"/>
+                  </a:lnTo>
+                  <a:lnTo>
+                    <a:pt x="3095157" y="500865"/>
+                  </a:lnTo>
+                  <a:lnTo>
+                    <a:pt x="3165502" y="507457"/>
+                  </a:lnTo>
+                  <a:lnTo>
+                    <a:pt x="3235846" y="513903"/>
+                  </a:lnTo>
+                  <a:lnTo>
+                    <a:pt x="3306191" y="520205"/>
+                  </a:lnTo>
+                  <a:lnTo>
+                    <a:pt x="3376535" y="526367"/>
+                  </a:lnTo>
+                  <a:lnTo>
+                    <a:pt x="3446880" y="532392"/>
+                  </a:lnTo>
+                  <a:lnTo>
+                    <a:pt x="3517224" y="538283"/>
+                  </a:lnTo>
+                  <a:lnTo>
+                    <a:pt x="3587569" y="544043"/>
+                  </a:lnTo>
+                  <a:lnTo>
+                    <a:pt x="3657913" y="549675"/>
+                  </a:lnTo>
+                  <a:lnTo>
+                    <a:pt x="3728257" y="555181"/>
+                  </a:lnTo>
+                  <a:lnTo>
+                    <a:pt x="3798602" y="560566"/>
+                  </a:lnTo>
+                  <a:lnTo>
+                    <a:pt x="3868946" y="565830"/>
+                  </a:lnTo>
+                  <a:lnTo>
+                    <a:pt x="3939291" y="570978"/>
+                  </a:lnTo>
+                  <a:lnTo>
+                    <a:pt x="4009635" y="576011"/>
+                  </a:lnTo>
+                  <a:lnTo>
+                    <a:pt x="4079980" y="580932"/>
+                  </a:lnTo>
+                  <a:lnTo>
+                    <a:pt x="4150324" y="585744"/>
+                  </a:lnTo>
+                  <a:lnTo>
+                    <a:pt x="4220669" y="590449"/>
+                  </a:lnTo>
+                  <a:lnTo>
+                    <a:pt x="4291013" y="595049"/>
+                  </a:lnTo>
+                  <a:lnTo>
+                    <a:pt x="4361358" y="599547"/>
+                  </a:lnTo>
+                  <a:lnTo>
+                    <a:pt x="4431702" y="603945"/>
+                  </a:lnTo>
+                  <a:lnTo>
+                    <a:pt x="4502047" y="608246"/>
+                  </a:lnTo>
+                  <a:lnTo>
+                    <a:pt x="4572391" y="612450"/>
+                  </a:lnTo>
+                  <a:lnTo>
+                    <a:pt x="4642736" y="616561"/>
+                  </a:lnTo>
+                  <a:lnTo>
+                    <a:pt x="4713080" y="620581"/>
+                  </a:lnTo>
+                  <a:lnTo>
+                    <a:pt x="4783425" y="624511"/>
+                  </a:lnTo>
+                  <a:lnTo>
+                    <a:pt x="4853769" y="628354"/>
+                  </a:lnTo>
+                  <a:lnTo>
+                    <a:pt x="4924114" y="632112"/>
+                  </a:lnTo>
+                  <a:lnTo>
+                    <a:pt x="4994458" y="635786"/>
+                  </a:lnTo>
+                  <a:lnTo>
+                    <a:pt x="5064803" y="639378"/>
+                  </a:lnTo>
+                  <a:lnTo>
+                    <a:pt x="5135147" y="642891"/>
+                  </a:lnTo>
+                  <a:lnTo>
+                    <a:pt x="5205492" y="646325"/>
+                  </a:lnTo>
+                  <a:lnTo>
+                    <a:pt x="5275836" y="649683"/>
+                  </a:lnTo>
+                  <a:lnTo>
+                    <a:pt x="5346181" y="652966"/>
+                  </a:lnTo>
+                  <a:lnTo>
+                    <a:pt x="5416525" y="656177"/>
+                  </a:lnTo>
+                  <a:lnTo>
+                    <a:pt x="5486870" y="659316"/>
+                  </a:lnTo>
+                  <a:lnTo>
+                    <a:pt x="5557214" y="662385"/>
+                  </a:lnTo>
+                  <a:lnTo>
+                    <a:pt x="5627559" y="665386"/>
+                  </a:lnTo>
+                  <a:lnTo>
+                    <a:pt x="5697903" y="668320"/>
+                  </a:lnTo>
+                  <a:lnTo>
+                    <a:pt x="5768248" y="671189"/>
+                  </a:lnTo>
+                  <a:lnTo>
+                    <a:pt x="5838592" y="673994"/>
+                  </a:lnTo>
+                  <a:lnTo>
+                    <a:pt x="5908937" y="676737"/>
+                  </a:lnTo>
+                  <a:lnTo>
+                    <a:pt x="5979281" y="679419"/>
+                  </a:lnTo>
+                  <a:lnTo>
+                    <a:pt x="6049626" y="682041"/>
+                  </a:lnTo>
+                  <a:lnTo>
+                    <a:pt x="6119970" y="684605"/>
+                  </a:lnTo>
+                  <a:lnTo>
+                    <a:pt x="6190315" y="687112"/>
+                  </a:lnTo>
+                  <a:lnTo>
+                    <a:pt x="6260659" y="689563"/>
+                  </a:lnTo>
+                  <a:lnTo>
+                    <a:pt x="6331004" y="691960"/>
+                  </a:lnTo>
+                  <a:lnTo>
+                    <a:pt x="6401348" y="694303"/>
+                  </a:lnTo>
+                  <a:lnTo>
+                    <a:pt x="6471693" y="696595"/>
+                  </a:lnTo>
+                  <a:lnTo>
+                    <a:pt x="6542037" y="698835"/>
+                  </a:lnTo>
+                  <a:lnTo>
+                    <a:pt x="6612382" y="701026"/>
+                  </a:lnTo>
+                  <a:lnTo>
+                    <a:pt x="6682726" y="703168"/>
+                  </a:lnTo>
+                  <a:lnTo>
+                    <a:pt x="6753071" y="705262"/>
+                  </a:lnTo>
+                  <a:lnTo>
+                    <a:pt x="6823415" y="707310"/>
+                  </a:lnTo>
+                  <a:lnTo>
+                    <a:pt x="6893760" y="709312"/>
+                  </a:lnTo>
+                  <a:lnTo>
+                    <a:pt x="6964104" y="711269"/>
                   </a:lnTo>
                 </a:path>
               </a:pathLst>
@@ -4642,27 +4677,27 @@
         </p:sp>
         <p:sp>
           <p:nvSpPr>
-            <p:cNvPr id="26" name="pl26"/>
+            <p:cNvPr id="27" name="pl27"/>
             <p:cNvSpPr/>
             <p:nvPr/>
           </p:nvSpPr>
           <p:spPr>
             <a:xfrm>
-              <a:off x="817517" y="4727786"/>
-              <a:ext cx="7799693" cy="0"/>
+              <a:off x="887106" y="3100960"/>
+              <a:ext cx="7660515" cy="0"/>
             </a:xfrm>
             <a:custGeom>
               <a:avLst/>
               <a:pathLst>
-                <a:path w="7799693" h="0">
+                <a:path w="7660515" h="0">
                   <a:moveTo>
                     <a:pt x="0" y="0"/>
                   </a:moveTo>
                   <a:lnTo>
-                    <a:pt x="7799693" y="0"/>
-                  </a:lnTo>
-                  <a:lnTo>
-                    <a:pt x="7799693" y="0"/>
+                    <a:pt x="7660515" y="0"/>
+                  </a:lnTo>
+                  <a:lnTo>
+                    <a:pt x="7660515" y="0"/>
                   </a:lnTo>
                 </a:path>
               </a:pathLst>
@@ -4685,21 +4720,21 @@
         </p:sp>
         <p:sp>
           <p:nvSpPr>
-            <p:cNvPr id="27" name="pl27"/>
+            <p:cNvPr id="28" name="pl28"/>
             <p:cNvSpPr/>
             <p:nvPr/>
           </p:nvSpPr>
           <p:spPr>
             <a:xfrm>
-              <a:off x="4293144" y="2073503"/>
-              <a:ext cx="0" cy="3649639"/>
+              <a:off x="4300713" y="2143092"/>
+              <a:ext cx="0" cy="1317069"/>
             </a:xfrm>
             <a:custGeom>
               <a:avLst/>
               <a:pathLst>
-                <a:path w="0" h="3649639">
+                <a:path w="0" h="1317069">
                   <a:moveTo>
-                    <a:pt x="0" y="3649639"/>
+                    <a:pt x="0" y="1317069"/>
                   </a:moveTo>
                   <a:lnTo>
                     <a:pt x="0" y="0"/>
@@ -4728,21 +4763,21 @@
         </p:sp>
         <p:sp>
           <p:nvSpPr>
-            <p:cNvPr id="28" name="pl28"/>
+            <p:cNvPr id="29" name="pl29"/>
             <p:cNvSpPr/>
             <p:nvPr/>
           </p:nvSpPr>
           <p:spPr>
             <a:xfrm>
-              <a:off x="3074393" y="2073503"/>
-              <a:ext cx="0" cy="3649639"/>
+              <a:off x="3103710" y="2143092"/>
+              <a:ext cx="0" cy="1317069"/>
             </a:xfrm>
             <a:custGeom>
               <a:avLst/>
               <a:pathLst>
-                <a:path w="0" h="3649639">
+                <a:path w="0" h="1317069">
                   <a:moveTo>
-                    <a:pt x="0" y="3649639"/>
+                    <a:pt x="0" y="1317069"/>
                   </a:moveTo>
                   <a:lnTo>
                     <a:pt x="0" y="0"/>
@@ -4771,21 +4806,21 @@
         </p:sp>
         <p:sp>
           <p:nvSpPr>
-            <p:cNvPr id="29" name="pl29"/>
+            <p:cNvPr id="30" name="pl30"/>
             <p:cNvSpPr/>
             <p:nvPr/>
           </p:nvSpPr>
           <p:spPr>
             <a:xfrm>
-              <a:off x="5518580" y="2073503"/>
-              <a:ext cx="0" cy="3649639"/>
+              <a:off x="5504283" y="2143092"/>
+              <a:ext cx="0" cy="1317069"/>
             </a:xfrm>
             <a:custGeom>
               <a:avLst/>
               <a:pathLst>
-                <a:path w="0" h="3649639">
+                <a:path w="0" h="1317069">
                   <a:moveTo>
-                    <a:pt x="0" y="3649639"/>
+                    <a:pt x="0" y="1317069"/>
                   </a:moveTo>
                   <a:lnTo>
                     <a:pt x="0" y="0"/>
@@ -4814,13 +4849,13 @@
         </p:sp>
         <p:sp>
           <p:nvSpPr>
-            <p:cNvPr id="30" name="tx30"/>
+            <p:cNvPr id="31" name="tx31"/>
             <p:cNvSpPr/>
             <p:nvPr/>
           </p:nvSpPr>
           <p:spPr>
             <a:xfrm>
-              <a:off x="692708" y="5517199"/>
+              <a:off x="762297" y="3360243"/>
               <a:ext cx="62179" cy="80101"/>
             </a:xfrm>
             <a:prstGeom prst="rect">
@@ -4860,13 +4895,13 @@
         </p:sp>
         <p:sp>
           <p:nvSpPr>
-            <p:cNvPr id="31" name="tx31"/>
+            <p:cNvPr id="32" name="tx32"/>
             <p:cNvSpPr/>
             <p:nvPr/>
           </p:nvSpPr>
           <p:spPr>
             <a:xfrm>
-              <a:off x="692708" y="4687735"/>
+              <a:off x="762297" y="3060909"/>
               <a:ext cx="62179" cy="80101"/>
             </a:xfrm>
             <a:prstGeom prst="rect">
@@ -4906,13 +4941,13 @@
         </p:sp>
         <p:sp>
           <p:nvSpPr>
-            <p:cNvPr id="32" name="tx32"/>
+            <p:cNvPr id="33" name="tx33"/>
             <p:cNvSpPr/>
             <p:nvPr/>
           </p:nvSpPr>
           <p:spPr>
             <a:xfrm>
-              <a:off x="692708" y="3858272"/>
+              <a:off x="762297" y="2761575"/>
               <a:ext cx="62179" cy="80101"/>
             </a:xfrm>
             <a:prstGeom prst="rect">
@@ -4952,13 +4987,13 @@
         </p:sp>
         <p:sp>
           <p:nvSpPr>
-            <p:cNvPr id="33" name="tx33"/>
+            <p:cNvPr id="34" name="tx34"/>
             <p:cNvSpPr/>
             <p:nvPr/>
           </p:nvSpPr>
           <p:spPr>
             <a:xfrm>
-              <a:off x="692708" y="3028808"/>
+              <a:off x="762297" y="2462242"/>
               <a:ext cx="62179" cy="80101"/>
             </a:xfrm>
             <a:prstGeom prst="rect">
@@ -4998,13 +5033,13 @@
         </p:sp>
         <p:sp>
           <p:nvSpPr>
-            <p:cNvPr id="34" name="tx34"/>
+            <p:cNvPr id="35" name="tx35"/>
             <p:cNvSpPr/>
             <p:nvPr/>
           </p:nvSpPr>
           <p:spPr>
             <a:xfrm>
-              <a:off x="692708" y="2199345"/>
+              <a:off x="762297" y="2162908"/>
               <a:ext cx="62179" cy="80101"/>
             </a:xfrm>
             <a:prstGeom prst="rect">
@@ -5044,13 +5079,13 @@
         </p:sp>
         <p:sp>
           <p:nvSpPr>
-            <p:cNvPr id="35" name="tx35"/>
+            <p:cNvPr id="36" name="tx36"/>
             <p:cNvSpPr/>
             <p:nvPr/>
           </p:nvSpPr>
           <p:spPr>
             <a:xfrm>
-              <a:off x="2134610" y="5785772"/>
+              <a:off x="2179256" y="3522791"/>
               <a:ext cx="161574" cy="80101"/>
             </a:xfrm>
             <a:prstGeom prst="rect">
@@ -5090,13 +5125,13 @@
         </p:sp>
         <p:sp>
           <p:nvSpPr>
-            <p:cNvPr id="36" name="tx36"/>
+            <p:cNvPr id="37" name="tx37"/>
             <p:cNvSpPr/>
             <p:nvPr/>
           </p:nvSpPr>
           <p:spPr>
             <a:xfrm>
-              <a:off x="3875731" y="5785772"/>
+              <a:off x="3889308" y="3522791"/>
               <a:ext cx="161574" cy="80101"/>
             </a:xfrm>
             <a:prstGeom prst="rect">
@@ -5136,13 +5171,13 @@
         </p:sp>
         <p:sp>
           <p:nvSpPr>
-            <p:cNvPr id="37" name="tx37"/>
+            <p:cNvPr id="38" name="tx38"/>
             <p:cNvSpPr/>
             <p:nvPr/>
           </p:nvSpPr>
           <p:spPr>
             <a:xfrm>
-              <a:off x="5666549" y="5785772"/>
+              <a:off x="5649057" y="3522791"/>
               <a:ext cx="62179" cy="80101"/>
             </a:xfrm>
             <a:prstGeom prst="rect">
@@ -5182,13 +5217,13 @@
         </p:sp>
         <p:sp>
           <p:nvSpPr>
-            <p:cNvPr id="38" name="tx38"/>
+            <p:cNvPr id="39" name="tx39"/>
             <p:cNvSpPr/>
             <p:nvPr/>
           </p:nvSpPr>
           <p:spPr>
             <a:xfrm>
-              <a:off x="7376580" y="5785772"/>
+              <a:off x="7328020" y="3522791"/>
               <a:ext cx="124358" cy="80101"/>
             </a:xfrm>
             <a:prstGeom prst="rect">
@@ -5228,13 +5263,13 @@
         </p:sp>
         <p:sp>
           <p:nvSpPr>
-            <p:cNvPr id="39" name="tx39"/>
+            <p:cNvPr id="40" name="tx40"/>
             <p:cNvSpPr/>
             <p:nvPr/>
           </p:nvSpPr>
           <p:spPr>
             <a:xfrm>
-              <a:off x="1561815" y="5925448"/>
+              <a:off x="1561815" y="3662467"/>
               <a:ext cx="6311097" cy="100218"/>
             </a:xfrm>
             <a:prstGeom prst="rect">
@@ -5274,13 +5309,13 @@
         </p:sp>
         <p:sp>
           <p:nvSpPr>
-            <p:cNvPr id="40" name="tx40"/>
+            <p:cNvPr id="41" name="tx41"/>
             <p:cNvSpPr/>
             <p:nvPr/>
           </p:nvSpPr>
           <p:spPr>
             <a:xfrm rot="-5400000">
-              <a:off x="68446" y="3848213"/>
+              <a:off x="138035" y="2751517"/>
               <a:ext cx="1016904" cy="100218"/>
             </a:xfrm>
             <a:prstGeom prst="rect">
@@ -5320,13 +5355,13 @@
         </p:sp>
         <p:sp>
           <p:nvSpPr>
-            <p:cNvPr id="41" name="tx41"/>
+            <p:cNvPr id="42" name="tx42"/>
             <p:cNvSpPr/>
             <p:nvPr/>
           </p:nvSpPr>
           <p:spPr>
             <a:xfrm>
-              <a:off x="817517" y="1896563"/>
+              <a:off x="887106" y="1966152"/>
               <a:ext cx="6959864" cy="82021"/>
             </a:xfrm>
             <a:prstGeom prst="rect">
@@ -5366,13 +5401,3777 @@
         </p:sp>
         <p:sp>
           <p:nvSpPr>
-            <p:cNvPr id="42" name="tx42"/>
+            <p:cNvPr id="43" name="tx43"/>
             <p:cNvSpPr/>
             <p:nvPr/>
           </p:nvSpPr>
           <p:spPr>
             <a:xfrm>
-              <a:off x="817517" y="1669789"/>
+              <a:off x="887106" y="1739378"/>
+              <a:ext cx="4961534" cy="120152"/>
+            </a:xfrm>
+            <a:prstGeom prst="rect">
+              <a:avLst/>
+            </a:prstGeom>
+            <a:noFill/>
+          </p:spPr>
+          <p:txBody>
+            <a:bodyPr lIns="0" rIns="0" tIns="0" bIns="0" anchorCtr="1" anchor="ctr" wrap="none"/>
+            <a:lstStyle/>
+            <a:p>
+              <a:pPr algn="l" marL="0" marR="0" indent="0">
+                <a:lnSpc>
+                  <a:spcPts val="1320"/>
+                </a:lnSpc>
+                <a:spcBef>
+                  <a:spcPts val="0"/>
+                </a:spcBef>
+                <a:spcAft>
+                  <a:spcPts val="0"/>
+                </a:spcAft>
+              </a:pPr>
+              <a:r>
+                <a:rPr sz="1320">
+                  <a:solidFill>
+                    <a:srgbClr val="000000">
+                      <a:alpha val="100000"/>
+                    </a:srgbClr>
+                  </a:solidFill>
+                  <a:latin typeface="Helvetica"/>
+                  <a:cs typeface="Helvetica"/>
+                </a:rPr>
+                <a:t>Platinum-Related Hospitalization (Sensitivity, Carboplatin AUC ≥ 3)</a:t>
+              </a:r>
+            </a:p>
+          </p:txBody>
+        </p:sp>
+        <p:sp>
+          <p:nvSpPr>
+            <p:cNvPr id="44" name="pl44"/>
+            <p:cNvSpPr/>
+            <p:nvPr/>
+          </p:nvSpPr>
+          <p:spPr>
+            <a:xfrm>
+              <a:off x="887106" y="5444019"/>
+              <a:ext cx="7660515" cy="0"/>
+            </a:xfrm>
+            <a:custGeom>
+              <a:avLst/>
+              <a:pathLst>
+                <a:path w="7660515" h="0">
+                  <a:moveTo>
+                    <a:pt x="0" y="0"/>
+                  </a:moveTo>
+                  <a:lnTo>
+                    <a:pt x="7660515" y="0"/>
+                  </a:lnTo>
+                  <a:lnTo>
+                    <a:pt x="7660515" y="0"/>
+                  </a:lnTo>
+                </a:path>
+              </a:pathLst>
+            </a:custGeom>
+            <a:ln w="6775" cap="flat">
+              <a:solidFill>
+                <a:srgbClr val="EBEBEB">
+                  <a:alpha val="100000"/>
+                </a:srgbClr>
+              </a:solidFill>
+              <a:prstDash val="solid"/>
+              <a:round/>
+            </a:ln>
+          </p:spPr>
+          <p:txBody>
+            <a:bodyPr/>
+            <a:lstStyle/>
+            <a:p/>
+          </p:txBody>
+        </p:sp>
+        <p:sp>
+          <p:nvSpPr>
+            <p:cNvPr id="45" name="pl45"/>
+            <p:cNvSpPr/>
+            <p:nvPr/>
+          </p:nvSpPr>
+          <p:spPr>
+            <a:xfrm>
+              <a:off x="887106" y="5144686"/>
+              <a:ext cx="7660515" cy="0"/>
+            </a:xfrm>
+            <a:custGeom>
+              <a:avLst/>
+              <a:pathLst>
+                <a:path w="7660515" h="0">
+                  <a:moveTo>
+                    <a:pt x="0" y="0"/>
+                  </a:moveTo>
+                  <a:lnTo>
+                    <a:pt x="7660515" y="0"/>
+                  </a:lnTo>
+                  <a:lnTo>
+                    <a:pt x="7660515" y="0"/>
+                  </a:lnTo>
+                </a:path>
+              </a:pathLst>
+            </a:custGeom>
+            <a:ln w="6775" cap="flat">
+              <a:solidFill>
+                <a:srgbClr val="EBEBEB">
+                  <a:alpha val="100000"/>
+                </a:srgbClr>
+              </a:solidFill>
+              <a:prstDash val="solid"/>
+              <a:round/>
+            </a:ln>
+          </p:spPr>
+          <p:txBody>
+            <a:bodyPr/>
+            <a:lstStyle/>
+            <a:p/>
+          </p:txBody>
+        </p:sp>
+        <p:sp>
+          <p:nvSpPr>
+            <p:cNvPr id="46" name="pl46"/>
+            <p:cNvSpPr/>
+            <p:nvPr/>
+          </p:nvSpPr>
+          <p:spPr>
+            <a:xfrm>
+              <a:off x="887106" y="4845352"/>
+              <a:ext cx="7660515" cy="0"/>
+            </a:xfrm>
+            <a:custGeom>
+              <a:avLst/>
+              <a:pathLst>
+                <a:path w="7660515" h="0">
+                  <a:moveTo>
+                    <a:pt x="0" y="0"/>
+                  </a:moveTo>
+                  <a:lnTo>
+                    <a:pt x="7660515" y="0"/>
+                  </a:lnTo>
+                  <a:lnTo>
+                    <a:pt x="7660515" y="0"/>
+                  </a:lnTo>
+                </a:path>
+              </a:pathLst>
+            </a:custGeom>
+            <a:ln w="6775" cap="flat">
+              <a:solidFill>
+                <a:srgbClr val="EBEBEB">
+                  <a:alpha val="100000"/>
+                </a:srgbClr>
+              </a:solidFill>
+              <a:prstDash val="solid"/>
+              <a:round/>
+            </a:ln>
+          </p:spPr>
+          <p:txBody>
+            <a:bodyPr/>
+            <a:lstStyle/>
+            <a:p/>
+          </p:txBody>
+        </p:sp>
+        <p:sp>
+          <p:nvSpPr>
+            <p:cNvPr id="47" name="pl47"/>
+            <p:cNvSpPr/>
+            <p:nvPr/>
+          </p:nvSpPr>
+          <p:spPr>
+            <a:xfrm>
+              <a:off x="887106" y="4546018"/>
+              <a:ext cx="7660515" cy="0"/>
+            </a:xfrm>
+            <a:custGeom>
+              <a:avLst/>
+              <a:pathLst>
+                <a:path w="7660515" h="0">
+                  <a:moveTo>
+                    <a:pt x="0" y="0"/>
+                  </a:moveTo>
+                  <a:lnTo>
+                    <a:pt x="7660515" y="0"/>
+                  </a:lnTo>
+                  <a:lnTo>
+                    <a:pt x="7660515" y="0"/>
+                  </a:lnTo>
+                </a:path>
+              </a:pathLst>
+            </a:custGeom>
+            <a:ln w="6775" cap="flat">
+              <a:solidFill>
+                <a:srgbClr val="EBEBEB">
+                  <a:alpha val="100000"/>
+                </a:srgbClr>
+              </a:solidFill>
+              <a:prstDash val="solid"/>
+              <a:round/>
+            </a:ln>
+          </p:spPr>
+          <p:txBody>
+            <a:bodyPr/>
+            <a:lstStyle/>
+            <a:p/>
+          </p:txBody>
+        </p:sp>
+        <p:sp>
+          <p:nvSpPr>
+            <p:cNvPr id="48" name="pl48"/>
+            <p:cNvSpPr/>
+            <p:nvPr/>
+          </p:nvSpPr>
+          <p:spPr>
+            <a:xfrm>
+              <a:off x="977504" y="4336484"/>
+              <a:ext cx="0" cy="1317069"/>
+            </a:xfrm>
+            <a:custGeom>
+              <a:avLst/>
+              <a:pathLst>
+                <a:path w="0" h="1317069">
+                  <a:moveTo>
+                    <a:pt x="0" y="1317069"/>
+                  </a:moveTo>
+                  <a:lnTo>
+                    <a:pt x="0" y="0"/>
+                  </a:lnTo>
+                  <a:lnTo>
+                    <a:pt x="0" y="0"/>
+                  </a:lnTo>
+                </a:path>
+              </a:pathLst>
+            </a:custGeom>
+            <a:ln w="6775" cap="flat">
+              <a:solidFill>
+                <a:srgbClr val="EBEBEB">
+                  <a:alpha val="100000"/>
+                </a:srgbClr>
+              </a:solidFill>
+              <a:prstDash val="solid"/>
+              <a:round/>
+            </a:ln>
+          </p:spPr>
+          <p:txBody>
+            <a:bodyPr/>
+            <a:lstStyle/>
+            <a:p/>
+          </p:txBody>
+        </p:sp>
+        <p:sp>
+          <p:nvSpPr>
+            <p:cNvPr id="49" name="pl49"/>
+            <p:cNvSpPr/>
+            <p:nvPr/>
+          </p:nvSpPr>
+          <p:spPr>
+            <a:xfrm>
+              <a:off x="1832530" y="4336484"/>
+              <a:ext cx="0" cy="1317069"/>
+            </a:xfrm>
+            <a:custGeom>
+              <a:avLst/>
+              <a:pathLst>
+                <a:path w="0" h="1317069">
+                  <a:moveTo>
+                    <a:pt x="0" y="1317069"/>
+                  </a:moveTo>
+                  <a:lnTo>
+                    <a:pt x="0" y="0"/>
+                  </a:lnTo>
+                  <a:lnTo>
+                    <a:pt x="0" y="0"/>
+                  </a:lnTo>
+                </a:path>
+              </a:pathLst>
+            </a:custGeom>
+            <a:ln w="6775" cap="flat">
+              <a:solidFill>
+                <a:srgbClr val="EBEBEB">
+                  <a:alpha val="100000"/>
+                </a:srgbClr>
+              </a:solidFill>
+              <a:prstDash val="solid"/>
+              <a:round/>
+            </a:ln>
+          </p:spPr>
+          <p:txBody>
+            <a:bodyPr/>
+            <a:lstStyle/>
+            <a:p/>
+          </p:txBody>
+        </p:sp>
+        <p:sp>
+          <p:nvSpPr>
+            <p:cNvPr id="50" name="pl50"/>
+            <p:cNvSpPr/>
+            <p:nvPr/>
+          </p:nvSpPr>
+          <p:spPr>
+            <a:xfrm>
+              <a:off x="2687556" y="4336484"/>
+              <a:ext cx="0" cy="1317069"/>
+            </a:xfrm>
+            <a:custGeom>
+              <a:avLst/>
+              <a:pathLst>
+                <a:path w="0" h="1317069">
+                  <a:moveTo>
+                    <a:pt x="0" y="1317069"/>
+                  </a:moveTo>
+                  <a:lnTo>
+                    <a:pt x="0" y="0"/>
+                  </a:lnTo>
+                  <a:lnTo>
+                    <a:pt x="0" y="0"/>
+                  </a:lnTo>
+                </a:path>
+              </a:pathLst>
+            </a:custGeom>
+            <a:ln w="6775" cap="flat">
+              <a:solidFill>
+                <a:srgbClr val="EBEBEB">
+                  <a:alpha val="100000"/>
+                </a:srgbClr>
+              </a:solidFill>
+              <a:prstDash val="solid"/>
+              <a:round/>
+            </a:ln>
+          </p:spPr>
+          <p:txBody>
+            <a:bodyPr/>
+            <a:lstStyle/>
+            <a:p/>
+          </p:txBody>
+        </p:sp>
+        <p:sp>
+          <p:nvSpPr>
+            <p:cNvPr id="51" name="pl51"/>
+            <p:cNvSpPr/>
+            <p:nvPr/>
+          </p:nvSpPr>
+          <p:spPr>
+            <a:xfrm>
+              <a:off x="3542582" y="4336484"/>
+              <a:ext cx="0" cy="1317069"/>
+            </a:xfrm>
+            <a:custGeom>
+              <a:avLst/>
+              <a:pathLst>
+                <a:path w="0" h="1317069">
+                  <a:moveTo>
+                    <a:pt x="0" y="1317069"/>
+                  </a:moveTo>
+                  <a:lnTo>
+                    <a:pt x="0" y="0"/>
+                  </a:lnTo>
+                  <a:lnTo>
+                    <a:pt x="0" y="0"/>
+                  </a:lnTo>
+                </a:path>
+              </a:pathLst>
+            </a:custGeom>
+            <a:ln w="6775" cap="flat">
+              <a:solidFill>
+                <a:srgbClr val="EBEBEB">
+                  <a:alpha val="100000"/>
+                </a:srgbClr>
+              </a:solidFill>
+              <a:prstDash val="solid"/>
+              <a:round/>
+            </a:ln>
+          </p:spPr>
+          <p:txBody>
+            <a:bodyPr/>
+            <a:lstStyle/>
+            <a:p/>
+          </p:txBody>
+        </p:sp>
+        <p:sp>
+          <p:nvSpPr>
+            <p:cNvPr id="52" name="pl52"/>
+            <p:cNvSpPr/>
+            <p:nvPr/>
+          </p:nvSpPr>
+          <p:spPr>
+            <a:xfrm>
+              <a:off x="4397608" y="4336484"/>
+              <a:ext cx="0" cy="1317069"/>
+            </a:xfrm>
+            <a:custGeom>
+              <a:avLst/>
+              <a:pathLst>
+                <a:path w="0" h="1317069">
+                  <a:moveTo>
+                    <a:pt x="0" y="1317069"/>
+                  </a:moveTo>
+                  <a:lnTo>
+                    <a:pt x="0" y="0"/>
+                  </a:lnTo>
+                  <a:lnTo>
+                    <a:pt x="0" y="0"/>
+                  </a:lnTo>
+                </a:path>
+              </a:pathLst>
+            </a:custGeom>
+            <a:ln w="6775" cap="flat">
+              <a:solidFill>
+                <a:srgbClr val="EBEBEB">
+                  <a:alpha val="100000"/>
+                </a:srgbClr>
+              </a:solidFill>
+              <a:prstDash val="solid"/>
+              <a:round/>
+            </a:ln>
+          </p:spPr>
+          <p:txBody>
+            <a:bodyPr/>
+            <a:lstStyle/>
+            <a:p/>
+          </p:txBody>
+        </p:sp>
+        <p:sp>
+          <p:nvSpPr>
+            <p:cNvPr id="53" name="pl53"/>
+            <p:cNvSpPr/>
+            <p:nvPr/>
+          </p:nvSpPr>
+          <p:spPr>
+            <a:xfrm>
+              <a:off x="5252634" y="4336484"/>
+              <a:ext cx="0" cy="1317069"/>
+            </a:xfrm>
+            <a:custGeom>
+              <a:avLst/>
+              <a:pathLst>
+                <a:path w="0" h="1317069">
+                  <a:moveTo>
+                    <a:pt x="0" y="1317069"/>
+                  </a:moveTo>
+                  <a:lnTo>
+                    <a:pt x="0" y="0"/>
+                  </a:lnTo>
+                  <a:lnTo>
+                    <a:pt x="0" y="0"/>
+                  </a:lnTo>
+                </a:path>
+              </a:pathLst>
+            </a:custGeom>
+            <a:ln w="6775" cap="flat">
+              <a:solidFill>
+                <a:srgbClr val="EBEBEB">
+                  <a:alpha val="100000"/>
+                </a:srgbClr>
+              </a:solidFill>
+              <a:prstDash val="solid"/>
+              <a:round/>
+            </a:ln>
+          </p:spPr>
+          <p:txBody>
+            <a:bodyPr/>
+            <a:lstStyle/>
+            <a:p/>
+          </p:txBody>
+        </p:sp>
+        <p:sp>
+          <p:nvSpPr>
+            <p:cNvPr id="54" name="pl54"/>
+            <p:cNvSpPr/>
+            <p:nvPr/>
+          </p:nvSpPr>
+          <p:spPr>
+            <a:xfrm>
+              <a:off x="6107660" y="4336484"/>
+              <a:ext cx="0" cy="1317069"/>
+            </a:xfrm>
+            <a:custGeom>
+              <a:avLst/>
+              <a:pathLst>
+                <a:path w="0" h="1317069">
+                  <a:moveTo>
+                    <a:pt x="0" y="1317069"/>
+                  </a:moveTo>
+                  <a:lnTo>
+                    <a:pt x="0" y="0"/>
+                  </a:lnTo>
+                  <a:lnTo>
+                    <a:pt x="0" y="0"/>
+                  </a:lnTo>
+                </a:path>
+              </a:pathLst>
+            </a:custGeom>
+            <a:ln w="6775" cap="flat">
+              <a:solidFill>
+                <a:srgbClr val="EBEBEB">
+                  <a:alpha val="100000"/>
+                </a:srgbClr>
+              </a:solidFill>
+              <a:prstDash val="solid"/>
+              <a:round/>
+            </a:ln>
+          </p:spPr>
+          <p:txBody>
+            <a:bodyPr/>
+            <a:lstStyle/>
+            <a:p/>
+          </p:txBody>
+        </p:sp>
+        <p:sp>
+          <p:nvSpPr>
+            <p:cNvPr id="55" name="pl55"/>
+            <p:cNvSpPr/>
+            <p:nvPr/>
+          </p:nvSpPr>
+          <p:spPr>
+            <a:xfrm>
+              <a:off x="6962686" y="4336484"/>
+              <a:ext cx="0" cy="1317069"/>
+            </a:xfrm>
+            <a:custGeom>
+              <a:avLst/>
+              <a:pathLst>
+                <a:path w="0" h="1317069">
+                  <a:moveTo>
+                    <a:pt x="0" y="1317069"/>
+                  </a:moveTo>
+                  <a:lnTo>
+                    <a:pt x="0" y="0"/>
+                  </a:lnTo>
+                  <a:lnTo>
+                    <a:pt x="0" y="0"/>
+                  </a:lnTo>
+                </a:path>
+              </a:pathLst>
+            </a:custGeom>
+            <a:ln w="6775" cap="flat">
+              <a:solidFill>
+                <a:srgbClr val="EBEBEB">
+                  <a:alpha val="100000"/>
+                </a:srgbClr>
+              </a:solidFill>
+              <a:prstDash val="solid"/>
+              <a:round/>
+            </a:ln>
+          </p:spPr>
+          <p:txBody>
+            <a:bodyPr/>
+            <a:lstStyle/>
+            <a:p/>
+          </p:txBody>
+        </p:sp>
+        <p:sp>
+          <p:nvSpPr>
+            <p:cNvPr id="56" name="pl56"/>
+            <p:cNvSpPr/>
+            <p:nvPr/>
+          </p:nvSpPr>
+          <p:spPr>
+            <a:xfrm>
+              <a:off x="7817712" y="4336484"/>
+              <a:ext cx="0" cy="1317069"/>
+            </a:xfrm>
+            <a:custGeom>
+              <a:avLst/>
+              <a:pathLst>
+                <a:path w="0" h="1317069">
+                  <a:moveTo>
+                    <a:pt x="0" y="1317069"/>
+                  </a:moveTo>
+                  <a:lnTo>
+                    <a:pt x="0" y="0"/>
+                  </a:lnTo>
+                  <a:lnTo>
+                    <a:pt x="0" y="0"/>
+                  </a:lnTo>
+                </a:path>
+              </a:pathLst>
+            </a:custGeom>
+            <a:ln w="6775" cap="flat">
+              <a:solidFill>
+                <a:srgbClr val="EBEBEB">
+                  <a:alpha val="100000"/>
+                </a:srgbClr>
+              </a:solidFill>
+              <a:prstDash val="solid"/>
+              <a:round/>
+            </a:ln>
+          </p:spPr>
+          <p:txBody>
+            <a:bodyPr/>
+            <a:lstStyle/>
+            <a:p/>
+          </p:txBody>
+        </p:sp>
+        <p:sp>
+          <p:nvSpPr>
+            <p:cNvPr id="57" name="pl57"/>
+            <p:cNvSpPr/>
+            <p:nvPr/>
+          </p:nvSpPr>
+          <p:spPr>
+            <a:xfrm>
+              <a:off x="887106" y="5593686"/>
+              <a:ext cx="7660515" cy="0"/>
+            </a:xfrm>
+            <a:custGeom>
+              <a:avLst/>
+              <a:pathLst>
+                <a:path w="7660515" h="0">
+                  <a:moveTo>
+                    <a:pt x="0" y="0"/>
+                  </a:moveTo>
+                  <a:lnTo>
+                    <a:pt x="7660515" y="0"/>
+                  </a:lnTo>
+                  <a:lnTo>
+                    <a:pt x="7660515" y="0"/>
+                  </a:lnTo>
+                </a:path>
+              </a:pathLst>
+            </a:custGeom>
+            <a:ln w="13550" cap="flat">
+              <a:solidFill>
+                <a:srgbClr val="EBEBEB">
+                  <a:alpha val="100000"/>
+                </a:srgbClr>
+              </a:solidFill>
+              <a:prstDash val="solid"/>
+              <a:round/>
+            </a:ln>
+          </p:spPr>
+          <p:txBody>
+            <a:bodyPr/>
+            <a:lstStyle/>
+            <a:p/>
+          </p:txBody>
+        </p:sp>
+        <p:sp>
+          <p:nvSpPr>
+            <p:cNvPr id="58" name="pl58"/>
+            <p:cNvSpPr/>
+            <p:nvPr/>
+          </p:nvSpPr>
+          <p:spPr>
+            <a:xfrm>
+              <a:off x="887106" y="5294352"/>
+              <a:ext cx="7660515" cy="0"/>
+            </a:xfrm>
+            <a:custGeom>
+              <a:avLst/>
+              <a:pathLst>
+                <a:path w="7660515" h="0">
+                  <a:moveTo>
+                    <a:pt x="0" y="0"/>
+                  </a:moveTo>
+                  <a:lnTo>
+                    <a:pt x="7660515" y="0"/>
+                  </a:lnTo>
+                  <a:lnTo>
+                    <a:pt x="7660515" y="0"/>
+                  </a:lnTo>
+                </a:path>
+              </a:pathLst>
+            </a:custGeom>
+            <a:ln w="13550" cap="flat">
+              <a:solidFill>
+                <a:srgbClr val="EBEBEB">
+                  <a:alpha val="100000"/>
+                </a:srgbClr>
+              </a:solidFill>
+              <a:prstDash val="solid"/>
+              <a:round/>
+            </a:ln>
+          </p:spPr>
+          <p:txBody>
+            <a:bodyPr/>
+            <a:lstStyle/>
+            <a:p/>
+          </p:txBody>
+        </p:sp>
+        <p:sp>
+          <p:nvSpPr>
+            <p:cNvPr id="59" name="pl59"/>
+            <p:cNvSpPr/>
+            <p:nvPr/>
+          </p:nvSpPr>
+          <p:spPr>
+            <a:xfrm>
+              <a:off x="887106" y="4995019"/>
+              <a:ext cx="7660515" cy="0"/>
+            </a:xfrm>
+            <a:custGeom>
+              <a:avLst/>
+              <a:pathLst>
+                <a:path w="7660515" h="0">
+                  <a:moveTo>
+                    <a:pt x="0" y="0"/>
+                  </a:moveTo>
+                  <a:lnTo>
+                    <a:pt x="7660515" y="0"/>
+                  </a:lnTo>
+                  <a:lnTo>
+                    <a:pt x="7660515" y="0"/>
+                  </a:lnTo>
+                </a:path>
+              </a:pathLst>
+            </a:custGeom>
+            <a:ln w="13550" cap="flat">
+              <a:solidFill>
+                <a:srgbClr val="EBEBEB">
+                  <a:alpha val="100000"/>
+                </a:srgbClr>
+              </a:solidFill>
+              <a:prstDash val="solid"/>
+              <a:round/>
+            </a:ln>
+          </p:spPr>
+          <p:txBody>
+            <a:bodyPr/>
+            <a:lstStyle/>
+            <a:p/>
+          </p:txBody>
+        </p:sp>
+        <p:sp>
+          <p:nvSpPr>
+            <p:cNvPr id="60" name="pl60"/>
+            <p:cNvSpPr/>
+            <p:nvPr/>
+          </p:nvSpPr>
+          <p:spPr>
+            <a:xfrm>
+              <a:off x="887106" y="4695685"/>
+              <a:ext cx="7660515" cy="0"/>
+            </a:xfrm>
+            <a:custGeom>
+              <a:avLst/>
+              <a:pathLst>
+                <a:path w="7660515" h="0">
+                  <a:moveTo>
+                    <a:pt x="0" y="0"/>
+                  </a:moveTo>
+                  <a:lnTo>
+                    <a:pt x="7660515" y="0"/>
+                  </a:lnTo>
+                  <a:lnTo>
+                    <a:pt x="7660515" y="0"/>
+                  </a:lnTo>
+                </a:path>
+              </a:pathLst>
+            </a:custGeom>
+            <a:ln w="13550" cap="flat">
+              <a:solidFill>
+                <a:srgbClr val="EBEBEB">
+                  <a:alpha val="100000"/>
+                </a:srgbClr>
+              </a:solidFill>
+              <a:prstDash val="solid"/>
+              <a:round/>
+            </a:ln>
+          </p:spPr>
+          <p:txBody>
+            <a:bodyPr/>
+            <a:lstStyle/>
+            <a:p/>
+          </p:txBody>
+        </p:sp>
+        <p:sp>
+          <p:nvSpPr>
+            <p:cNvPr id="61" name="pl61"/>
+            <p:cNvSpPr/>
+            <p:nvPr/>
+          </p:nvSpPr>
+          <p:spPr>
+            <a:xfrm>
+              <a:off x="887106" y="4396351"/>
+              <a:ext cx="7660515" cy="0"/>
+            </a:xfrm>
+            <a:custGeom>
+              <a:avLst/>
+              <a:pathLst>
+                <a:path w="7660515" h="0">
+                  <a:moveTo>
+                    <a:pt x="0" y="0"/>
+                  </a:moveTo>
+                  <a:lnTo>
+                    <a:pt x="7660515" y="0"/>
+                  </a:lnTo>
+                  <a:lnTo>
+                    <a:pt x="7660515" y="0"/>
+                  </a:lnTo>
+                </a:path>
+              </a:pathLst>
+            </a:custGeom>
+            <a:ln w="13550" cap="flat">
+              <a:solidFill>
+                <a:srgbClr val="EBEBEB">
+                  <a:alpha val="100000"/>
+                </a:srgbClr>
+              </a:solidFill>
+              <a:prstDash val="solid"/>
+              <a:round/>
+            </a:ln>
+          </p:spPr>
+          <p:txBody>
+            <a:bodyPr/>
+            <a:lstStyle/>
+            <a:p/>
+          </p:txBody>
+        </p:sp>
+        <p:sp>
+          <p:nvSpPr>
+            <p:cNvPr id="62" name="pl62"/>
+            <p:cNvSpPr/>
+            <p:nvPr/>
+          </p:nvSpPr>
+          <p:spPr>
+            <a:xfrm>
+              <a:off x="1405017" y="4336484"/>
+              <a:ext cx="0" cy="1317069"/>
+            </a:xfrm>
+            <a:custGeom>
+              <a:avLst/>
+              <a:pathLst>
+                <a:path w="0" h="1317069">
+                  <a:moveTo>
+                    <a:pt x="0" y="1317069"/>
+                  </a:moveTo>
+                  <a:lnTo>
+                    <a:pt x="0" y="0"/>
+                  </a:lnTo>
+                  <a:lnTo>
+                    <a:pt x="0" y="0"/>
+                  </a:lnTo>
+                </a:path>
+              </a:pathLst>
+            </a:custGeom>
+            <a:ln w="13550" cap="flat">
+              <a:solidFill>
+                <a:srgbClr val="EBEBEB">
+                  <a:alpha val="100000"/>
+                </a:srgbClr>
+              </a:solidFill>
+              <a:prstDash val="solid"/>
+              <a:round/>
+            </a:ln>
+          </p:spPr>
+          <p:txBody>
+            <a:bodyPr/>
+            <a:lstStyle/>
+            <a:p/>
+          </p:txBody>
+        </p:sp>
+        <p:sp>
+          <p:nvSpPr>
+            <p:cNvPr id="63" name="pl63"/>
+            <p:cNvSpPr/>
+            <p:nvPr/>
+          </p:nvSpPr>
+          <p:spPr>
+            <a:xfrm>
+              <a:off x="2260043" y="4336484"/>
+              <a:ext cx="0" cy="1317069"/>
+            </a:xfrm>
+            <a:custGeom>
+              <a:avLst/>
+              <a:pathLst>
+                <a:path w="0" h="1317069">
+                  <a:moveTo>
+                    <a:pt x="0" y="1317069"/>
+                  </a:moveTo>
+                  <a:lnTo>
+                    <a:pt x="0" y="0"/>
+                  </a:lnTo>
+                  <a:lnTo>
+                    <a:pt x="0" y="0"/>
+                  </a:lnTo>
+                </a:path>
+              </a:pathLst>
+            </a:custGeom>
+            <a:ln w="13550" cap="flat">
+              <a:solidFill>
+                <a:srgbClr val="EBEBEB">
+                  <a:alpha val="100000"/>
+                </a:srgbClr>
+              </a:solidFill>
+              <a:prstDash val="solid"/>
+              <a:round/>
+            </a:ln>
+          </p:spPr>
+          <p:txBody>
+            <a:bodyPr/>
+            <a:lstStyle/>
+            <a:p/>
+          </p:txBody>
+        </p:sp>
+        <p:sp>
+          <p:nvSpPr>
+            <p:cNvPr id="64" name="pl64"/>
+            <p:cNvSpPr/>
+            <p:nvPr/>
+          </p:nvSpPr>
+          <p:spPr>
+            <a:xfrm>
+              <a:off x="3115069" y="4336484"/>
+              <a:ext cx="0" cy="1317069"/>
+            </a:xfrm>
+            <a:custGeom>
+              <a:avLst/>
+              <a:pathLst>
+                <a:path w="0" h="1317069">
+                  <a:moveTo>
+                    <a:pt x="0" y="1317069"/>
+                  </a:moveTo>
+                  <a:lnTo>
+                    <a:pt x="0" y="0"/>
+                  </a:lnTo>
+                  <a:lnTo>
+                    <a:pt x="0" y="0"/>
+                  </a:lnTo>
+                </a:path>
+              </a:pathLst>
+            </a:custGeom>
+            <a:ln w="13550" cap="flat">
+              <a:solidFill>
+                <a:srgbClr val="EBEBEB">
+                  <a:alpha val="100000"/>
+                </a:srgbClr>
+              </a:solidFill>
+              <a:prstDash val="solid"/>
+              <a:round/>
+            </a:ln>
+          </p:spPr>
+          <p:txBody>
+            <a:bodyPr/>
+            <a:lstStyle/>
+            <a:p/>
+          </p:txBody>
+        </p:sp>
+        <p:sp>
+          <p:nvSpPr>
+            <p:cNvPr id="65" name="pl65"/>
+            <p:cNvSpPr/>
+            <p:nvPr/>
+          </p:nvSpPr>
+          <p:spPr>
+            <a:xfrm>
+              <a:off x="3970095" y="4336484"/>
+              <a:ext cx="0" cy="1317069"/>
+            </a:xfrm>
+            <a:custGeom>
+              <a:avLst/>
+              <a:pathLst>
+                <a:path w="0" h="1317069">
+                  <a:moveTo>
+                    <a:pt x="0" y="1317069"/>
+                  </a:moveTo>
+                  <a:lnTo>
+                    <a:pt x="0" y="0"/>
+                  </a:lnTo>
+                  <a:lnTo>
+                    <a:pt x="0" y="0"/>
+                  </a:lnTo>
+                </a:path>
+              </a:pathLst>
+            </a:custGeom>
+            <a:ln w="13550" cap="flat">
+              <a:solidFill>
+                <a:srgbClr val="EBEBEB">
+                  <a:alpha val="100000"/>
+                </a:srgbClr>
+              </a:solidFill>
+              <a:prstDash val="solid"/>
+              <a:round/>
+            </a:ln>
+          </p:spPr>
+          <p:txBody>
+            <a:bodyPr/>
+            <a:lstStyle/>
+            <a:p/>
+          </p:txBody>
+        </p:sp>
+        <p:sp>
+          <p:nvSpPr>
+            <p:cNvPr id="66" name="pl66"/>
+            <p:cNvSpPr/>
+            <p:nvPr/>
+          </p:nvSpPr>
+          <p:spPr>
+            <a:xfrm>
+              <a:off x="4825121" y="4336484"/>
+              <a:ext cx="0" cy="1317069"/>
+            </a:xfrm>
+            <a:custGeom>
+              <a:avLst/>
+              <a:pathLst>
+                <a:path w="0" h="1317069">
+                  <a:moveTo>
+                    <a:pt x="0" y="1317069"/>
+                  </a:moveTo>
+                  <a:lnTo>
+                    <a:pt x="0" y="0"/>
+                  </a:lnTo>
+                  <a:lnTo>
+                    <a:pt x="0" y="0"/>
+                  </a:lnTo>
+                </a:path>
+              </a:pathLst>
+            </a:custGeom>
+            <a:ln w="13550" cap="flat">
+              <a:solidFill>
+                <a:srgbClr val="EBEBEB">
+                  <a:alpha val="100000"/>
+                </a:srgbClr>
+              </a:solidFill>
+              <a:prstDash val="solid"/>
+              <a:round/>
+            </a:ln>
+          </p:spPr>
+          <p:txBody>
+            <a:bodyPr/>
+            <a:lstStyle/>
+            <a:p/>
+          </p:txBody>
+        </p:sp>
+        <p:sp>
+          <p:nvSpPr>
+            <p:cNvPr id="67" name="pl67"/>
+            <p:cNvSpPr/>
+            <p:nvPr/>
+          </p:nvSpPr>
+          <p:spPr>
+            <a:xfrm>
+              <a:off x="5680147" y="4336484"/>
+              <a:ext cx="0" cy="1317069"/>
+            </a:xfrm>
+            <a:custGeom>
+              <a:avLst/>
+              <a:pathLst>
+                <a:path w="0" h="1317069">
+                  <a:moveTo>
+                    <a:pt x="0" y="1317069"/>
+                  </a:moveTo>
+                  <a:lnTo>
+                    <a:pt x="0" y="0"/>
+                  </a:lnTo>
+                  <a:lnTo>
+                    <a:pt x="0" y="0"/>
+                  </a:lnTo>
+                </a:path>
+              </a:pathLst>
+            </a:custGeom>
+            <a:ln w="13550" cap="flat">
+              <a:solidFill>
+                <a:srgbClr val="EBEBEB">
+                  <a:alpha val="100000"/>
+                </a:srgbClr>
+              </a:solidFill>
+              <a:prstDash val="solid"/>
+              <a:round/>
+            </a:ln>
+          </p:spPr>
+          <p:txBody>
+            <a:bodyPr/>
+            <a:lstStyle/>
+            <a:p/>
+          </p:txBody>
+        </p:sp>
+        <p:sp>
+          <p:nvSpPr>
+            <p:cNvPr id="68" name="pl68"/>
+            <p:cNvSpPr/>
+            <p:nvPr/>
+          </p:nvSpPr>
+          <p:spPr>
+            <a:xfrm>
+              <a:off x="6535173" y="4336484"/>
+              <a:ext cx="0" cy="1317069"/>
+            </a:xfrm>
+            <a:custGeom>
+              <a:avLst/>
+              <a:pathLst>
+                <a:path w="0" h="1317069">
+                  <a:moveTo>
+                    <a:pt x="0" y="1317069"/>
+                  </a:moveTo>
+                  <a:lnTo>
+                    <a:pt x="0" y="0"/>
+                  </a:lnTo>
+                  <a:lnTo>
+                    <a:pt x="0" y="0"/>
+                  </a:lnTo>
+                </a:path>
+              </a:pathLst>
+            </a:custGeom>
+            <a:ln w="13550" cap="flat">
+              <a:solidFill>
+                <a:srgbClr val="EBEBEB">
+                  <a:alpha val="100000"/>
+                </a:srgbClr>
+              </a:solidFill>
+              <a:prstDash val="solid"/>
+              <a:round/>
+            </a:ln>
+          </p:spPr>
+          <p:txBody>
+            <a:bodyPr/>
+            <a:lstStyle/>
+            <a:p/>
+          </p:txBody>
+        </p:sp>
+        <p:sp>
+          <p:nvSpPr>
+            <p:cNvPr id="69" name="pl69"/>
+            <p:cNvSpPr/>
+            <p:nvPr/>
+          </p:nvSpPr>
+          <p:spPr>
+            <a:xfrm>
+              <a:off x="7390199" y="4336484"/>
+              <a:ext cx="0" cy="1317069"/>
+            </a:xfrm>
+            <a:custGeom>
+              <a:avLst/>
+              <a:pathLst>
+                <a:path w="0" h="1317069">
+                  <a:moveTo>
+                    <a:pt x="0" y="1317069"/>
+                  </a:moveTo>
+                  <a:lnTo>
+                    <a:pt x="0" y="0"/>
+                  </a:lnTo>
+                  <a:lnTo>
+                    <a:pt x="0" y="0"/>
+                  </a:lnTo>
+                </a:path>
+              </a:pathLst>
+            </a:custGeom>
+            <a:ln w="13550" cap="flat">
+              <a:solidFill>
+                <a:srgbClr val="EBEBEB">
+                  <a:alpha val="100000"/>
+                </a:srgbClr>
+              </a:solidFill>
+              <a:prstDash val="solid"/>
+              <a:round/>
+            </a:ln>
+          </p:spPr>
+          <p:txBody>
+            <a:bodyPr/>
+            <a:lstStyle/>
+            <a:p/>
+          </p:txBody>
+        </p:sp>
+        <p:sp>
+          <p:nvSpPr>
+            <p:cNvPr id="70" name="pl70"/>
+            <p:cNvSpPr/>
+            <p:nvPr/>
+          </p:nvSpPr>
+          <p:spPr>
+            <a:xfrm>
+              <a:off x="8245225" y="4336484"/>
+              <a:ext cx="0" cy="1317069"/>
+            </a:xfrm>
+            <a:custGeom>
+              <a:avLst/>
+              <a:pathLst>
+                <a:path w="0" h="1317069">
+                  <a:moveTo>
+                    <a:pt x="0" y="1317069"/>
+                  </a:moveTo>
+                  <a:lnTo>
+                    <a:pt x="0" y="0"/>
+                  </a:lnTo>
+                  <a:lnTo>
+                    <a:pt x="0" y="0"/>
+                  </a:lnTo>
+                </a:path>
+              </a:pathLst>
+            </a:custGeom>
+            <a:ln w="13550" cap="flat">
+              <a:solidFill>
+                <a:srgbClr val="EBEBEB">
+                  <a:alpha val="100000"/>
+                </a:srgbClr>
+              </a:solidFill>
+              <a:prstDash val="solid"/>
+              <a:round/>
+            </a:ln>
+          </p:spPr>
+          <p:txBody>
+            <a:bodyPr/>
+            <a:lstStyle/>
+            <a:p/>
+          </p:txBody>
+        </p:sp>
+        <p:sp>
+          <p:nvSpPr>
+            <p:cNvPr id="71" name="pg71"/>
+            <p:cNvSpPr/>
+            <p:nvPr/>
+          </p:nvSpPr>
+          <p:spPr>
+            <a:xfrm>
+              <a:off x="1235312" y="4336484"/>
+              <a:ext cx="6964104" cy="1213487"/>
+            </a:xfrm>
+            <a:custGeom>
+              <a:avLst/>
+              <a:pathLst>
+                <a:path w="6964104" h="1213487">
+                  <a:moveTo>
+                    <a:pt x="157439" y="0"/>
+                  </a:moveTo>
+                  <a:lnTo>
+                    <a:pt x="211033" y="32946"/>
+                  </a:lnTo>
+                  <a:lnTo>
+                    <a:pt x="281377" y="74714"/>
+                  </a:lnTo>
+                  <a:lnTo>
+                    <a:pt x="351722" y="115056"/>
+                  </a:lnTo>
+                  <a:lnTo>
+                    <a:pt x="422066" y="154023"/>
+                  </a:lnTo>
+                  <a:lnTo>
+                    <a:pt x="492411" y="191660"/>
+                  </a:lnTo>
+                  <a:lnTo>
+                    <a:pt x="562755" y="228013"/>
+                  </a:lnTo>
+                  <a:lnTo>
+                    <a:pt x="633100" y="263126"/>
+                  </a:lnTo>
+                  <a:lnTo>
+                    <a:pt x="703444" y="297041"/>
+                  </a:lnTo>
+                  <a:lnTo>
+                    <a:pt x="773789" y="329798"/>
+                  </a:lnTo>
+                  <a:lnTo>
+                    <a:pt x="844133" y="361439"/>
+                  </a:lnTo>
+                  <a:lnTo>
+                    <a:pt x="914478" y="391999"/>
+                  </a:lnTo>
+                  <a:lnTo>
+                    <a:pt x="984822" y="421517"/>
+                  </a:lnTo>
+                  <a:lnTo>
+                    <a:pt x="1055167" y="450028"/>
+                  </a:lnTo>
+                  <a:lnTo>
+                    <a:pt x="1125511" y="477567"/>
+                  </a:lnTo>
+                  <a:lnTo>
+                    <a:pt x="1195856" y="504165"/>
+                  </a:lnTo>
+                  <a:lnTo>
+                    <a:pt x="1266200" y="529857"/>
+                  </a:lnTo>
+                  <a:lnTo>
+                    <a:pt x="1336545" y="554671"/>
+                  </a:lnTo>
+                  <a:lnTo>
+                    <a:pt x="1406889" y="578640"/>
+                  </a:lnTo>
+                  <a:lnTo>
+                    <a:pt x="1477234" y="601790"/>
+                  </a:lnTo>
+                  <a:lnTo>
+                    <a:pt x="1547578" y="624151"/>
+                  </a:lnTo>
+                  <a:lnTo>
+                    <a:pt x="1617923" y="645748"/>
+                  </a:lnTo>
+                  <a:lnTo>
+                    <a:pt x="1688267" y="666609"/>
+                  </a:lnTo>
+                  <a:lnTo>
+                    <a:pt x="1758612" y="686759"/>
+                  </a:lnTo>
+                  <a:lnTo>
+                    <a:pt x="1828956" y="706220"/>
+                  </a:lnTo>
+                  <a:lnTo>
+                    <a:pt x="1899301" y="725018"/>
+                  </a:lnTo>
+                  <a:lnTo>
+                    <a:pt x="1969645" y="743175"/>
+                  </a:lnTo>
+                  <a:lnTo>
+                    <a:pt x="2039990" y="760712"/>
+                  </a:lnTo>
+                  <a:lnTo>
+                    <a:pt x="2110334" y="777650"/>
+                  </a:lnTo>
+                  <a:lnTo>
+                    <a:pt x="2180679" y="794011"/>
+                  </a:lnTo>
+                  <a:lnTo>
+                    <a:pt x="2251023" y="809814"/>
+                  </a:lnTo>
+                  <a:lnTo>
+                    <a:pt x="2321368" y="825077"/>
+                  </a:lnTo>
+                  <a:lnTo>
+                    <a:pt x="2391712" y="839820"/>
+                  </a:lnTo>
+                  <a:lnTo>
+                    <a:pt x="2462057" y="854060"/>
+                  </a:lnTo>
+                  <a:lnTo>
+                    <a:pt x="2532401" y="867814"/>
+                  </a:lnTo>
+                  <a:lnTo>
+                    <a:pt x="2602746" y="881099"/>
+                  </a:lnTo>
+                  <a:lnTo>
+                    <a:pt x="2673090" y="893930"/>
+                  </a:lnTo>
+                  <a:lnTo>
+                    <a:pt x="2743435" y="906324"/>
+                  </a:lnTo>
+                  <a:lnTo>
+                    <a:pt x="2813779" y="918295"/>
+                  </a:lnTo>
+                  <a:lnTo>
+                    <a:pt x="2884124" y="929857"/>
+                  </a:lnTo>
+                  <a:lnTo>
+                    <a:pt x="2954468" y="941025"/>
+                  </a:lnTo>
+                  <a:lnTo>
+                    <a:pt x="3024813" y="951812"/>
+                  </a:lnTo>
+                  <a:lnTo>
+                    <a:pt x="3095157" y="959163"/>
+                  </a:lnTo>
+                  <a:lnTo>
+                    <a:pt x="3165502" y="962204"/>
+                  </a:lnTo>
+                  <a:lnTo>
+                    <a:pt x="3235846" y="965213"/>
+                  </a:lnTo>
+                  <a:lnTo>
+                    <a:pt x="3306191" y="968192"/>
+                  </a:lnTo>
+                  <a:lnTo>
+                    <a:pt x="3376535" y="971141"/>
+                  </a:lnTo>
+                  <a:lnTo>
+                    <a:pt x="3446880" y="974059"/>
+                  </a:lnTo>
+                  <a:lnTo>
+                    <a:pt x="3517224" y="976947"/>
+                  </a:lnTo>
+                  <a:lnTo>
+                    <a:pt x="3587569" y="979807"/>
+                  </a:lnTo>
+                  <a:lnTo>
+                    <a:pt x="3657913" y="982636"/>
+                  </a:lnTo>
+                  <a:lnTo>
+                    <a:pt x="3728257" y="985437"/>
+                  </a:lnTo>
+                  <a:lnTo>
+                    <a:pt x="3798602" y="988210"/>
+                  </a:lnTo>
+                  <a:lnTo>
+                    <a:pt x="3868946" y="990954"/>
+                  </a:lnTo>
+                  <a:lnTo>
+                    <a:pt x="3939291" y="993670"/>
+                  </a:lnTo>
+                  <a:lnTo>
+                    <a:pt x="4009635" y="996359"/>
+                  </a:lnTo>
+                  <a:lnTo>
+                    <a:pt x="4079980" y="999020"/>
+                  </a:lnTo>
+                  <a:lnTo>
+                    <a:pt x="4150324" y="1001654"/>
+                  </a:lnTo>
+                  <a:lnTo>
+                    <a:pt x="4220669" y="1004261"/>
+                  </a:lnTo>
+                  <a:lnTo>
+                    <a:pt x="4291013" y="1006841"/>
+                  </a:lnTo>
+                  <a:lnTo>
+                    <a:pt x="4361358" y="1009395"/>
+                  </a:lnTo>
+                  <a:lnTo>
+                    <a:pt x="4431702" y="1011923"/>
+                  </a:lnTo>
+                  <a:lnTo>
+                    <a:pt x="4502047" y="1014426"/>
+                  </a:lnTo>
+                  <a:lnTo>
+                    <a:pt x="4572391" y="1016902"/>
+                  </a:lnTo>
+                  <a:lnTo>
+                    <a:pt x="4642736" y="1019354"/>
+                  </a:lnTo>
+                  <a:lnTo>
+                    <a:pt x="4713080" y="1021780"/>
+                  </a:lnTo>
+                  <a:lnTo>
+                    <a:pt x="4783425" y="1024182"/>
+                  </a:lnTo>
+                  <a:lnTo>
+                    <a:pt x="4853769" y="1026559"/>
+                  </a:lnTo>
+                  <a:lnTo>
+                    <a:pt x="4924114" y="1028912"/>
+                  </a:lnTo>
+                  <a:lnTo>
+                    <a:pt x="4994458" y="1031241"/>
+                  </a:lnTo>
+                  <a:lnTo>
+                    <a:pt x="5064803" y="1033546"/>
+                  </a:lnTo>
+                  <a:lnTo>
+                    <a:pt x="5135147" y="1035828"/>
+                  </a:lnTo>
+                  <a:lnTo>
+                    <a:pt x="5205492" y="1038086"/>
+                  </a:lnTo>
+                  <a:lnTo>
+                    <a:pt x="5275836" y="1040322"/>
+                  </a:lnTo>
+                  <a:lnTo>
+                    <a:pt x="5346181" y="1042534"/>
+                  </a:lnTo>
+                  <a:lnTo>
+                    <a:pt x="5416525" y="1044724"/>
+                  </a:lnTo>
+                  <a:lnTo>
+                    <a:pt x="5486870" y="1046892"/>
+                  </a:lnTo>
+                  <a:lnTo>
+                    <a:pt x="5557214" y="1049037"/>
+                  </a:lnTo>
+                  <a:lnTo>
+                    <a:pt x="5627559" y="1051161"/>
+                  </a:lnTo>
+                  <a:lnTo>
+                    <a:pt x="5697903" y="1053263"/>
+                  </a:lnTo>
+                  <a:lnTo>
+                    <a:pt x="5768248" y="1055343"/>
+                  </a:lnTo>
+                  <a:lnTo>
+                    <a:pt x="5838592" y="1057403"/>
+                  </a:lnTo>
+                  <a:lnTo>
+                    <a:pt x="5908937" y="1059441"/>
+                  </a:lnTo>
+                  <a:lnTo>
+                    <a:pt x="5979281" y="1061458"/>
+                  </a:lnTo>
+                  <a:lnTo>
+                    <a:pt x="6049626" y="1063455"/>
+                  </a:lnTo>
+                  <a:lnTo>
+                    <a:pt x="6119970" y="1065432"/>
+                  </a:lnTo>
+                  <a:lnTo>
+                    <a:pt x="6190315" y="1067388"/>
+                  </a:lnTo>
+                  <a:lnTo>
+                    <a:pt x="6260659" y="1069325"/>
+                  </a:lnTo>
+                  <a:lnTo>
+                    <a:pt x="6331004" y="1071241"/>
+                  </a:lnTo>
+                  <a:lnTo>
+                    <a:pt x="6401348" y="1073139"/>
+                  </a:lnTo>
+                  <a:lnTo>
+                    <a:pt x="6471693" y="1075016"/>
+                  </a:lnTo>
+                  <a:lnTo>
+                    <a:pt x="6542037" y="1076875"/>
+                  </a:lnTo>
+                  <a:lnTo>
+                    <a:pt x="6612382" y="1078715"/>
+                  </a:lnTo>
+                  <a:lnTo>
+                    <a:pt x="6682726" y="1080535"/>
+                  </a:lnTo>
+                  <a:lnTo>
+                    <a:pt x="6753071" y="1082338"/>
+                  </a:lnTo>
+                  <a:lnTo>
+                    <a:pt x="6823415" y="1084122"/>
+                  </a:lnTo>
+                  <a:lnTo>
+                    <a:pt x="6893760" y="1085887"/>
+                  </a:lnTo>
+                  <a:lnTo>
+                    <a:pt x="6964104" y="1087635"/>
+                  </a:lnTo>
+                  <a:lnTo>
+                    <a:pt x="6964104" y="1213487"/>
+                  </a:lnTo>
+                  <a:lnTo>
+                    <a:pt x="6893760" y="1211943"/>
+                  </a:lnTo>
+                  <a:lnTo>
+                    <a:pt x="6823415" y="1210344"/>
+                  </a:lnTo>
+                  <a:lnTo>
+                    <a:pt x="6753071" y="1208689"/>
+                  </a:lnTo>
+                  <a:lnTo>
+                    <a:pt x="6682726" y="1206976"/>
+                  </a:lnTo>
+                  <a:lnTo>
+                    <a:pt x="6612382" y="1205201"/>
+                  </a:lnTo>
+                  <a:lnTo>
+                    <a:pt x="6542037" y="1203365"/>
+                  </a:lnTo>
+                  <a:lnTo>
+                    <a:pt x="6471693" y="1201463"/>
+                  </a:lnTo>
+                  <a:lnTo>
+                    <a:pt x="6401348" y="1199494"/>
+                  </a:lnTo>
+                  <a:lnTo>
+                    <a:pt x="6331004" y="1197456"/>
+                  </a:lnTo>
+                  <a:lnTo>
+                    <a:pt x="6260659" y="1195346"/>
+                  </a:lnTo>
+                  <a:lnTo>
+                    <a:pt x="6190315" y="1193161"/>
+                  </a:lnTo>
+                  <a:lnTo>
+                    <a:pt x="6119970" y="1190899"/>
+                  </a:lnTo>
+                  <a:lnTo>
+                    <a:pt x="6049626" y="1188557"/>
+                  </a:lnTo>
+                  <a:lnTo>
+                    <a:pt x="5979281" y="1186132"/>
+                  </a:lnTo>
+                  <a:lnTo>
+                    <a:pt x="5908937" y="1183622"/>
+                  </a:lnTo>
+                  <a:lnTo>
+                    <a:pt x="5838592" y="1181023"/>
+                  </a:lnTo>
+                  <a:lnTo>
+                    <a:pt x="5768248" y="1178332"/>
+                  </a:lnTo>
+                  <a:lnTo>
+                    <a:pt x="5697903" y="1175546"/>
+                  </a:lnTo>
+                  <a:lnTo>
+                    <a:pt x="5627559" y="1172662"/>
+                  </a:lnTo>
+                  <a:lnTo>
+                    <a:pt x="5557214" y="1169676"/>
+                  </a:lnTo>
+                  <a:lnTo>
+                    <a:pt x="5486870" y="1166584"/>
+                  </a:lnTo>
+                  <a:lnTo>
+                    <a:pt x="5416525" y="1163383"/>
+                  </a:lnTo>
+                  <a:lnTo>
+                    <a:pt x="5346181" y="1160069"/>
+                  </a:lnTo>
+                  <a:lnTo>
+                    <a:pt x="5275836" y="1156638"/>
+                  </a:lnTo>
+                  <a:lnTo>
+                    <a:pt x="5205492" y="1153086"/>
+                  </a:lnTo>
+                  <a:lnTo>
+                    <a:pt x="5135147" y="1149409"/>
+                  </a:lnTo>
+                  <a:lnTo>
+                    <a:pt x="5064803" y="1145601"/>
+                  </a:lnTo>
+                  <a:lnTo>
+                    <a:pt x="4994458" y="1141659"/>
+                  </a:lnTo>
+                  <a:lnTo>
+                    <a:pt x="4924114" y="1137578"/>
+                  </a:lnTo>
+                  <a:lnTo>
+                    <a:pt x="4853769" y="1133353"/>
+                  </a:lnTo>
+                  <a:lnTo>
+                    <a:pt x="4783425" y="1128978"/>
+                  </a:lnTo>
+                  <a:lnTo>
+                    <a:pt x="4713080" y="1124449"/>
+                  </a:lnTo>
+                  <a:lnTo>
+                    <a:pt x="4642736" y="1119760"/>
+                  </a:lnTo>
+                  <a:lnTo>
+                    <a:pt x="4572391" y="1114905"/>
+                  </a:lnTo>
+                  <a:lnTo>
+                    <a:pt x="4502047" y="1109879"/>
+                  </a:lnTo>
+                  <a:lnTo>
+                    <a:pt x="4431702" y="1104675"/>
+                  </a:lnTo>
+                  <a:lnTo>
+                    <a:pt x="4361358" y="1099288"/>
+                  </a:lnTo>
+                  <a:lnTo>
+                    <a:pt x="4291013" y="1093710"/>
+                  </a:lnTo>
+                  <a:lnTo>
+                    <a:pt x="4220669" y="1087935"/>
+                  </a:lnTo>
+                  <a:lnTo>
+                    <a:pt x="4150324" y="1081956"/>
+                  </a:lnTo>
+                  <a:lnTo>
+                    <a:pt x="4079980" y="1075766"/>
+                  </a:lnTo>
+                  <a:lnTo>
+                    <a:pt x="4009635" y="1069357"/>
+                  </a:lnTo>
+                  <a:lnTo>
+                    <a:pt x="3939291" y="1062722"/>
+                  </a:lnTo>
+                  <a:lnTo>
+                    <a:pt x="3868946" y="1055853"/>
+                  </a:lnTo>
+                  <a:lnTo>
+                    <a:pt x="3798602" y="1048741"/>
+                  </a:lnTo>
+                  <a:lnTo>
+                    <a:pt x="3728257" y="1041378"/>
+                  </a:lnTo>
+                  <a:lnTo>
+                    <a:pt x="3657913" y="1033754"/>
+                  </a:lnTo>
+                  <a:lnTo>
+                    <a:pt x="3587569" y="1025862"/>
+                  </a:lnTo>
+                  <a:lnTo>
+                    <a:pt x="3517224" y="1017690"/>
+                  </a:lnTo>
+                  <a:lnTo>
+                    <a:pt x="3446880" y="1009230"/>
+                  </a:lnTo>
+                  <a:lnTo>
+                    <a:pt x="3376535" y="1000471"/>
+                  </a:lnTo>
+                  <a:lnTo>
+                    <a:pt x="3306191" y="991403"/>
+                  </a:lnTo>
+                  <a:lnTo>
+                    <a:pt x="3235846" y="982015"/>
+                  </a:lnTo>
+                  <a:lnTo>
+                    <a:pt x="3165502" y="972295"/>
+                  </a:lnTo>
+                  <a:lnTo>
+                    <a:pt x="3095157" y="962231"/>
+                  </a:lnTo>
+                  <a:lnTo>
+                    <a:pt x="3024813" y="956092"/>
+                  </a:lnTo>
+                  <a:lnTo>
+                    <a:pt x="2954468" y="952988"/>
+                  </a:lnTo>
+                  <a:lnTo>
+                    <a:pt x="2884124" y="949853"/>
+                  </a:lnTo>
+                  <a:lnTo>
+                    <a:pt x="2813779" y="946685"/>
+                  </a:lnTo>
+                  <a:lnTo>
+                    <a:pt x="2743435" y="943484"/>
+                  </a:lnTo>
+                  <a:lnTo>
+                    <a:pt x="2673090" y="940251"/>
+                  </a:lnTo>
+                  <a:lnTo>
+                    <a:pt x="2602746" y="936984"/>
+                  </a:lnTo>
+                  <a:lnTo>
+                    <a:pt x="2532401" y="933684"/>
+                  </a:lnTo>
+                  <a:lnTo>
+                    <a:pt x="2462057" y="930349"/>
+                  </a:lnTo>
+                  <a:lnTo>
+                    <a:pt x="2391712" y="926980"/>
+                  </a:lnTo>
+                  <a:lnTo>
+                    <a:pt x="2321368" y="923577"/>
+                  </a:lnTo>
+                  <a:lnTo>
+                    <a:pt x="2251023" y="920138"/>
+                  </a:lnTo>
+                  <a:lnTo>
+                    <a:pt x="2180679" y="916664"/>
+                  </a:lnTo>
+                  <a:lnTo>
+                    <a:pt x="2110334" y="913154"/>
+                  </a:lnTo>
+                  <a:lnTo>
+                    <a:pt x="2039990" y="909608"/>
+                  </a:lnTo>
+                  <a:lnTo>
+                    <a:pt x="1969645" y="906026"/>
+                  </a:lnTo>
+                  <a:lnTo>
+                    <a:pt x="1899301" y="902406"/>
+                  </a:lnTo>
+                  <a:lnTo>
+                    <a:pt x="1828956" y="898749"/>
+                  </a:lnTo>
+                  <a:lnTo>
+                    <a:pt x="1758612" y="895055"/>
+                  </a:lnTo>
+                  <a:lnTo>
+                    <a:pt x="1688267" y="891322"/>
+                  </a:lnTo>
+                  <a:lnTo>
+                    <a:pt x="1617923" y="887551"/>
+                  </a:lnTo>
+                  <a:lnTo>
+                    <a:pt x="1547578" y="883741"/>
+                  </a:lnTo>
+                  <a:lnTo>
+                    <a:pt x="1477234" y="879892"/>
+                  </a:lnTo>
+                  <a:lnTo>
+                    <a:pt x="1406889" y="876003"/>
+                  </a:lnTo>
+                  <a:lnTo>
+                    <a:pt x="1336545" y="872074"/>
+                  </a:lnTo>
+                  <a:lnTo>
+                    <a:pt x="1266200" y="868105"/>
+                  </a:lnTo>
+                  <a:lnTo>
+                    <a:pt x="1195856" y="864094"/>
+                  </a:lnTo>
+                  <a:lnTo>
+                    <a:pt x="1125511" y="860043"/>
+                  </a:lnTo>
+                  <a:lnTo>
+                    <a:pt x="1055167" y="855949"/>
+                  </a:lnTo>
+                  <a:lnTo>
+                    <a:pt x="984822" y="851814"/>
+                  </a:lnTo>
+                  <a:lnTo>
+                    <a:pt x="914478" y="847635"/>
+                  </a:lnTo>
+                  <a:lnTo>
+                    <a:pt x="844133" y="843414"/>
+                  </a:lnTo>
+                  <a:lnTo>
+                    <a:pt x="773789" y="839149"/>
+                  </a:lnTo>
+                  <a:lnTo>
+                    <a:pt x="703444" y="834840"/>
+                  </a:lnTo>
+                  <a:lnTo>
+                    <a:pt x="633100" y="830487"/>
+                  </a:lnTo>
+                  <a:lnTo>
+                    <a:pt x="562755" y="826089"/>
+                  </a:lnTo>
+                  <a:lnTo>
+                    <a:pt x="492411" y="821646"/>
+                  </a:lnTo>
+                  <a:lnTo>
+                    <a:pt x="422066" y="817156"/>
+                  </a:lnTo>
+                  <a:lnTo>
+                    <a:pt x="351722" y="812621"/>
+                  </a:lnTo>
+                  <a:lnTo>
+                    <a:pt x="281377" y="808039"/>
+                  </a:lnTo>
+                  <a:lnTo>
+                    <a:pt x="211033" y="803409"/>
+                  </a:lnTo>
+                  <a:lnTo>
+                    <a:pt x="140688" y="798732"/>
+                  </a:lnTo>
+                  <a:lnTo>
+                    <a:pt x="70344" y="794007"/>
+                  </a:lnTo>
+                  <a:lnTo>
+                    <a:pt x="0" y="789233"/>
+                  </a:lnTo>
+                  <a:close/>
+                </a:path>
+              </a:pathLst>
+            </a:custGeom>
+            <a:solidFill>
+              <a:srgbClr val="FF8C00">
+                <a:alpha val="20000"/>
+              </a:srgbClr>
+            </a:solidFill>
+          </p:spPr>
+          <p:txBody>
+            <a:bodyPr/>
+            <a:lstStyle/>
+            <a:p/>
+          </p:txBody>
+        </p:sp>
+        <p:sp>
+          <p:nvSpPr>
+            <p:cNvPr id="72" name="pl72"/>
+            <p:cNvSpPr/>
+            <p:nvPr/>
+          </p:nvSpPr>
+          <p:spPr>
+            <a:xfrm>
+              <a:off x="1392751" y="4336484"/>
+              <a:ext cx="6806665" cy="1087635"/>
+            </a:xfrm>
+            <a:custGeom>
+              <a:avLst/>
+              <a:pathLst>
+                <a:path w="6806665" h="1087635">
+                  <a:moveTo>
+                    <a:pt x="0" y="0"/>
+                  </a:moveTo>
+                  <a:lnTo>
+                    <a:pt x="53594" y="32946"/>
+                  </a:lnTo>
+                  <a:lnTo>
+                    <a:pt x="123938" y="74714"/>
+                  </a:lnTo>
+                  <a:lnTo>
+                    <a:pt x="194283" y="115056"/>
+                  </a:lnTo>
+                  <a:lnTo>
+                    <a:pt x="264627" y="154023"/>
+                  </a:lnTo>
+                  <a:lnTo>
+                    <a:pt x="334972" y="191660"/>
+                  </a:lnTo>
+                  <a:lnTo>
+                    <a:pt x="405316" y="228013"/>
+                  </a:lnTo>
+                  <a:lnTo>
+                    <a:pt x="475661" y="263126"/>
+                  </a:lnTo>
+                  <a:lnTo>
+                    <a:pt x="546005" y="297041"/>
+                  </a:lnTo>
+                  <a:lnTo>
+                    <a:pt x="616350" y="329798"/>
+                  </a:lnTo>
+                  <a:lnTo>
+                    <a:pt x="686694" y="361439"/>
+                  </a:lnTo>
+                  <a:lnTo>
+                    <a:pt x="757039" y="391999"/>
+                  </a:lnTo>
+                  <a:lnTo>
+                    <a:pt x="827383" y="421517"/>
+                  </a:lnTo>
+                  <a:lnTo>
+                    <a:pt x="897728" y="450028"/>
+                  </a:lnTo>
+                  <a:lnTo>
+                    <a:pt x="968072" y="477567"/>
+                  </a:lnTo>
+                  <a:lnTo>
+                    <a:pt x="1038417" y="504165"/>
+                  </a:lnTo>
+                  <a:lnTo>
+                    <a:pt x="1108761" y="529857"/>
+                  </a:lnTo>
+                  <a:lnTo>
+                    <a:pt x="1179106" y="554671"/>
+                  </a:lnTo>
+                  <a:lnTo>
+                    <a:pt x="1249450" y="578640"/>
+                  </a:lnTo>
+                  <a:lnTo>
+                    <a:pt x="1319795" y="601790"/>
+                  </a:lnTo>
+                  <a:lnTo>
+                    <a:pt x="1390139" y="624151"/>
+                  </a:lnTo>
+                  <a:lnTo>
+                    <a:pt x="1460484" y="645748"/>
+                  </a:lnTo>
+                  <a:lnTo>
+                    <a:pt x="1530828" y="666609"/>
+                  </a:lnTo>
+                  <a:lnTo>
+                    <a:pt x="1601173" y="686759"/>
+                  </a:lnTo>
+                  <a:lnTo>
+                    <a:pt x="1671517" y="706220"/>
+                  </a:lnTo>
+                  <a:lnTo>
+                    <a:pt x="1741862" y="725018"/>
+                  </a:lnTo>
+                  <a:lnTo>
+                    <a:pt x="1812206" y="743175"/>
+                  </a:lnTo>
+                  <a:lnTo>
+                    <a:pt x="1882551" y="760712"/>
+                  </a:lnTo>
+                  <a:lnTo>
+                    <a:pt x="1952895" y="777650"/>
+                  </a:lnTo>
+                  <a:lnTo>
+                    <a:pt x="2023240" y="794011"/>
+                  </a:lnTo>
+                  <a:lnTo>
+                    <a:pt x="2093584" y="809814"/>
+                  </a:lnTo>
+                  <a:lnTo>
+                    <a:pt x="2163929" y="825077"/>
+                  </a:lnTo>
+                  <a:lnTo>
+                    <a:pt x="2234273" y="839820"/>
+                  </a:lnTo>
+                  <a:lnTo>
+                    <a:pt x="2304618" y="854060"/>
+                  </a:lnTo>
+                  <a:lnTo>
+                    <a:pt x="2374962" y="867814"/>
+                  </a:lnTo>
+                  <a:lnTo>
+                    <a:pt x="2445306" y="881099"/>
+                  </a:lnTo>
+                  <a:lnTo>
+                    <a:pt x="2515651" y="893930"/>
+                  </a:lnTo>
+                  <a:lnTo>
+                    <a:pt x="2585995" y="906324"/>
+                  </a:lnTo>
+                  <a:lnTo>
+                    <a:pt x="2656340" y="918295"/>
+                  </a:lnTo>
+                  <a:lnTo>
+                    <a:pt x="2726684" y="929857"/>
+                  </a:lnTo>
+                  <a:lnTo>
+                    <a:pt x="2797029" y="941025"/>
+                  </a:lnTo>
+                  <a:lnTo>
+                    <a:pt x="2867373" y="951812"/>
+                  </a:lnTo>
+                  <a:lnTo>
+                    <a:pt x="2937718" y="959163"/>
+                  </a:lnTo>
+                  <a:lnTo>
+                    <a:pt x="3008062" y="962204"/>
+                  </a:lnTo>
+                  <a:lnTo>
+                    <a:pt x="3078407" y="965213"/>
+                  </a:lnTo>
+                  <a:lnTo>
+                    <a:pt x="3148751" y="968192"/>
+                  </a:lnTo>
+                  <a:lnTo>
+                    <a:pt x="3219096" y="971141"/>
+                  </a:lnTo>
+                  <a:lnTo>
+                    <a:pt x="3289440" y="974059"/>
+                  </a:lnTo>
+                  <a:lnTo>
+                    <a:pt x="3359785" y="976947"/>
+                  </a:lnTo>
+                  <a:lnTo>
+                    <a:pt x="3430129" y="979807"/>
+                  </a:lnTo>
+                  <a:lnTo>
+                    <a:pt x="3500474" y="982636"/>
+                  </a:lnTo>
+                  <a:lnTo>
+                    <a:pt x="3570818" y="985437"/>
+                  </a:lnTo>
+                  <a:lnTo>
+                    <a:pt x="3641163" y="988210"/>
+                  </a:lnTo>
+                  <a:lnTo>
+                    <a:pt x="3711507" y="990954"/>
+                  </a:lnTo>
+                  <a:lnTo>
+                    <a:pt x="3781852" y="993670"/>
+                  </a:lnTo>
+                  <a:lnTo>
+                    <a:pt x="3852196" y="996359"/>
+                  </a:lnTo>
+                  <a:lnTo>
+                    <a:pt x="3922541" y="999020"/>
+                  </a:lnTo>
+                  <a:lnTo>
+                    <a:pt x="3992885" y="1001654"/>
+                  </a:lnTo>
+                  <a:lnTo>
+                    <a:pt x="4063230" y="1004261"/>
+                  </a:lnTo>
+                  <a:lnTo>
+                    <a:pt x="4133574" y="1006841"/>
+                  </a:lnTo>
+                  <a:lnTo>
+                    <a:pt x="4203919" y="1009395"/>
+                  </a:lnTo>
+                  <a:lnTo>
+                    <a:pt x="4274263" y="1011923"/>
+                  </a:lnTo>
+                  <a:lnTo>
+                    <a:pt x="4344608" y="1014426"/>
+                  </a:lnTo>
+                  <a:lnTo>
+                    <a:pt x="4414952" y="1016902"/>
+                  </a:lnTo>
+                  <a:lnTo>
+                    <a:pt x="4485297" y="1019354"/>
+                  </a:lnTo>
+                  <a:lnTo>
+                    <a:pt x="4555641" y="1021780"/>
+                  </a:lnTo>
+                  <a:lnTo>
+                    <a:pt x="4625986" y="1024182"/>
+                  </a:lnTo>
+                  <a:lnTo>
+                    <a:pt x="4696330" y="1026559"/>
+                  </a:lnTo>
+                  <a:lnTo>
+                    <a:pt x="4766675" y="1028912"/>
+                  </a:lnTo>
+                  <a:lnTo>
+                    <a:pt x="4837019" y="1031241"/>
+                  </a:lnTo>
+                  <a:lnTo>
+                    <a:pt x="4907364" y="1033546"/>
+                  </a:lnTo>
+                  <a:lnTo>
+                    <a:pt x="4977708" y="1035828"/>
+                  </a:lnTo>
+                  <a:lnTo>
+                    <a:pt x="5048053" y="1038086"/>
+                  </a:lnTo>
+                  <a:lnTo>
+                    <a:pt x="5118397" y="1040322"/>
+                  </a:lnTo>
+                  <a:lnTo>
+                    <a:pt x="5188742" y="1042534"/>
+                  </a:lnTo>
+                  <a:lnTo>
+                    <a:pt x="5259086" y="1044724"/>
+                  </a:lnTo>
+                  <a:lnTo>
+                    <a:pt x="5329431" y="1046892"/>
+                  </a:lnTo>
+                  <a:lnTo>
+                    <a:pt x="5399775" y="1049037"/>
+                  </a:lnTo>
+                  <a:lnTo>
+                    <a:pt x="5470120" y="1051161"/>
+                  </a:lnTo>
+                  <a:lnTo>
+                    <a:pt x="5540464" y="1053263"/>
+                  </a:lnTo>
+                  <a:lnTo>
+                    <a:pt x="5610809" y="1055343"/>
+                  </a:lnTo>
+                  <a:lnTo>
+                    <a:pt x="5681153" y="1057403"/>
+                  </a:lnTo>
+                  <a:lnTo>
+                    <a:pt x="5751498" y="1059441"/>
+                  </a:lnTo>
+                  <a:lnTo>
+                    <a:pt x="5821842" y="1061458"/>
+                  </a:lnTo>
+                  <a:lnTo>
+                    <a:pt x="5892187" y="1063455"/>
+                  </a:lnTo>
+                  <a:lnTo>
+                    <a:pt x="5962531" y="1065432"/>
+                  </a:lnTo>
+                  <a:lnTo>
+                    <a:pt x="6032876" y="1067388"/>
+                  </a:lnTo>
+                  <a:lnTo>
+                    <a:pt x="6103220" y="1069325"/>
+                  </a:lnTo>
+                  <a:lnTo>
+                    <a:pt x="6173564" y="1071241"/>
+                  </a:lnTo>
+                  <a:lnTo>
+                    <a:pt x="6243909" y="1073139"/>
+                  </a:lnTo>
+                  <a:lnTo>
+                    <a:pt x="6314253" y="1075016"/>
+                  </a:lnTo>
+                  <a:lnTo>
+                    <a:pt x="6384598" y="1076875"/>
+                  </a:lnTo>
+                  <a:lnTo>
+                    <a:pt x="6454942" y="1078715"/>
+                  </a:lnTo>
+                  <a:lnTo>
+                    <a:pt x="6525287" y="1080535"/>
+                  </a:lnTo>
+                  <a:lnTo>
+                    <a:pt x="6595631" y="1082338"/>
+                  </a:lnTo>
+                  <a:lnTo>
+                    <a:pt x="6665976" y="1084122"/>
+                  </a:lnTo>
+                  <a:lnTo>
+                    <a:pt x="6736320" y="1085887"/>
+                  </a:lnTo>
+                  <a:lnTo>
+                    <a:pt x="6806665" y="1087635"/>
+                  </a:lnTo>
+                </a:path>
+              </a:pathLst>
+            </a:custGeom>
+          </p:spPr>
+          <p:txBody>
+            <a:bodyPr/>
+            <a:lstStyle/>
+            <a:p/>
+          </p:txBody>
+        </p:sp>
+        <p:sp>
+          <p:nvSpPr>
+            <p:cNvPr id="73" name="pl73"/>
+            <p:cNvSpPr/>
+            <p:nvPr/>
+          </p:nvSpPr>
+          <p:spPr>
+            <a:xfrm>
+              <a:off x="1235312" y="5125717"/>
+              <a:ext cx="6964104" cy="424254"/>
+            </a:xfrm>
+            <a:custGeom>
+              <a:avLst/>
+              <a:pathLst>
+                <a:path w="6964104" h="424254">
+                  <a:moveTo>
+                    <a:pt x="6964104" y="424254"/>
+                  </a:moveTo>
+                  <a:lnTo>
+                    <a:pt x="6893760" y="422710"/>
+                  </a:lnTo>
+                  <a:lnTo>
+                    <a:pt x="6823415" y="421111"/>
+                  </a:lnTo>
+                  <a:lnTo>
+                    <a:pt x="6753071" y="419456"/>
+                  </a:lnTo>
+                  <a:lnTo>
+                    <a:pt x="6682726" y="417742"/>
+                  </a:lnTo>
+                  <a:lnTo>
+                    <a:pt x="6612382" y="415968"/>
+                  </a:lnTo>
+                  <a:lnTo>
+                    <a:pt x="6542037" y="414131"/>
+                  </a:lnTo>
+                  <a:lnTo>
+                    <a:pt x="6471693" y="412230"/>
+                  </a:lnTo>
+                  <a:lnTo>
+                    <a:pt x="6401348" y="410261"/>
+                  </a:lnTo>
+                  <a:lnTo>
+                    <a:pt x="6331004" y="408223"/>
+                  </a:lnTo>
+                  <a:lnTo>
+                    <a:pt x="6260659" y="406112"/>
+                  </a:lnTo>
+                  <a:lnTo>
+                    <a:pt x="6190315" y="403927"/>
+                  </a:lnTo>
+                  <a:lnTo>
+                    <a:pt x="6119970" y="401665"/>
+                  </a:lnTo>
+                  <a:lnTo>
+                    <a:pt x="6049626" y="399323"/>
+                  </a:lnTo>
+                  <a:lnTo>
+                    <a:pt x="5979281" y="396899"/>
+                  </a:lnTo>
+                  <a:lnTo>
+                    <a:pt x="5908937" y="394388"/>
+                  </a:lnTo>
+                  <a:lnTo>
+                    <a:pt x="5838592" y="391789"/>
+                  </a:lnTo>
+                  <a:lnTo>
+                    <a:pt x="5768248" y="389099"/>
+                  </a:lnTo>
+                  <a:lnTo>
+                    <a:pt x="5697903" y="386313"/>
+                  </a:lnTo>
+                  <a:lnTo>
+                    <a:pt x="5627559" y="383428"/>
+                  </a:lnTo>
+                  <a:lnTo>
+                    <a:pt x="5557214" y="380442"/>
+                  </a:lnTo>
+                  <a:lnTo>
+                    <a:pt x="5486870" y="377351"/>
+                  </a:lnTo>
+                  <a:lnTo>
+                    <a:pt x="5416525" y="374150"/>
+                  </a:lnTo>
+                  <a:lnTo>
+                    <a:pt x="5346181" y="370836"/>
+                  </a:lnTo>
+                  <a:lnTo>
+                    <a:pt x="5275836" y="367405"/>
+                  </a:lnTo>
+                  <a:lnTo>
+                    <a:pt x="5205492" y="363853"/>
+                  </a:lnTo>
+                  <a:lnTo>
+                    <a:pt x="5135147" y="360176"/>
+                  </a:lnTo>
+                  <a:lnTo>
+                    <a:pt x="5064803" y="356368"/>
+                  </a:lnTo>
+                  <a:lnTo>
+                    <a:pt x="4994458" y="352426"/>
+                  </a:lnTo>
+                  <a:lnTo>
+                    <a:pt x="4924114" y="348345"/>
+                  </a:lnTo>
+                  <a:lnTo>
+                    <a:pt x="4853769" y="344120"/>
+                  </a:lnTo>
+                  <a:lnTo>
+                    <a:pt x="4783425" y="339745"/>
+                  </a:lnTo>
+                  <a:lnTo>
+                    <a:pt x="4713080" y="335216"/>
+                  </a:lnTo>
+                  <a:lnTo>
+                    <a:pt x="4642736" y="330527"/>
+                  </a:lnTo>
+                  <a:lnTo>
+                    <a:pt x="4572391" y="325672"/>
+                  </a:lnTo>
+                  <a:lnTo>
+                    <a:pt x="4502047" y="320646"/>
+                  </a:lnTo>
+                  <a:lnTo>
+                    <a:pt x="4431702" y="315442"/>
+                  </a:lnTo>
+                  <a:lnTo>
+                    <a:pt x="4361358" y="310055"/>
+                  </a:lnTo>
+                  <a:lnTo>
+                    <a:pt x="4291013" y="304477"/>
+                  </a:lnTo>
+                  <a:lnTo>
+                    <a:pt x="4220669" y="298702"/>
+                  </a:lnTo>
+                  <a:lnTo>
+                    <a:pt x="4150324" y="292723"/>
+                  </a:lnTo>
+                  <a:lnTo>
+                    <a:pt x="4079980" y="286533"/>
+                  </a:lnTo>
+                  <a:lnTo>
+                    <a:pt x="4009635" y="280124"/>
+                  </a:lnTo>
+                  <a:lnTo>
+                    <a:pt x="3939291" y="273489"/>
+                  </a:lnTo>
+                  <a:lnTo>
+                    <a:pt x="3868946" y="266620"/>
+                  </a:lnTo>
+                  <a:lnTo>
+                    <a:pt x="3798602" y="259508"/>
+                  </a:lnTo>
+                  <a:lnTo>
+                    <a:pt x="3728257" y="252145"/>
+                  </a:lnTo>
+                  <a:lnTo>
+                    <a:pt x="3657913" y="244521"/>
+                  </a:lnTo>
+                  <a:lnTo>
+                    <a:pt x="3587569" y="236629"/>
+                  </a:lnTo>
+                  <a:lnTo>
+                    <a:pt x="3517224" y="228457"/>
+                  </a:lnTo>
+                  <a:lnTo>
+                    <a:pt x="3446880" y="219997"/>
+                  </a:lnTo>
+                  <a:lnTo>
+                    <a:pt x="3376535" y="211238"/>
+                  </a:lnTo>
+                  <a:lnTo>
+                    <a:pt x="3306191" y="202170"/>
+                  </a:lnTo>
+                  <a:lnTo>
+                    <a:pt x="3235846" y="192782"/>
+                  </a:lnTo>
+                  <a:lnTo>
+                    <a:pt x="3165502" y="183061"/>
+                  </a:lnTo>
+                  <a:lnTo>
+                    <a:pt x="3095157" y="172998"/>
+                  </a:lnTo>
+                  <a:lnTo>
+                    <a:pt x="3024813" y="166858"/>
+                  </a:lnTo>
+                  <a:lnTo>
+                    <a:pt x="2954468" y="163755"/>
+                  </a:lnTo>
+                  <a:lnTo>
+                    <a:pt x="2884124" y="160619"/>
+                  </a:lnTo>
+                  <a:lnTo>
+                    <a:pt x="2813779" y="157452"/>
+                  </a:lnTo>
+                  <a:lnTo>
+                    <a:pt x="2743435" y="154251"/>
+                  </a:lnTo>
+                  <a:lnTo>
+                    <a:pt x="2673090" y="151018"/>
+                  </a:lnTo>
+                  <a:lnTo>
+                    <a:pt x="2602746" y="147751"/>
+                  </a:lnTo>
+                  <a:lnTo>
+                    <a:pt x="2532401" y="144451"/>
+                  </a:lnTo>
+                  <a:lnTo>
+                    <a:pt x="2462057" y="141116"/>
+                  </a:lnTo>
+                  <a:lnTo>
+                    <a:pt x="2391712" y="137747"/>
+                  </a:lnTo>
+                  <a:lnTo>
+                    <a:pt x="2321368" y="134344"/>
+                  </a:lnTo>
+                  <a:lnTo>
+                    <a:pt x="2251023" y="130905"/>
+                  </a:lnTo>
+                  <a:lnTo>
+                    <a:pt x="2180679" y="127431"/>
+                  </a:lnTo>
+                  <a:lnTo>
+                    <a:pt x="2110334" y="123921"/>
+                  </a:lnTo>
+                  <a:lnTo>
+                    <a:pt x="2039990" y="120375"/>
+                  </a:lnTo>
+                  <a:lnTo>
+                    <a:pt x="1969645" y="116793"/>
+                  </a:lnTo>
+                  <a:lnTo>
+                    <a:pt x="1899301" y="113173"/>
+                  </a:lnTo>
+                  <a:lnTo>
+                    <a:pt x="1828956" y="109516"/>
+                  </a:lnTo>
+                  <a:lnTo>
+                    <a:pt x="1758612" y="105822"/>
+                  </a:lnTo>
+                  <a:lnTo>
+                    <a:pt x="1688267" y="102089"/>
+                  </a:lnTo>
+                  <a:lnTo>
+                    <a:pt x="1617923" y="98318"/>
+                  </a:lnTo>
+                  <a:lnTo>
+                    <a:pt x="1547578" y="94508"/>
+                  </a:lnTo>
+                  <a:lnTo>
+                    <a:pt x="1477234" y="90659"/>
+                  </a:lnTo>
+                  <a:lnTo>
+                    <a:pt x="1406889" y="86770"/>
+                  </a:lnTo>
+                  <a:lnTo>
+                    <a:pt x="1336545" y="82841"/>
+                  </a:lnTo>
+                  <a:lnTo>
+                    <a:pt x="1266200" y="78872"/>
+                  </a:lnTo>
+                  <a:lnTo>
+                    <a:pt x="1195856" y="74861"/>
+                  </a:lnTo>
+                  <a:lnTo>
+                    <a:pt x="1125511" y="70810"/>
+                  </a:lnTo>
+                  <a:lnTo>
+                    <a:pt x="1055167" y="66716"/>
+                  </a:lnTo>
+                  <a:lnTo>
+                    <a:pt x="984822" y="62580"/>
+                  </a:lnTo>
+                  <a:lnTo>
+                    <a:pt x="914478" y="58402"/>
+                  </a:lnTo>
+                  <a:lnTo>
+                    <a:pt x="844133" y="54181"/>
+                  </a:lnTo>
+                  <a:lnTo>
+                    <a:pt x="773789" y="49916"/>
+                  </a:lnTo>
+                  <a:lnTo>
+                    <a:pt x="703444" y="45607"/>
+                  </a:lnTo>
+                  <a:lnTo>
+                    <a:pt x="633100" y="41254"/>
+                  </a:lnTo>
+                  <a:lnTo>
+                    <a:pt x="562755" y="36856"/>
+                  </a:lnTo>
+                  <a:lnTo>
+                    <a:pt x="492411" y="32413"/>
+                  </a:lnTo>
+                  <a:lnTo>
+                    <a:pt x="422066" y="27923"/>
+                  </a:lnTo>
+                  <a:lnTo>
+                    <a:pt x="351722" y="23388"/>
+                  </a:lnTo>
+                  <a:lnTo>
+                    <a:pt x="281377" y="18806"/>
+                  </a:lnTo>
+                  <a:lnTo>
+                    <a:pt x="211033" y="14176"/>
+                  </a:lnTo>
+                  <a:lnTo>
+                    <a:pt x="140688" y="9499"/>
+                  </a:lnTo>
+                  <a:lnTo>
+                    <a:pt x="70344" y="4774"/>
+                  </a:lnTo>
+                  <a:lnTo>
+                    <a:pt x="0" y="0"/>
+                  </a:lnTo>
+                </a:path>
+              </a:pathLst>
+            </a:custGeom>
+          </p:spPr>
+          <p:txBody>
+            <a:bodyPr/>
+            <a:lstStyle/>
+            <a:p/>
+          </p:txBody>
+        </p:sp>
+        <p:sp>
+          <p:nvSpPr>
+            <p:cNvPr id="74" name="pl74"/>
+            <p:cNvSpPr/>
+            <p:nvPr/>
+          </p:nvSpPr>
+          <p:spPr>
+            <a:xfrm>
+              <a:off x="1235312" y="4796320"/>
+              <a:ext cx="6964104" cy="711269"/>
+            </a:xfrm>
+            <a:custGeom>
+              <a:avLst/>
+              <a:pathLst>
+                <a:path w="6964104" h="711269">
+                  <a:moveTo>
+                    <a:pt x="0" y="0"/>
+                  </a:moveTo>
+                  <a:lnTo>
+                    <a:pt x="70344" y="17727"/>
+                  </a:lnTo>
+                  <a:lnTo>
+                    <a:pt x="140688" y="35060"/>
+                  </a:lnTo>
+                  <a:lnTo>
+                    <a:pt x="211033" y="52008"/>
+                  </a:lnTo>
+                  <a:lnTo>
+                    <a:pt x="281377" y="68579"/>
+                  </a:lnTo>
+                  <a:lnTo>
+                    <a:pt x="351722" y="84782"/>
+                  </a:lnTo>
+                  <a:lnTo>
+                    <a:pt x="422066" y="100624"/>
+                  </a:lnTo>
+                  <a:lnTo>
+                    <a:pt x="492411" y="116115"/>
+                  </a:lnTo>
+                  <a:lnTo>
+                    <a:pt x="562755" y="131260"/>
+                  </a:lnTo>
+                  <a:lnTo>
+                    <a:pt x="633100" y="146070"/>
+                  </a:lnTo>
+                  <a:lnTo>
+                    <a:pt x="703444" y="160550"/>
+                  </a:lnTo>
+                  <a:lnTo>
+                    <a:pt x="773789" y="174707"/>
+                  </a:lnTo>
+                  <a:lnTo>
+                    <a:pt x="844133" y="188551"/>
+                  </a:lnTo>
+                  <a:lnTo>
+                    <a:pt x="914478" y="202086"/>
+                  </a:lnTo>
+                  <a:lnTo>
+                    <a:pt x="984822" y="215321"/>
+                  </a:lnTo>
+                  <a:lnTo>
+                    <a:pt x="1055167" y="228261"/>
+                  </a:lnTo>
+                  <a:lnTo>
+                    <a:pt x="1125511" y="240914"/>
+                  </a:lnTo>
+                  <a:lnTo>
+                    <a:pt x="1195856" y="253285"/>
+                  </a:lnTo>
+                  <a:lnTo>
+                    <a:pt x="1266200" y="265381"/>
+                  </a:lnTo>
+                  <a:lnTo>
+                    <a:pt x="1336545" y="277208"/>
+                  </a:lnTo>
+                  <a:lnTo>
+                    <a:pt x="1406889" y="288773"/>
+                  </a:lnTo>
+                  <a:lnTo>
+                    <a:pt x="1477234" y="300080"/>
+                  </a:lnTo>
+                  <a:lnTo>
+                    <a:pt x="1547578" y="311136"/>
+                  </a:lnTo>
+                  <a:lnTo>
+                    <a:pt x="1617923" y="321946"/>
+                  </a:lnTo>
+                  <a:lnTo>
+                    <a:pt x="1688267" y="332516"/>
+                  </a:lnTo>
+                  <a:lnTo>
+                    <a:pt x="1758612" y="342850"/>
+                  </a:lnTo>
+                  <a:lnTo>
+                    <a:pt x="1828956" y="352955"/>
+                  </a:lnTo>
+                  <a:lnTo>
+                    <a:pt x="1899301" y="362836"/>
+                  </a:lnTo>
+                  <a:lnTo>
+                    <a:pt x="1969645" y="372496"/>
+                  </a:lnTo>
+                  <a:lnTo>
+                    <a:pt x="2039990" y="381942"/>
+                  </a:lnTo>
+                  <a:lnTo>
+                    <a:pt x="2110334" y="391178"/>
+                  </a:lnTo>
+                  <a:lnTo>
+                    <a:pt x="2180679" y="400209"/>
+                  </a:lnTo>
+                  <a:lnTo>
+                    <a:pt x="2251023" y="409038"/>
+                  </a:lnTo>
+                  <a:lnTo>
+                    <a:pt x="2321368" y="417672"/>
+                  </a:lnTo>
+                  <a:lnTo>
+                    <a:pt x="2391712" y="426113"/>
+                  </a:lnTo>
+                  <a:lnTo>
+                    <a:pt x="2462057" y="434367"/>
+                  </a:lnTo>
+                  <a:lnTo>
+                    <a:pt x="2532401" y="442438"/>
+                  </a:lnTo>
+                  <a:lnTo>
+                    <a:pt x="2602746" y="450329"/>
+                  </a:lnTo>
+                  <a:lnTo>
+                    <a:pt x="2673090" y="458044"/>
+                  </a:lnTo>
+                  <a:lnTo>
+                    <a:pt x="2743435" y="465588"/>
+                  </a:lnTo>
+                  <a:lnTo>
+                    <a:pt x="2813779" y="472964"/>
+                  </a:lnTo>
+                  <a:lnTo>
+                    <a:pt x="2884124" y="480176"/>
+                  </a:lnTo>
+                  <a:lnTo>
+                    <a:pt x="2954468" y="487228"/>
+                  </a:lnTo>
+                  <a:lnTo>
+                    <a:pt x="3024813" y="494123"/>
+                  </a:lnTo>
+                  <a:lnTo>
+                    <a:pt x="3095157" y="500865"/>
+                  </a:lnTo>
+                  <a:lnTo>
+                    <a:pt x="3165502" y="507457"/>
+                  </a:lnTo>
+                  <a:lnTo>
+                    <a:pt x="3235846" y="513903"/>
+                  </a:lnTo>
+                  <a:lnTo>
+                    <a:pt x="3306191" y="520205"/>
+                  </a:lnTo>
+                  <a:lnTo>
+                    <a:pt x="3376535" y="526367"/>
+                  </a:lnTo>
+                  <a:lnTo>
+                    <a:pt x="3446880" y="532392"/>
+                  </a:lnTo>
+                  <a:lnTo>
+                    <a:pt x="3517224" y="538283"/>
+                  </a:lnTo>
+                  <a:lnTo>
+                    <a:pt x="3587569" y="544043"/>
+                  </a:lnTo>
+                  <a:lnTo>
+                    <a:pt x="3657913" y="549675"/>
+                  </a:lnTo>
+                  <a:lnTo>
+                    <a:pt x="3728257" y="555181"/>
+                  </a:lnTo>
+                  <a:lnTo>
+                    <a:pt x="3798602" y="560566"/>
+                  </a:lnTo>
+                  <a:lnTo>
+                    <a:pt x="3868946" y="565830"/>
+                  </a:lnTo>
+                  <a:lnTo>
+                    <a:pt x="3939291" y="570978"/>
+                  </a:lnTo>
+                  <a:lnTo>
+                    <a:pt x="4009635" y="576011"/>
+                  </a:lnTo>
+                  <a:lnTo>
+                    <a:pt x="4079980" y="580932"/>
+                  </a:lnTo>
+                  <a:lnTo>
+                    <a:pt x="4150324" y="585744"/>
+                  </a:lnTo>
+                  <a:lnTo>
+                    <a:pt x="4220669" y="590449"/>
+                  </a:lnTo>
+                  <a:lnTo>
+                    <a:pt x="4291013" y="595049"/>
+                  </a:lnTo>
+                  <a:lnTo>
+                    <a:pt x="4361358" y="599547"/>
+                  </a:lnTo>
+                  <a:lnTo>
+                    <a:pt x="4431702" y="603945"/>
+                  </a:lnTo>
+                  <a:lnTo>
+                    <a:pt x="4502047" y="608246"/>
+                  </a:lnTo>
+                  <a:lnTo>
+                    <a:pt x="4572391" y="612450"/>
+                  </a:lnTo>
+                  <a:lnTo>
+                    <a:pt x="4642736" y="616561"/>
+                  </a:lnTo>
+                  <a:lnTo>
+                    <a:pt x="4713080" y="620581"/>
+                  </a:lnTo>
+                  <a:lnTo>
+                    <a:pt x="4783425" y="624511"/>
+                  </a:lnTo>
+                  <a:lnTo>
+                    <a:pt x="4853769" y="628354"/>
+                  </a:lnTo>
+                  <a:lnTo>
+                    <a:pt x="4924114" y="632112"/>
+                  </a:lnTo>
+                  <a:lnTo>
+                    <a:pt x="4994458" y="635786"/>
+                  </a:lnTo>
+                  <a:lnTo>
+                    <a:pt x="5064803" y="639378"/>
+                  </a:lnTo>
+                  <a:lnTo>
+                    <a:pt x="5135147" y="642891"/>
+                  </a:lnTo>
+                  <a:lnTo>
+                    <a:pt x="5205492" y="646325"/>
+                  </a:lnTo>
+                  <a:lnTo>
+                    <a:pt x="5275836" y="649683"/>
+                  </a:lnTo>
+                  <a:lnTo>
+                    <a:pt x="5346181" y="652966"/>
+                  </a:lnTo>
+                  <a:lnTo>
+                    <a:pt x="5416525" y="656177"/>
+                  </a:lnTo>
+                  <a:lnTo>
+                    <a:pt x="5486870" y="659316"/>
+                  </a:lnTo>
+                  <a:lnTo>
+                    <a:pt x="5557214" y="662385"/>
+                  </a:lnTo>
+                  <a:lnTo>
+                    <a:pt x="5627559" y="665386"/>
+                  </a:lnTo>
+                  <a:lnTo>
+                    <a:pt x="5697903" y="668320"/>
+                  </a:lnTo>
+                  <a:lnTo>
+                    <a:pt x="5768248" y="671189"/>
+                  </a:lnTo>
+                  <a:lnTo>
+                    <a:pt x="5838592" y="673994"/>
+                  </a:lnTo>
+                  <a:lnTo>
+                    <a:pt x="5908937" y="676737"/>
+                  </a:lnTo>
+                  <a:lnTo>
+                    <a:pt x="5979281" y="679419"/>
+                  </a:lnTo>
+                  <a:lnTo>
+                    <a:pt x="6049626" y="682041"/>
+                  </a:lnTo>
+                  <a:lnTo>
+                    <a:pt x="6119970" y="684605"/>
+                  </a:lnTo>
+                  <a:lnTo>
+                    <a:pt x="6190315" y="687112"/>
+                  </a:lnTo>
+                  <a:lnTo>
+                    <a:pt x="6260659" y="689563"/>
+                  </a:lnTo>
+                  <a:lnTo>
+                    <a:pt x="6331004" y="691960"/>
+                  </a:lnTo>
+                  <a:lnTo>
+                    <a:pt x="6401348" y="694303"/>
+                  </a:lnTo>
+                  <a:lnTo>
+                    <a:pt x="6471693" y="696595"/>
+                  </a:lnTo>
+                  <a:lnTo>
+                    <a:pt x="6542037" y="698835"/>
+                  </a:lnTo>
+                  <a:lnTo>
+                    <a:pt x="6612382" y="701026"/>
+                  </a:lnTo>
+                  <a:lnTo>
+                    <a:pt x="6682726" y="703168"/>
+                  </a:lnTo>
+                  <a:lnTo>
+                    <a:pt x="6753071" y="705262"/>
+                  </a:lnTo>
+                  <a:lnTo>
+                    <a:pt x="6823415" y="707310"/>
+                  </a:lnTo>
+                  <a:lnTo>
+                    <a:pt x="6893760" y="709312"/>
+                  </a:lnTo>
+                  <a:lnTo>
+                    <a:pt x="6964104" y="711269"/>
+                  </a:lnTo>
+                </a:path>
+              </a:pathLst>
+            </a:custGeom>
+            <a:ln w="27101" cap="flat">
+              <a:solidFill>
+                <a:srgbClr val="FF8C00">
+                  <a:alpha val="100000"/>
+                </a:srgbClr>
+              </a:solidFill>
+              <a:prstDash val="solid"/>
+              <a:round/>
+            </a:ln>
+          </p:spPr>
+          <p:txBody>
+            <a:bodyPr/>
+            <a:lstStyle/>
+            <a:p/>
+          </p:txBody>
+        </p:sp>
+        <p:sp>
+          <p:nvSpPr>
+            <p:cNvPr id="75" name="pl75"/>
+            <p:cNvSpPr/>
+            <p:nvPr/>
+          </p:nvSpPr>
+          <p:spPr>
+            <a:xfrm>
+              <a:off x="887106" y="5294352"/>
+              <a:ext cx="7660515" cy="0"/>
+            </a:xfrm>
+            <a:custGeom>
+              <a:avLst/>
+              <a:pathLst>
+                <a:path w="7660515" h="0">
+                  <a:moveTo>
+                    <a:pt x="0" y="0"/>
+                  </a:moveTo>
+                  <a:lnTo>
+                    <a:pt x="7660515" y="0"/>
+                  </a:lnTo>
+                  <a:lnTo>
+                    <a:pt x="7660515" y="0"/>
+                  </a:lnTo>
+                </a:path>
+              </a:pathLst>
+            </a:custGeom>
+            <a:ln w="13550" cap="flat">
+              <a:solidFill>
+                <a:srgbClr val="7F7F7F">
+                  <a:alpha val="100000"/>
+                </a:srgbClr>
+              </a:solidFill>
+              <a:prstDash val="dash"/>
+              <a:round/>
+            </a:ln>
+          </p:spPr>
+          <p:txBody>
+            <a:bodyPr/>
+            <a:lstStyle/>
+            <a:p/>
+          </p:txBody>
+        </p:sp>
+        <p:sp>
+          <p:nvSpPr>
+            <p:cNvPr id="76" name="pl76"/>
+            <p:cNvSpPr/>
+            <p:nvPr/>
+          </p:nvSpPr>
+          <p:spPr>
+            <a:xfrm>
+              <a:off x="4300713" y="4336484"/>
+              <a:ext cx="0" cy="1317069"/>
+            </a:xfrm>
+            <a:custGeom>
+              <a:avLst/>
+              <a:pathLst>
+                <a:path w="0" h="1317069">
+                  <a:moveTo>
+                    <a:pt x="0" y="1317069"/>
+                  </a:moveTo>
+                  <a:lnTo>
+                    <a:pt x="0" y="0"/>
+                  </a:lnTo>
+                  <a:lnTo>
+                    <a:pt x="0" y="0"/>
+                  </a:lnTo>
+                </a:path>
+              </a:pathLst>
+            </a:custGeom>
+            <a:ln w="13550" cap="flat">
+              <a:solidFill>
+                <a:srgbClr val="666666">
+                  <a:alpha val="100000"/>
+                </a:srgbClr>
+              </a:solidFill>
+              <a:prstDash val="dot"/>
+              <a:round/>
+            </a:ln>
+          </p:spPr>
+          <p:txBody>
+            <a:bodyPr/>
+            <a:lstStyle/>
+            <a:p/>
+          </p:txBody>
+        </p:sp>
+        <p:sp>
+          <p:nvSpPr>
+            <p:cNvPr id="77" name="pl77"/>
+            <p:cNvSpPr/>
+            <p:nvPr/>
+          </p:nvSpPr>
+          <p:spPr>
+            <a:xfrm>
+              <a:off x="3103710" y="4336484"/>
+              <a:ext cx="0" cy="1317069"/>
+            </a:xfrm>
+            <a:custGeom>
+              <a:avLst/>
+              <a:pathLst>
+                <a:path w="0" h="1317069">
+                  <a:moveTo>
+                    <a:pt x="0" y="1317069"/>
+                  </a:moveTo>
+                  <a:lnTo>
+                    <a:pt x="0" y="0"/>
+                  </a:lnTo>
+                  <a:lnTo>
+                    <a:pt x="0" y="0"/>
+                  </a:lnTo>
+                </a:path>
+              </a:pathLst>
+            </a:custGeom>
+            <a:ln w="13550" cap="flat">
+              <a:solidFill>
+                <a:srgbClr val="4682B4">
+                  <a:alpha val="69803"/>
+                </a:srgbClr>
+              </a:solidFill>
+              <a:prstDash val="dash"/>
+              <a:round/>
+            </a:ln>
+          </p:spPr>
+          <p:txBody>
+            <a:bodyPr/>
+            <a:lstStyle/>
+            <a:p/>
+          </p:txBody>
+        </p:sp>
+        <p:sp>
+          <p:nvSpPr>
+            <p:cNvPr id="78" name="pl78"/>
+            <p:cNvSpPr/>
+            <p:nvPr/>
+          </p:nvSpPr>
+          <p:spPr>
+            <a:xfrm>
+              <a:off x="5504283" y="4336484"/>
+              <a:ext cx="0" cy="1317069"/>
+            </a:xfrm>
+            <a:custGeom>
+              <a:avLst/>
+              <a:pathLst>
+                <a:path w="0" h="1317069">
+                  <a:moveTo>
+                    <a:pt x="0" y="1317069"/>
+                  </a:moveTo>
+                  <a:lnTo>
+                    <a:pt x="0" y="0"/>
+                  </a:lnTo>
+                  <a:lnTo>
+                    <a:pt x="0" y="0"/>
+                  </a:lnTo>
+                </a:path>
+              </a:pathLst>
+            </a:custGeom>
+            <a:ln w="13550" cap="flat">
+              <a:solidFill>
+                <a:srgbClr val="4682B4">
+                  <a:alpha val="69803"/>
+                </a:srgbClr>
+              </a:solidFill>
+              <a:prstDash val="dash"/>
+              <a:round/>
+            </a:ln>
+          </p:spPr>
+          <p:txBody>
+            <a:bodyPr/>
+            <a:lstStyle/>
+            <a:p/>
+          </p:txBody>
+        </p:sp>
+        <p:sp>
+          <p:nvSpPr>
+            <p:cNvPr id="79" name="tx79"/>
+            <p:cNvSpPr/>
+            <p:nvPr/>
+          </p:nvSpPr>
+          <p:spPr>
+            <a:xfrm>
+              <a:off x="762297" y="5553636"/>
+              <a:ext cx="62179" cy="80101"/>
+            </a:xfrm>
+            <a:prstGeom prst="rect">
+              <a:avLst/>
+            </a:prstGeom>
+            <a:noFill/>
+          </p:spPr>
+          <p:txBody>
+            <a:bodyPr lIns="0" rIns="0" tIns="0" bIns="0" anchorCtr="1" anchor="ctr" wrap="none"/>
+            <a:lstStyle/>
+            <a:p>
+              <a:pPr algn="l" marL="0" marR="0" indent="0">
+                <a:lnSpc>
+                  <a:spcPts val="880"/>
+                </a:lnSpc>
+                <a:spcBef>
+                  <a:spcPts val="0"/>
+                </a:spcBef>
+                <a:spcAft>
+                  <a:spcPts val="0"/>
+                </a:spcAft>
+              </a:pPr>
+              <a:r>
+                <a:rPr sz="880">
+                  <a:solidFill>
+                    <a:srgbClr val="4D4D4D">
+                      <a:alpha val="100000"/>
+                    </a:srgbClr>
+                  </a:solidFill>
+                  <a:latin typeface="Helvetica"/>
+                  <a:cs typeface="Helvetica"/>
+                </a:rPr>
+                <a:t>0</a:t>
+              </a:r>
+            </a:p>
+          </p:txBody>
+        </p:sp>
+        <p:sp>
+          <p:nvSpPr>
+            <p:cNvPr id="80" name="tx80"/>
+            <p:cNvSpPr/>
+            <p:nvPr/>
+          </p:nvSpPr>
+          <p:spPr>
+            <a:xfrm>
+              <a:off x="762297" y="5254302"/>
+              <a:ext cx="62179" cy="80101"/>
+            </a:xfrm>
+            <a:prstGeom prst="rect">
+              <a:avLst/>
+            </a:prstGeom>
+            <a:noFill/>
+          </p:spPr>
+          <p:txBody>
+            <a:bodyPr lIns="0" rIns="0" tIns="0" bIns="0" anchorCtr="1" anchor="ctr" wrap="none"/>
+            <a:lstStyle/>
+            <a:p>
+              <a:pPr algn="l" marL="0" marR="0" indent="0">
+                <a:lnSpc>
+                  <a:spcPts val="880"/>
+                </a:lnSpc>
+                <a:spcBef>
+                  <a:spcPts val="0"/>
+                </a:spcBef>
+                <a:spcAft>
+                  <a:spcPts val="0"/>
+                </a:spcAft>
+              </a:pPr>
+              <a:r>
+                <a:rPr sz="880">
+                  <a:solidFill>
+                    <a:srgbClr val="4D4D4D">
+                      <a:alpha val="100000"/>
+                    </a:srgbClr>
+                  </a:solidFill>
+                  <a:latin typeface="Helvetica"/>
+                  <a:cs typeface="Helvetica"/>
+                </a:rPr>
+                <a:t>1</a:t>
+              </a:r>
+            </a:p>
+          </p:txBody>
+        </p:sp>
+        <p:sp>
+          <p:nvSpPr>
+            <p:cNvPr id="81" name="tx81"/>
+            <p:cNvSpPr/>
+            <p:nvPr/>
+          </p:nvSpPr>
+          <p:spPr>
+            <a:xfrm>
+              <a:off x="762297" y="4954968"/>
+              <a:ext cx="62179" cy="80101"/>
+            </a:xfrm>
+            <a:prstGeom prst="rect">
+              <a:avLst/>
+            </a:prstGeom>
+            <a:noFill/>
+          </p:spPr>
+          <p:txBody>
+            <a:bodyPr lIns="0" rIns="0" tIns="0" bIns="0" anchorCtr="1" anchor="ctr" wrap="none"/>
+            <a:lstStyle/>
+            <a:p>
+              <a:pPr algn="l" marL="0" marR="0" indent="0">
+                <a:lnSpc>
+                  <a:spcPts val="880"/>
+                </a:lnSpc>
+                <a:spcBef>
+                  <a:spcPts val="0"/>
+                </a:spcBef>
+                <a:spcAft>
+                  <a:spcPts val="0"/>
+                </a:spcAft>
+              </a:pPr>
+              <a:r>
+                <a:rPr sz="880">
+                  <a:solidFill>
+                    <a:srgbClr val="4D4D4D">
+                      <a:alpha val="100000"/>
+                    </a:srgbClr>
+                  </a:solidFill>
+                  <a:latin typeface="Helvetica"/>
+                  <a:cs typeface="Helvetica"/>
+                </a:rPr>
+                <a:t>2</a:t>
+              </a:r>
+            </a:p>
+          </p:txBody>
+        </p:sp>
+        <p:sp>
+          <p:nvSpPr>
+            <p:cNvPr id="82" name="tx82"/>
+            <p:cNvSpPr/>
+            <p:nvPr/>
+          </p:nvSpPr>
+          <p:spPr>
+            <a:xfrm>
+              <a:off x="762297" y="4655634"/>
+              <a:ext cx="62179" cy="80101"/>
+            </a:xfrm>
+            <a:prstGeom prst="rect">
+              <a:avLst/>
+            </a:prstGeom>
+            <a:noFill/>
+          </p:spPr>
+          <p:txBody>
+            <a:bodyPr lIns="0" rIns="0" tIns="0" bIns="0" anchorCtr="1" anchor="ctr" wrap="none"/>
+            <a:lstStyle/>
+            <a:p>
+              <a:pPr algn="l" marL="0" marR="0" indent="0">
+                <a:lnSpc>
+                  <a:spcPts val="880"/>
+                </a:lnSpc>
+                <a:spcBef>
+                  <a:spcPts val="0"/>
+                </a:spcBef>
+                <a:spcAft>
+                  <a:spcPts val="0"/>
+                </a:spcAft>
+              </a:pPr>
+              <a:r>
+                <a:rPr sz="880">
+                  <a:solidFill>
+                    <a:srgbClr val="4D4D4D">
+                      <a:alpha val="100000"/>
+                    </a:srgbClr>
+                  </a:solidFill>
+                  <a:latin typeface="Helvetica"/>
+                  <a:cs typeface="Helvetica"/>
+                </a:rPr>
+                <a:t>3</a:t>
+              </a:r>
+            </a:p>
+          </p:txBody>
+        </p:sp>
+        <p:sp>
+          <p:nvSpPr>
+            <p:cNvPr id="83" name="tx83"/>
+            <p:cNvSpPr/>
+            <p:nvPr/>
+          </p:nvSpPr>
+          <p:spPr>
+            <a:xfrm>
+              <a:off x="762297" y="4356300"/>
+              <a:ext cx="62179" cy="80101"/>
+            </a:xfrm>
+            <a:prstGeom prst="rect">
+              <a:avLst/>
+            </a:prstGeom>
+            <a:noFill/>
+          </p:spPr>
+          <p:txBody>
+            <a:bodyPr lIns="0" rIns="0" tIns="0" bIns="0" anchorCtr="1" anchor="ctr" wrap="none"/>
+            <a:lstStyle/>
+            <a:p>
+              <a:pPr algn="l" marL="0" marR="0" indent="0">
+                <a:lnSpc>
+                  <a:spcPts val="880"/>
+                </a:lnSpc>
+                <a:spcBef>
+                  <a:spcPts val="0"/>
+                </a:spcBef>
+                <a:spcAft>
+                  <a:spcPts val="0"/>
+                </a:spcAft>
+              </a:pPr>
+              <a:r>
+                <a:rPr sz="880">
+                  <a:solidFill>
+                    <a:srgbClr val="4D4D4D">
+                      <a:alpha val="100000"/>
+                    </a:srgbClr>
+                  </a:solidFill>
+                  <a:latin typeface="Helvetica"/>
+                  <a:cs typeface="Helvetica"/>
+                </a:rPr>
+                <a:t>4</a:t>
+              </a:r>
+            </a:p>
+          </p:txBody>
+        </p:sp>
+        <p:sp>
+          <p:nvSpPr>
+            <p:cNvPr id="84" name="tx84"/>
+            <p:cNvSpPr/>
+            <p:nvPr/>
+          </p:nvSpPr>
+          <p:spPr>
+            <a:xfrm>
+              <a:off x="1324230" y="5716183"/>
+              <a:ext cx="161574" cy="80101"/>
+            </a:xfrm>
+            <a:prstGeom prst="rect">
+              <a:avLst/>
+            </a:prstGeom>
+            <a:noFill/>
+          </p:spPr>
+          <p:txBody>
+            <a:bodyPr lIns="0" rIns="0" tIns="0" bIns="0" anchorCtr="1" anchor="ctr" wrap="none"/>
+            <a:lstStyle/>
+            <a:p>
+              <a:pPr algn="l" marL="0" marR="0" indent="0">
+                <a:lnSpc>
+                  <a:spcPts val="880"/>
+                </a:lnSpc>
+                <a:spcBef>
+                  <a:spcPts val="0"/>
+                </a:spcBef>
+                <a:spcAft>
+                  <a:spcPts val="0"/>
+                </a:spcAft>
+              </a:pPr>
+              <a:r>
+                <a:rPr sz="880">
+                  <a:solidFill>
+                    <a:srgbClr val="4D4D4D">
+                      <a:alpha val="100000"/>
+                    </a:srgbClr>
+                  </a:solidFill>
+                  <a:latin typeface="Helvetica"/>
+                  <a:cs typeface="Helvetica"/>
+                </a:rPr>
+                <a:t>-50</a:t>
+              </a:r>
+            </a:p>
+          </p:txBody>
+        </p:sp>
+        <p:sp>
+          <p:nvSpPr>
+            <p:cNvPr id="85" name="tx85"/>
+            <p:cNvSpPr/>
+            <p:nvPr/>
+          </p:nvSpPr>
+          <p:spPr>
+            <a:xfrm>
+              <a:off x="2179256" y="5716183"/>
+              <a:ext cx="161574" cy="80101"/>
+            </a:xfrm>
+            <a:prstGeom prst="rect">
+              <a:avLst/>
+            </a:prstGeom>
+            <a:noFill/>
+          </p:spPr>
+          <p:txBody>
+            <a:bodyPr lIns="0" rIns="0" tIns="0" bIns="0" anchorCtr="1" anchor="ctr" wrap="none"/>
+            <a:lstStyle/>
+            <a:p>
+              <a:pPr algn="l" marL="0" marR="0" indent="0">
+                <a:lnSpc>
+                  <a:spcPts val="880"/>
+                </a:lnSpc>
+                <a:spcBef>
+                  <a:spcPts val="0"/>
+                </a:spcBef>
+                <a:spcAft>
+                  <a:spcPts val="0"/>
+                </a:spcAft>
+              </a:pPr>
+              <a:r>
+                <a:rPr sz="880">
+                  <a:solidFill>
+                    <a:srgbClr val="4D4D4D">
+                      <a:alpha val="100000"/>
+                    </a:srgbClr>
+                  </a:solidFill>
+                  <a:latin typeface="Helvetica"/>
+                  <a:cs typeface="Helvetica"/>
+                </a:rPr>
+                <a:t>-40</a:t>
+              </a:r>
+            </a:p>
+          </p:txBody>
+        </p:sp>
+        <p:sp>
+          <p:nvSpPr>
+            <p:cNvPr id="86" name="tx86"/>
+            <p:cNvSpPr/>
+            <p:nvPr/>
+          </p:nvSpPr>
+          <p:spPr>
+            <a:xfrm>
+              <a:off x="3034282" y="5716183"/>
+              <a:ext cx="161574" cy="80101"/>
+            </a:xfrm>
+            <a:prstGeom prst="rect">
+              <a:avLst/>
+            </a:prstGeom>
+            <a:noFill/>
+          </p:spPr>
+          <p:txBody>
+            <a:bodyPr lIns="0" rIns="0" tIns="0" bIns="0" anchorCtr="1" anchor="ctr" wrap="none"/>
+            <a:lstStyle/>
+            <a:p>
+              <a:pPr algn="l" marL="0" marR="0" indent="0">
+                <a:lnSpc>
+                  <a:spcPts val="880"/>
+                </a:lnSpc>
+                <a:spcBef>
+                  <a:spcPts val="0"/>
+                </a:spcBef>
+                <a:spcAft>
+                  <a:spcPts val="0"/>
+                </a:spcAft>
+              </a:pPr>
+              <a:r>
+                <a:rPr sz="880">
+                  <a:solidFill>
+                    <a:srgbClr val="4D4D4D">
+                      <a:alpha val="100000"/>
+                    </a:srgbClr>
+                  </a:solidFill>
+                  <a:latin typeface="Helvetica"/>
+                  <a:cs typeface="Helvetica"/>
+                </a:rPr>
+                <a:t>-30</a:t>
+              </a:r>
+            </a:p>
+          </p:txBody>
+        </p:sp>
+        <p:sp>
+          <p:nvSpPr>
+            <p:cNvPr id="87" name="tx87"/>
+            <p:cNvSpPr/>
+            <p:nvPr/>
+          </p:nvSpPr>
+          <p:spPr>
+            <a:xfrm>
+              <a:off x="3889308" y="5716183"/>
+              <a:ext cx="161574" cy="80101"/>
+            </a:xfrm>
+            <a:prstGeom prst="rect">
+              <a:avLst/>
+            </a:prstGeom>
+            <a:noFill/>
+          </p:spPr>
+          <p:txBody>
+            <a:bodyPr lIns="0" rIns="0" tIns="0" bIns="0" anchorCtr="1" anchor="ctr" wrap="none"/>
+            <a:lstStyle/>
+            <a:p>
+              <a:pPr algn="l" marL="0" marR="0" indent="0">
+                <a:lnSpc>
+                  <a:spcPts val="880"/>
+                </a:lnSpc>
+                <a:spcBef>
+                  <a:spcPts val="0"/>
+                </a:spcBef>
+                <a:spcAft>
+                  <a:spcPts val="0"/>
+                </a:spcAft>
+              </a:pPr>
+              <a:r>
+                <a:rPr sz="880">
+                  <a:solidFill>
+                    <a:srgbClr val="4D4D4D">
+                      <a:alpha val="100000"/>
+                    </a:srgbClr>
+                  </a:solidFill>
+                  <a:latin typeface="Helvetica"/>
+                  <a:cs typeface="Helvetica"/>
+                </a:rPr>
+                <a:t>-20</a:t>
+              </a:r>
+            </a:p>
+          </p:txBody>
+        </p:sp>
+        <p:sp>
+          <p:nvSpPr>
+            <p:cNvPr id="88" name="tx88"/>
+            <p:cNvSpPr/>
+            <p:nvPr/>
+          </p:nvSpPr>
+          <p:spPr>
+            <a:xfrm>
+              <a:off x="4744334" y="5716183"/>
+              <a:ext cx="161574" cy="80101"/>
+            </a:xfrm>
+            <a:prstGeom prst="rect">
+              <a:avLst/>
+            </a:prstGeom>
+            <a:noFill/>
+          </p:spPr>
+          <p:txBody>
+            <a:bodyPr lIns="0" rIns="0" tIns="0" bIns="0" anchorCtr="1" anchor="ctr" wrap="none"/>
+            <a:lstStyle/>
+            <a:p>
+              <a:pPr algn="l" marL="0" marR="0" indent="0">
+                <a:lnSpc>
+                  <a:spcPts val="880"/>
+                </a:lnSpc>
+                <a:spcBef>
+                  <a:spcPts val="0"/>
+                </a:spcBef>
+                <a:spcAft>
+                  <a:spcPts val="0"/>
+                </a:spcAft>
+              </a:pPr>
+              <a:r>
+                <a:rPr sz="880">
+                  <a:solidFill>
+                    <a:srgbClr val="4D4D4D">
+                      <a:alpha val="100000"/>
+                    </a:srgbClr>
+                  </a:solidFill>
+                  <a:latin typeface="Helvetica"/>
+                  <a:cs typeface="Helvetica"/>
+                </a:rPr>
+                <a:t>-10</a:t>
+              </a:r>
+            </a:p>
+          </p:txBody>
+        </p:sp>
+        <p:sp>
+          <p:nvSpPr>
+            <p:cNvPr id="89" name="tx89"/>
+            <p:cNvSpPr/>
+            <p:nvPr/>
+          </p:nvSpPr>
+          <p:spPr>
+            <a:xfrm>
+              <a:off x="5649057" y="5716183"/>
+              <a:ext cx="62179" cy="80101"/>
+            </a:xfrm>
+            <a:prstGeom prst="rect">
+              <a:avLst/>
+            </a:prstGeom>
+            <a:noFill/>
+          </p:spPr>
+          <p:txBody>
+            <a:bodyPr lIns="0" rIns="0" tIns="0" bIns="0" anchorCtr="1" anchor="ctr" wrap="none"/>
+            <a:lstStyle/>
+            <a:p>
+              <a:pPr algn="l" marL="0" marR="0" indent="0">
+                <a:lnSpc>
+                  <a:spcPts val="880"/>
+                </a:lnSpc>
+                <a:spcBef>
+                  <a:spcPts val="0"/>
+                </a:spcBef>
+                <a:spcAft>
+                  <a:spcPts val="0"/>
+                </a:spcAft>
+              </a:pPr>
+              <a:r>
+                <a:rPr sz="880">
+                  <a:solidFill>
+                    <a:srgbClr val="4D4D4D">
+                      <a:alpha val="100000"/>
+                    </a:srgbClr>
+                  </a:solidFill>
+                  <a:latin typeface="Helvetica"/>
+                  <a:cs typeface="Helvetica"/>
+                </a:rPr>
+                <a:t>0</a:t>
+              </a:r>
+            </a:p>
+          </p:txBody>
+        </p:sp>
+        <p:sp>
+          <p:nvSpPr>
+            <p:cNvPr id="90" name="tx90"/>
+            <p:cNvSpPr/>
+            <p:nvPr/>
+          </p:nvSpPr>
+          <p:spPr>
+            <a:xfrm>
+              <a:off x="6472994" y="5716183"/>
+              <a:ext cx="124358" cy="80101"/>
+            </a:xfrm>
+            <a:prstGeom prst="rect">
+              <a:avLst/>
+            </a:prstGeom>
+            <a:noFill/>
+          </p:spPr>
+          <p:txBody>
+            <a:bodyPr lIns="0" rIns="0" tIns="0" bIns="0" anchorCtr="1" anchor="ctr" wrap="none"/>
+            <a:lstStyle/>
+            <a:p>
+              <a:pPr algn="l" marL="0" marR="0" indent="0">
+                <a:lnSpc>
+                  <a:spcPts val="880"/>
+                </a:lnSpc>
+                <a:spcBef>
+                  <a:spcPts val="0"/>
+                </a:spcBef>
+                <a:spcAft>
+                  <a:spcPts val="0"/>
+                </a:spcAft>
+              </a:pPr>
+              <a:r>
+                <a:rPr sz="880">
+                  <a:solidFill>
+                    <a:srgbClr val="4D4D4D">
+                      <a:alpha val="100000"/>
+                    </a:srgbClr>
+                  </a:solidFill>
+                  <a:latin typeface="Helvetica"/>
+                  <a:cs typeface="Helvetica"/>
+                </a:rPr>
+                <a:t>10</a:t>
+              </a:r>
+            </a:p>
+          </p:txBody>
+        </p:sp>
+        <p:sp>
+          <p:nvSpPr>
+            <p:cNvPr id="91" name="tx91"/>
+            <p:cNvSpPr/>
+            <p:nvPr/>
+          </p:nvSpPr>
+          <p:spPr>
+            <a:xfrm>
+              <a:off x="7328020" y="5716183"/>
+              <a:ext cx="124358" cy="80101"/>
+            </a:xfrm>
+            <a:prstGeom prst="rect">
+              <a:avLst/>
+            </a:prstGeom>
+            <a:noFill/>
+          </p:spPr>
+          <p:txBody>
+            <a:bodyPr lIns="0" rIns="0" tIns="0" bIns="0" anchorCtr="1" anchor="ctr" wrap="none"/>
+            <a:lstStyle/>
+            <a:p>
+              <a:pPr algn="l" marL="0" marR="0" indent="0">
+                <a:lnSpc>
+                  <a:spcPts val="880"/>
+                </a:lnSpc>
+                <a:spcBef>
+                  <a:spcPts val="0"/>
+                </a:spcBef>
+                <a:spcAft>
+                  <a:spcPts val="0"/>
+                </a:spcAft>
+              </a:pPr>
+              <a:r>
+                <a:rPr sz="880">
+                  <a:solidFill>
+                    <a:srgbClr val="4D4D4D">
+                      <a:alpha val="100000"/>
+                    </a:srgbClr>
+                  </a:solidFill>
+                  <a:latin typeface="Helvetica"/>
+                  <a:cs typeface="Helvetica"/>
+                </a:rPr>
+                <a:t>20</a:t>
+              </a:r>
+            </a:p>
+          </p:txBody>
+        </p:sp>
+        <p:sp>
+          <p:nvSpPr>
+            <p:cNvPr id="92" name="tx92"/>
+            <p:cNvSpPr/>
+            <p:nvPr/>
+          </p:nvSpPr>
+          <p:spPr>
+            <a:xfrm>
+              <a:off x="8183046" y="5716183"/>
+              <a:ext cx="124358" cy="80101"/>
+            </a:xfrm>
+            <a:prstGeom prst="rect">
+              <a:avLst/>
+            </a:prstGeom>
+            <a:noFill/>
+          </p:spPr>
+          <p:txBody>
+            <a:bodyPr lIns="0" rIns="0" tIns="0" bIns="0" anchorCtr="1" anchor="ctr" wrap="none"/>
+            <a:lstStyle/>
+            <a:p>
+              <a:pPr algn="l" marL="0" marR="0" indent="0">
+                <a:lnSpc>
+                  <a:spcPts val="880"/>
+                </a:lnSpc>
+                <a:spcBef>
+                  <a:spcPts val="0"/>
+                </a:spcBef>
+                <a:spcAft>
+                  <a:spcPts val="0"/>
+                </a:spcAft>
+              </a:pPr>
+              <a:r>
+                <a:rPr sz="880">
+                  <a:solidFill>
+                    <a:srgbClr val="4D4D4D">
+                      <a:alpha val="100000"/>
+                    </a:srgbClr>
+                  </a:solidFill>
+                  <a:latin typeface="Helvetica"/>
+                  <a:cs typeface="Helvetica"/>
+                </a:rPr>
+                <a:t>30</a:t>
+              </a:r>
+            </a:p>
+          </p:txBody>
+        </p:sp>
+        <p:sp>
+          <p:nvSpPr>
+            <p:cNvPr id="93" name="tx93"/>
+            <p:cNvSpPr/>
+            <p:nvPr/>
+          </p:nvSpPr>
+          <p:spPr>
+            <a:xfrm>
+              <a:off x="1561815" y="5855859"/>
+              <a:ext cx="6311097" cy="100218"/>
+            </a:xfrm>
+            <a:prstGeom prst="rect">
+              <a:avLst/>
+            </a:prstGeom>
+            <a:noFill/>
+          </p:spPr>
+          <p:txBody>
+            <a:bodyPr lIns="0" rIns="0" tIns="0" bIns="0" anchorCtr="1" anchor="ctr" wrap="none"/>
+            <a:lstStyle/>
+            <a:p>
+              <a:pPr algn="l" marL="0" marR="0" indent="0">
+                <a:lnSpc>
+                  <a:spcPts val="1100"/>
+                </a:lnSpc>
+                <a:spcBef>
+                  <a:spcPts val="0"/>
+                </a:spcBef>
+                <a:spcAft>
+                  <a:spcPts val="0"/>
+                </a:spcAft>
+              </a:pPr>
+              <a:r>
+                <a:rPr sz="1100">
+                  <a:solidFill>
+                    <a:srgbClr val="000000">
+                      <a:alpha val="100000"/>
+                    </a:srgbClr>
+                  </a:solidFill>
+                  <a:latin typeface="Helvetica"/>
+                  <a:cs typeface="Helvetica"/>
+                </a:rPr>
+                <a:t>Sensitivity eGFR Difference (%): 100 × (CKD-EPI 2012 CysC − CKD-EPI 2021 Cr) / CKD-EPI 2021 Cr</a:t>
+              </a:r>
+            </a:p>
+          </p:txBody>
+        </p:sp>
+        <p:sp>
+          <p:nvSpPr>
+            <p:cNvPr id="94" name="tx94"/>
+            <p:cNvSpPr/>
+            <p:nvPr/>
+          </p:nvSpPr>
+          <p:spPr>
+            <a:xfrm rot="-5400000">
+              <a:off x="138035" y="4944909"/>
+              <a:ext cx="1016904" cy="100218"/>
+            </a:xfrm>
+            <a:prstGeom prst="rect">
+              <a:avLst/>
+            </a:prstGeom>
+            <a:noFill/>
+          </p:spPr>
+          <p:txBody>
+            <a:bodyPr lIns="0" rIns="0" tIns="0" bIns="0" anchorCtr="1" anchor="ctr" wrap="none"/>
+            <a:lstStyle/>
+            <a:p>
+              <a:pPr algn="l" marL="0" marR="0" indent="0">
+                <a:lnSpc>
+                  <a:spcPts val="1100"/>
+                </a:lnSpc>
+                <a:spcBef>
+                  <a:spcPts val="0"/>
+                </a:spcBef>
+                <a:spcAft>
+                  <a:spcPts val="0"/>
+                </a:spcAft>
+              </a:pPr>
+              <a:r>
+                <a:rPr sz="1100">
+                  <a:solidFill>
+                    <a:srgbClr val="000000">
+                      <a:alpha val="100000"/>
+                    </a:srgbClr>
+                  </a:solidFill>
+                  <a:latin typeface="Helvetica"/>
+                  <a:cs typeface="Helvetica"/>
+                </a:rPr>
+                <a:t>subHR (95% CI)</a:t>
+              </a:r>
+            </a:p>
+          </p:txBody>
+        </p:sp>
+        <p:sp>
+          <p:nvSpPr>
+            <p:cNvPr id="95" name="tx95"/>
+            <p:cNvSpPr/>
+            <p:nvPr/>
+          </p:nvSpPr>
+          <p:spPr>
+            <a:xfrm>
+              <a:off x="887106" y="4159544"/>
+              <a:ext cx="6959864" cy="82021"/>
+            </a:xfrm>
+            <a:prstGeom prst="rect">
+              <a:avLst/>
+            </a:prstGeom>
+            <a:noFill/>
+          </p:spPr>
+          <p:txBody>
+            <a:bodyPr lIns="0" rIns="0" tIns="0" bIns="0" anchorCtr="1" anchor="ctr" wrap="none"/>
+            <a:lstStyle/>
+            <a:p>
+              <a:pPr algn="l" marL="0" marR="0" indent="0">
+                <a:lnSpc>
+                  <a:spcPts val="900"/>
+                </a:lnSpc>
+                <a:spcBef>
+                  <a:spcPts val="0"/>
+                </a:spcBef>
+                <a:spcAft>
+                  <a:spcPts val="0"/>
+                </a:spcAft>
+              </a:pPr>
+              <a:r>
+                <a:rPr sz="900">
+                  <a:solidFill>
+                    <a:srgbClr val="404040">
+                      <a:alpha val="100000"/>
+                    </a:srgbClr>
+                  </a:solidFill>
+                  <a:latin typeface="Helvetica"/>
+                  <a:cs typeface="Helvetica"/>
+                </a:rPr>
+                <a:t>subHR per 10 % decline: 1.31 (1.13-1.52), p_Bonf = 0.002 (n = 6)  |  per IQR decline (Δ = 28.1 %): 2.15 (1.42-3.27)  |  IQR: [-30.1, -2.1] %</a:t>
+              </a:r>
+            </a:p>
+          </p:txBody>
+        </p:sp>
+        <p:sp>
+          <p:nvSpPr>
+            <p:cNvPr id="96" name="tx96"/>
+            <p:cNvSpPr/>
+            <p:nvPr/>
+          </p:nvSpPr>
+          <p:spPr>
+            <a:xfrm>
+              <a:off x="887106" y="3932770"/>
               <a:ext cx="4961534" cy="120152"/>
             </a:xfrm>
             <a:prstGeom prst="rect">
